--- a/happicare-presentation/HappiCare_방식비교_팀발표.pptx
+++ b/happicare-presentation/HappiCare_방식비교_팀발표.pptx
@@ -17,9 +17,11 @@
     <p:sldId id="265" r:id="rId11"/>
     <p:sldId id="266" r:id="rId12"/>
     <p:sldId id="267" r:id="rId13"/>
+    <p:sldId id="268" r:id="rId14"/>
+    <p:sldId id="269" r:id="rId15"/>
   </p:sldIdLst>
   <p:notesMasterIdLst>
-    <p:notesMasterId r:id="rId14"/>
+    <p:notesMasterId r:id="rId16"/>
   </p:notesMasterIdLst>
   <p:sldSz cx="12192000" cy="6858000"/>
   <p:notesSz cx="6858000" cy="12192000"/>
@@ -1171,7 +1173,7 @@
           <a:p>
             <a:r>
               <a:rPr lang="en-US" dirty="0"/>
-              <a:t>결론 슬라이드입니다. 정답은 목적에 따라 달라집니다. 화면 이식이면 happicare 방식, 새 서비스면 front2 방식입니다.</a:t>
+              <a:t>퍼블리셔는 tokens.css를 한 번 열어 보면 구조가 바로 이해됩니다. 12C 점검 보고서의 D1부터 D3가 퍼블리셔 판단을 기다리는 항목입니다. 병원 화면 12개 상태는 시안이 없어 Design.md 규칙으로 점검했습니다.</a:t>
             </a:r>
             <a:endParaRPr lang="en-US" dirty="0"/>
           </a:p>
@@ -1259,7 +1261,7 @@
           <a:p>
             <a:r>
               <a:rPr lang="en-US" dirty="0"/>
-              <a:t>마지막으로 합치는 방향 제안과 직군별 요청을 정리합니다. 발표 후 각 직군에서 한 가지씩 답을 받으면 좋겠습니다.</a:t>
+              <a:t>개발자에게는 두 가지 구조 아이디어를 가져가시길 권합니다. 하나는 happicare의 저장소 추상화, 다른 하나는 front2의 모듈 경계와 테스트 밀도입니다. 위험 항목은 합치기 전에 정리해야 합니다.</a:t>
             </a:r>
             <a:endParaRPr lang="en-US" dirty="0"/>
           </a:p>
@@ -1347,7 +1349,7 @@
           <a:p>
             <a:r>
               <a:rPr lang="en-US" dirty="0"/>
-              <a:t>질문을 받고, 직군별로 요청 사항에 대한 의견을 한 가지씩 받아 마무리합니다.</a:t>
+              <a:t>결론 슬라이드입니다. 정답은 목적에 따라 달라집니다. 화면 이식이면 happicare 방식, 새 서비스면 front2 방식입니다.</a:t>
             </a:r>
             <a:endParaRPr lang="en-US" dirty="0"/>
           </a:p>
@@ -1371,6 +1373,182 @@
             <a:fld id="{F7021451-1387-4CA6-816F-3879F97B5CBC}" type="slidenum">
               <a:rPr lang="en-US"/>
               <a:t>12</a:t>
+            </a:fld>
+            <a:endParaRPr lang="en-US"/>
+          </a:p>
+        </p:txBody>
+      </p:sp>
+    </p:spTree>
+    <p:extLst>
+      <p:ext uri="{BB962C8B-B14F-4D97-AF65-F5344CB8AC3E}">
+        <p14:creationId xmlns:p14="http://schemas.microsoft.com/office/powerpoint/2010/main" val="1024086991"/>
+      </p:ext>
+    </p:extLst>
+  </p:cSld>
+  <p:clrMapOvr>
+    <a:masterClrMapping/>
+  </p:clrMapOvr>
+</p:notes>
+</file>
+
+<file path=ppt/notesSlides/notesSlide13.xml><?xml version="1.0" encoding="utf-8"?>
+<p:notes xmlns:a="http://schemas.openxmlformats.org/drawingml/2006/main" xmlns:r="http://schemas.openxmlformats.org/officeDocument/2006/relationships" xmlns:p="http://schemas.openxmlformats.org/presentationml/2006/main">
+  <p:cSld>
+    <p:spTree>
+      <p:nvGrpSpPr>
+        <p:cNvPr id="1" name=""/>
+        <p:cNvGrpSpPr/>
+        <p:nvPr/>
+      </p:nvGrpSpPr>
+      <p:grpSpPr>
+        <a:xfrm>
+          <a:off x="0" y="0"/>
+          <a:ext cx="0" cy="0"/>
+          <a:chOff x="0" y="0"/>
+          <a:chExt cx="0" cy="0"/>
+        </a:xfrm>
+      </p:grpSpPr>
+      <p:sp>
+        <p:nvSpPr>
+          <p:cNvPr id="2" name="Slide Image Placeholder 1"/>
+          <p:cNvSpPr>
+            <a:spLocks noGrp="1" noRot="1" noChangeAspect="1"/>
+          </p:cNvSpPr>
+          <p:nvPr>
+            <p:ph type="sldImg"/>
+          </p:nvPr>
+        </p:nvSpPr>
+        <p:spPr/>
+      </p:sp>
+      <p:sp>
+        <p:nvSpPr>
+          <p:cNvPr id="3" name="Notes Placeholder 2"/>
+          <p:cNvSpPr>
+            <a:spLocks noGrp="1"/>
+          </p:cNvSpPr>
+          <p:nvPr>
+            <p:ph type="body" idx="1"/>
+          </p:nvPr>
+        </p:nvSpPr>
+        <p:spPr/>
+        <p:txBody>
+          <a:bodyPr/>
+          <a:lstStyle/>
+          <a:p>
+            <a:r>
+              <a:rPr lang="en-US" dirty="0"/>
+              <a:t>마지막으로 합치는 방향 제안과 직군별 요청을 정리합니다. 발표 후 각 직군에서 한 가지씩 답을 받으면 좋겠습니다.</a:t>
+            </a:r>
+            <a:endParaRPr lang="en-US" dirty="0"/>
+          </a:p>
+        </p:txBody>
+      </p:sp>
+      <p:sp>
+        <p:nvSpPr>
+          <p:cNvPr id="4" name="Slide Number Placeholder 3"/>
+          <p:cNvSpPr>
+            <a:spLocks noGrp="1"/>
+          </p:cNvSpPr>
+          <p:nvPr>
+            <p:ph type="sldNum" sz="quarter" idx="10"/>
+          </p:nvPr>
+        </p:nvSpPr>
+        <p:spPr/>
+        <p:txBody>
+          <a:bodyPr/>
+          <a:lstStyle/>
+          <a:p>
+            <a:fld id="{F7021451-1387-4CA6-816F-3879F97B5CBC}" type="slidenum">
+              <a:rPr lang="en-US"/>
+              <a:t>13</a:t>
+            </a:fld>
+            <a:endParaRPr lang="en-US"/>
+          </a:p>
+        </p:txBody>
+      </p:sp>
+    </p:spTree>
+    <p:extLst>
+      <p:ext uri="{BB962C8B-B14F-4D97-AF65-F5344CB8AC3E}">
+        <p14:creationId xmlns:p14="http://schemas.microsoft.com/office/powerpoint/2010/main" val="1024086991"/>
+      </p:ext>
+    </p:extLst>
+  </p:cSld>
+  <p:clrMapOvr>
+    <a:masterClrMapping/>
+  </p:clrMapOvr>
+</p:notes>
+</file>
+
+<file path=ppt/notesSlides/notesSlide14.xml><?xml version="1.0" encoding="utf-8"?>
+<p:notes xmlns:a="http://schemas.openxmlformats.org/drawingml/2006/main" xmlns:r="http://schemas.openxmlformats.org/officeDocument/2006/relationships" xmlns:p="http://schemas.openxmlformats.org/presentationml/2006/main">
+  <p:cSld>
+    <p:spTree>
+      <p:nvGrpSpPr>
+        <p:cNvPr id="1" name=""/>
+        <p:cNvGrpSpPr/>
+        <p:nvPr/>
+      </p:nvGrpSpPr>
+      <p:grpSpPr>
+        <a:xfrm>
+          <a:off x="0" y="0"/>
+          <a:ext cx="0" cy="0"/>
+          <a:chOff x="0" y="0"/>
+          <a:chExt cx="0" cy="0"/>
+        </a:xfrm>
+      </p:grpSpPr>
+      <p:sp>
+        <p:nvSpPr>
+          <p:cNvPr id="2" name="Slide Image Placeholder 1"/>
+          <p:cNvSpPr>
+            <a:spLocks noGrp="1" noRot="1" noChangeAspect="1"/>
+          </p:cNvSpPr>
+          <p:nvPr>
+            <p:ph type="sldImg"/>
+          </p:nvPr>
+        </p:nvSpPr>
+        <p:spPr/>
+      </p:sp>
+      <p:sp>
+        <p:nvSpPr>
+          <p:cNvPr id="3" name="Notes Placeholder 2"/>
+          <p:cNvSpPr>
+            <a:spLocks noGrp="1"/>
+          </p:cNvSpPr>
+          <p:nvPr>
+            <p:ph type="body" idx="1"/>
+          </p:nvPr>
+        </p:nvSpPr>
+        <p:spPr/>
+        <p:txBody>
+          <a:bodyPr/>
+          <a:lstStyle/>
+          <a:p>
+            <a:r>
+              <a:rPr lang="en-US" dirty="0"/>
+              <a:t>질문을 받고, 직군별로 요청 사항에 대한 의견을 한 가지씩 받아 마무리합니다.</a:t>
+            </a:r>
+            <a:endParaRPr lang="en-US" dirty="0"/>
+          </a:p>
+        </p:txBody>
+      </p:sp>
+      <p:sp>
+        <p:nvSpPr>
+          <p:cNvPr id="4" name="Slide Number Placeholder 3"/>
+          <p:cNvSpPr>
+            <a:spLocks noGrp="1"/>
+          </p:cNvSpPr>
+          <p:nvPr>
+            <p:ph type="sldNum" sz="quarter" idx="10"/>
+          </p:nvPr>
+        </p:nvSpPr>
+        <p:spPr/>
+        <p:txBody>
+          <a:bodyPr/>
+          <a:lstStyle/>
+          <a:p>
+            <a:fld id="{F7021451-1387-4CA6-816F-3879F97B5CBC}" type="slidenum">
+              <a:rPr lang="en-US"/>
+              <a:t>14</a:t>
             </a:fld>
             <a:endParaRPr lang="en-US"/>
           </a:p>
@@ -1875,7 +2053,7 @@
           <a:p>
             <a:r>
               <a:rPr lang="en-US" dirty="0"/>
-              <a:t>기획 직군에게는 Concept, Design, ToDo 세 문서가 AI 협업의 핵심 자산이라는 점을 강조합니다. 오른쪽 여섯 항목이 단계 0이며, 이게 정해져야 운영 사용자가 로그인할 수 있습니다.</a:t>
+              <a:t>네 저장소의 관계입니다. happicare는 고객 화면, admin_version2는 관리자 화면 프로토타입, front2는 서버까지 있는 풀스택입니다. admin_version2와 front2가 같은 관리자 화면 명세를 다루고 시기도 앞서므로 프로토타입에서 풀스택으로 발전한 것으로 보이지만 코드를 가져온 흔적은 확인하지 못했습니다. 실제 관계는 작성자에게 확인이 필요하다고 말해 주세요. happicare_admin은 거의 비어 있는 시작 저장소입니다.</a:t>
             </a:r>
             <a:endParaRPr lang="en-US" dirty="0"/>
           </a:p>
@@ -1963,7 +2141,7 @@
           <a:p>
             <a:r>
               <a:rPr lang="en-US" dirty="0"/>
-              <a:t>퍼블리셔는 tokens.css를 한 번 열어 보면 구조가 바로 이해됩니다. 12C 점검 보고서의 D1부터 D3가 퍼블리셔 판단을 기다리는 항목입니다. 병원 화면 12개 상태는 시안이 없어 Design.md 규칙으로 점검했습니다.</a:t>
+              <a:t>admin_version2의 핵심 아이디어입니다. 화면은 mock 함수를 부르지 않고 실제 api 경로로 요청을 보냅니다. MSW가 이를 가로채 localStorage에 저장합니다. 환경변수 VITE_USE_MOCKS를 false로 바꾸면 화면 수정 없이 실제 백엔드로 전환됩니다. mockDelay와 mockStatus 주소 옵션으로 로딩과 오류 화면도 시연할 수 있습니다. 인증, 업로드, 알림, 계정 동기화는 의도적으로 mock으로 남겨 두었습니다.</a:t>
             </a:r>
             <a:endParaRPr lang="en-US" dirty="0"/>
           </a:p>
@@ -2051,7 +2229,7 @@
           <a:p>
             <a:r>
               <a:rPr lang="en-US" dirty="0"/>
-              <a:t>개발자에게는 두 가지 구조 아이디어를 가져가시길 권합니다. 하나는 happicare의 저장소 추상화, 다른 하나는 front2의 모듈 경계와 테스트 밀도입니다. 위험 항목은 합치기 전에 정리해야 합니다.</a:t>
+              <a:t>기획 직군에게는 Concept, Design, ToDo 세 문서가 AI 협업의 핵심 자산이라는 점을 강조합니다. 오른쪽 여섯 항목이 단계 0이며, 이게 정해져야 운영 사용자가 로그인할 수 있습니다.</a:t>
             </a:r>
             <a:endParaRPr lang="en-US" dirty="0"/>
           </a:p>
@@ -2765,7 +2943,7 @@
                 <a:ea typeface="Malgun Gothic" pitchFamily="34" charset="-122"/>
                 <a:cs typeface="Malgun Gothic" pitchFamily="34" charset="-120"/>
               </a:rPr>
-              <a:t>두 가지 바이브코딩 방식</a:t>
+              <a:t>서로 다른 바이브코딩 방식</a:t>
             </a:r>
             <a:endParaRPr lang="en-US" sz="4800" dirty="0"/>
           </a:p>
@@ -2804,7 +2982,7 @@
                 <a:ea typeface="Malgun Gothic" pitchFamily="34" charset="-122"/>
                 <a:cs typeface="Malgun Gothic" pitchFamily="34" charset="-120"/>
               </a:rPr>
-              <a:t>happicare  vs  happicare_front2</a:t>
+              <a:t>happicare  ·  happicare_admin_version2  ·  happicare_front2</a:t>
             </a:r>
             <a:endParaRPr lang="en-US" sz="2000" dirty="0"/>
           </a:p>
@@ -2885,7 +3063,7 @@
                 <a:ea typeface="Malgun Gothic" pitchFamily="34" charset="-122"/>
                 <a:cs typeface="Malgun Gothic" pitchFamily="34" charset="-120"/>
               </a:rPr>
-              <a:t>어떤 방식을 언제 쓸까</a:t>
+              <a:t>웹퍼블리셔: 토큰과 접근성이 자산입니다</a:t>
             </a:r>
             <a:endParaRPr lang="en-US" sz="3200" dirty="0"/>
           </a:p>
@@ -2900,19 +3078,19 @@
         <p:spPr>
           <a:xfrm>
             <a:off x="548640" y="1463040"/>
-            <a:ext cx="11064240" cy="914400"/>
+            <a:ext cx="3474720" cy="4206240"/>
           </a:xfrm>
           <a:prstGeom prst="roundRect">
             <a:avLst>
-              <a:gd name="adj" fmla="val 12000"/>
+              <a:gd name="adj" fmla="val 3158"/>
             </a:avLst>
           </a:prstGeom>
           <a:solidFill>
-            <a:srgbClr val="F4F6F7"/>
+            <a:srgbClr val="EAF8EA"/>
           </a:solidFill>
           <a:ln w="12700">
             <a:solidFill>
-              <a:srgbClr val="F4F6F7"/>
+              <a:srgbClr val="EAF8EA"/>
             </a:solidFill>
             <a:prstDash val="solid"/>
           </a:ln>
@@ -2926,8 +3104,8 @@
         </p:nvSpPr>
         <p:spPr>
           <a:xfrm>
-            <a:off x="822960" y="1463040"/>
-            <a:ext cx="4206240" cy="914400"/>
+            <a:off x="822960" y="1600200"/>
+            <a:ext cx="2926080" cy="365760"/>
           </a:xfrm>
           <a:prstGeom prst="rect">
             <a:avLst/>
@@ -2936,7 +3114,7 @@
           <a:ln/>
         </p:spPr>
         <p:txBody>
-          <a:bodyPr wrap="square" lIns="0" tIns="0" rIns="0" bIns="0" rtlCol="0" anchor="ctr"/>
+          <a:bodyPr wrap="square" lIns="0" tIns="0" rIns="0" bIns="0" rtlCol="0" anchor="t"/>
           <a:lstStyle/>
           <a:p>
             <a:pPr indent="0" marL="0">
@@ -2945,40 +3123,125 @@
             <a:r>
               <a:rPr lang="en-US" sz="1800" b="1" dirty="0">
                 <a:solidFill>
+                  <a:srgbClr val="00B80C"/>
+                </a:solidFill>
+                <a:latin typeface="Malgun Gothic" pitchFamily="34" charset="0"/>
+                <a:ea typeface="Malgun Gothic" pitchFamily="34" charset="-122"/>
+                <a:cs typeface="Malgun Gothic" pitchFamily="34" charset="-120"/>
+              </a:rPr>
+              <a:t>먼저 볼 것</a:t>
+            </a:r>
+            <a:endParaRPr lang="en-US" sz="1800" dirty="0"/>
+          </a:p>
+        </p:txBody>
+      </p:sp>
+      <p:sp>
+        <p:nvSpPr>
+          <p:cNvPr id="6" name="Text 3"/>
+          <p:cNvSpPr txBox="1"/>
+          <p:nvPr/>
+        </p:nvSpPr>
+        <p:spPr>
+          <a:xfrm>
+            <a:off x="822960" y="2103120"/>
+            <a:ext cx="2926080" cy="3383280"/>
+          </a:xfrm>
+          <a:prstGeom prst="rect">
+            <a:avLst/>
+          </a:prstGeom>
+          <a:noFill/>
+          <a:ln/>
+        </p:spPr>
+        <p:txBody>
+          <a:bodyPr wrap="square" lIns="0" tIns="0" rIns="0" bIns="0" rtlCol="0" anchor="t"/>
+          <a:lstStyle/>
+          <a:p>
+            <a:pPr marL="342900" indent="-342900">
+              <a:spcAft>
+                <a:spcPts val="600"/>
+              </a:spcAft>
+              <a:buSzPct val="100000"/>
+              <a:buChar char="•"/>
+            </a:pPr>
+            <a:r>
+              <a:rPr lang="en-US" sz="1600" dirty="0">
+                <a:solidFill>
                   <a:srgbClr val="1B2A22"/>
                 </a:solidFill>
                 <a:latin typeface="Malgun Gothic" pitchFamily="34" charset="0"/>
                 <a:ea typeface="Malgun Gothic" pitchFamily="34" charset="-122"/>
                 <a:cs typeface="Malgun Gothic" pitchFamily="34" charset="-120"/>
               </a:rPr>
-              <a:t>이미 있는 화면을 React로 옮긴다</a:t>
-            </a:r>
-            <a:endParaRPr lang="en-US" sz="1800" dirty="0"/>
-          </a:p>
-        </p:txBody>
-      </p:sp>
-      <p:sp>
-        <p:nvSpPr>
-          <p:cNvPr id="6" name="Shape 3"/>
+              <a:t>styles/tokens.css: 색·글꼴·간격 변수</a:t>
+            </a:r>
+            <a:endParaRPr lang="en-US" sz="1600" dirty="0"/>
+          </a:p>
+          <a:p>
+            <a:pPr marL="342900" indent="-342900">
+              <a:spcAft>
+                <a:spcPts val="600"/>
+              </a:spcAft>
+              <a:buSzPct val="100000"/>
+              <a:buChar char="•"/>
+            </a:pPr>
+            <a:r>
+              <a:rPr lang="en-US" sz="1600" dirty="0">
+                <a:solidFill>
+                  <a:srgbClr val="1B2A22"/>
+                </a:solidFill>
+                <a:latin typeface="Malgun Gothic" pitchFamily="34" charset="0"/>
+                <a:ea typeface="Malgun Gothic" pitchFamily="34" charset="-122"/>
+                <a:cs typeface="Malgun Gothic" pitchFamily="34" charset="-120"/>
+              </a:rPr>
+              <a:t>docs/quality/12c-screen-audit.md</a:t>
+            </a:r>
+            <a:endParaRPr lang="en-US" sz="1600" dirty="0"/>
+          </a:p>
+          <a:p>
+            <a:pPr marL="342900" indent="-342900">
+              <a:spcAft>
+                <a:spcPts val="600"/>
+              </a:spcAft>
+              <a:buSzPct val="100000"/>
+              <a:buChar char="•"/>
+            </a:pPr>
+            <a:r>
+              <a:rPr lang="en-US" sz="1600" dirty="0">
+                <a:solidFill>
+                  <a:srgbClr val="1B2A22"/>
+                </a:solidFill>
+                <a:latin typeface="Malgun Gothic" pitchFamily="34" charset="0"/>
+                <a:ea typeface="Malgun Gothic" pitchFamily="34" charset="-122"/>
+                <a:cs typeface="Malgun Gothic" pitchFamily="34" charset="-120"/>
+              </a:rPr>
+              <a:t>happicare/public/legacy: 원본 퍼블리싱</a:t>
+            </a:r>
+            <a:endParaRPr lang="en-US" sz="1600" dirty="0"/>
+          </a:p>
+        </p:txBody>
+      </p:sp>
+      <p:sp>
+        <p:nvSpPr>
+          <p:cNvPr id="7" name="Shape 4"/>
           <p:cNvSpPr/>
           <p:nvPr/>
         </p:nvSpPr>
         <p:spPr>
           <a:xfrm>
-            <a:off x="5212080" y="1645920"/>
-            <a:ext cx="2103120" cy="548640"/>
+            <a:off x="4206240" y="1463040"/>
+            <a:ext cx="3566160" cy="4206240"/>
           </a:xfrm>
           <a:prstGeom prst="roundRect">
             <a:avLst>
-              <a:gd name="adj" fmla="val 50000"/>
+              <a:gd name="adj" fmla="val 3077"/>
             </a:avLst>
           </a:prstGeom>
           <a:solidFill>
-            <a:srgbClr val="00B80C"/>
+            <a:srgbClr val="EAF8EA"/>
           </a:solidFill>
           <a:ln w="12700">
             <a:solidFill>
-              <a:srgbClr val="00B80C"/>
+              <a:srgbClr val="EAF8EA"/>
             </a:solidFill>
             <a:prstDash val="solid"/>
           </a:ln>
@@ -2986,53 +3249,14 @@
       </p:sp>
       <p:sp>
         <p:nvSpPr>
-          <p:cNvPr id="7" name="Text 4"/>
-          <p:cNvSpPr txBox="1"/>
-          <p:nvPr/>
-        </p:nvSpPr>
-        <p:spPr>
-          <a:xfrm>
-            <a:off x="5212080" y="1645920"/>
-            <a:ext cx="2103120" cy="548640"/>
-          </a:xfrm>
-          <a:prstGeom prst="rect">
-            <a:avLst/>
-          </a:prstGeom>
-          <a:noFill/>
-          <a:ln/>
-        </p:spPr>
-        <p:txBody>
-          <a:bodyPr wrap="square" lIns="0" tIns="0" rIns="0" bIns="0" rtlCol="0" anchor="ctr"/>
-          <a:lstStyle/>
-          <a:p>
-            <a:pPr algn="ctr" indent="0" marL="0">
-              <a:buNone/>
-            </a:pPr>
-            <a:r>
-              <a:rPr lang="en-US" sz="1500" b="1" dirty="0">
-                <a:solidFill>
-                  <a:srgbClr val="FFFFFF"/>
-                </a:solidFill>
-                <a:latin typeface="Malgun Gothic" pitchFamily="34" charset="0"/>
-                <a:ea typeface="Malgun Gothic" pitchFamily="34" charset="-122"/>
-                <a:cs typeface="Malgun Gothic" pitchFamily="34" charset="-120"/>
-              </a:rPr>
-              <a:t>happicare 방식</a:t>
-            </a:r>
-            <a:endParaRPr lang="en-US" sz="1500" dirty="0"/>
-          </a:p>
-        </p:txBody>
-      </p:sp>
-      <p:sp>
-        <p:nvSpPr>
           <p:cNvPr id="8" name="Text 5"/>
           <p:cNvSpPr txBox="1"/>
           <p:nvPr/>
         </p:nvSpPr>
         <p:spPr>
           <a:xfrm>
-            <a:off x="7589520" y="1463040"/>
-            <a:ext cx="3840480" cy="914400"/>
+            <a:off x="4480560" y="1600200"/>
+            <a:ext cx="3017520" cy="365760"/>
           </a:xfrm>
           <a:prstGeom prst="rect">
             <a:avLst/>
@@ -3041,49 +3265,155 @@
           <a:ln/>
         </p:spPr>
         <p:txBody>
-          <a:bodyPr wrap="square" lIns="0" tIns="0" rIns="0" bIns="0" rtlCol="0" anchor="ctr"/>
+          <a:bodyPr wrap="square" lIns="0" tIns="0" rIns="0" bIns="0" rtlCol="0" anchor="t"/>
           <a:lstStyle/>
           <a:p>
             <a:pPr indent="0" marL="0">
               <a:buNone/>
             </a:pPr>
             <a:r>
-              <a:rPr lang="en-US" sz="1400" dirty="0">
-                <a:solidFill>
-                  <a:srgbClr val="666B70"/>
-                </a:solidFill>
-                <a:latin typeface="Malgun Gothic" pitchFamily="34" charset="0"/>
-                <a:ea typeface="Malgun Gothic" pitchFamily="34" charset="-122"/>
-                <a:cs typeface="Malgun Gothic" pitchFamily="34" charset="-120"/>
-              </a:rPr>
-              <a:t>원본을 기준으로 두고 비교 검수 반복</a:t>
-            </a:r>
-            <a:endParaRPr lang="en-US" sz="1400" dirty="0"/>
-          </a:p>
-        </p:txBody>
-      </p:sp>
-      <p:sp>
-        <p:nvSpPr>
-          <p:cNvPr id="9" name="Shape 6"/>
+              <a:rPr lang="en-US" sz="1800" b="1" dirty="0">
+                <a:solidFill>
+                  <a:srgbClr val="00B80C"/>
+                </a:solidFill>
+                <a:latin typeface="Malgun Gothic" pitchFamily="34" charset="0"/>
+                <a:ea typeface="Malgun Gothic" pitchFamily="34" charset="-122"/>
+                <a:cs typeface="Malgun Gothic" pitchFamily="34" charset="-120"/>
+              </a:rPr>
+              <a:t>배운 점</a:t>
+            </a:r>
+            <a:endParaRPr lang="en-US" sz="1800" dirty="0"/>
+          </a:p>
+        </p:txBody>
+      </p:sp>
+      <p:sp>
+        <p:nvSpPr>
+          <p:cNvPr id="9" name="Text 6"/>
+          <p:cNvSpPr txBox="1"/>
+          <p:nvPr/>
+        </p:nvSpPr>
+        <p:spPr>
+          <a:xfrm>
+            <a:off x="4480560" y="2103120"/>
+            <a:ext cx="3017520" cy="3383280"/>
+          </a:xfrm>
+          <a:prstGeom prst="rect">
+            <a:avLst/>
+          </a:prstGeom>
+          <a:noFill/>
+          <a:ln/>
+        </p:spPr>
+        <p:txBody>
+          <a:bodyPr wrap="square" lIns="0" tIns="0" rIns="0" bIns="0" rtlCol="0" anchor="t"/>
+          <a:lstStyle/>
+          <a:p>
+            <a:pPr marL="342900" indent="-342900">
+              <a:spcAft>
+                <a:spcPts val="600"/>
+              </a:spcAft>
+              <a:buSzPct val="100000"/>
+              <a:buChar char="•"/>
+            </a:pPr>
+            <a:r>
+              <a:rPr lang="en-US" sz="1600" dirty="0">
+                <a:solidFill>
+                  <a:srgbClr val="1B2A22"/>
+                </a:solidFill>
+                <a:latin typeface="Malgun Gothic" pitchFamily="34" charset="0"/>
+                <a:ea typeface="Malgun Gothic" pitchFamily="34" charset="-122"/>
+                <a:cs typeface="Malgun Gothic" pitchFamily="34" charset="-120"/>
+              </a:rPr>
+              <a:t>happicare: app.css 한 파일(약 970줄), 원본 모양 유지에 유리</a:t>
+            </a:r>
+            <a:endParaRPr lang="en-US" sz="1600" dirty="0"/>
+          </a:p>
+          <a:p>
+            <a:pPr marL="342900" indent="-342900">
+              <a:spcAft>
+                <a:spcPts val="600"/>
+              </a:spcAft>
+              <a:buSzPct val="100000"/>
+              <a:buChar char="•"/>
+            </a:pPr>
+            <a:r>
+              <a:rPr lang="en-US" sz="1600" dirty="0">
+                <a:solidFill>
+                  <a:srgbClr val="1B2A22"/>
+                </a:solidFill>
+                <a:latin typeface="Malgun Gothic" pitchFamily="34" charset="0"/>
+                <a:ea typeface="Malgun Gothic" pitchFamily="34" charset="-122"/>
+                <a:cs typeface="Malgun Gothic" pitchFamily="34" charset="-120"/>
+              </a:rPr>
+              <a:t>front2: 디자인 토큰 + CSS Modules, 브랜드 초록 #00B80C와 상태 색을 변수로 관리</a:t>
+            </a:r>
+            <a:endParaRPr lang="en-US" sz="1600" dirty="0"/>
+          </a:p>
+          <a:p>
+            <a:pPr marL="342900" indent="-342900">
+              <a:spcAft>
+                <a:spcPts val="600"/>
+              </a:spcAft>
+              <a:buSzPct val="100000"/>
+              <a:buChar char="•"/>
+            </a:pPr>
+            <a:r>
+              <a:rPr lang="en-US" sz="1600" dirty="0">
+                <a:solidFill>
+                  <a:srgbClr val="1B2A22"/>
+                </a:solidFill>
+                <a:latin typeface="Malgun Gothic" pitchFamily="34" charset="0"/>
+                <a:ea typeface="Malgun Gothic" pitchFamily="34" charset="-122"/>
+                <a:cs typeface="Malgun Gothic" pitchFamily="34" charset="-120"/>
+              </a:rPr>
+              <a:t>axe 접근성·키보드·반응형 검사가 테스트에 포함</a:t>
+            </a:r>
+            <a:endParaRPr lang="en-US" sz="1600" dirty="0"/>
+          </a:p>
+          <a:p>
+            <a:pPr marL="342900" indent="-342900">
+              <a:spcAft>
+                <a:spcPts val="600"/>
+              </a:spcAft>
+              <a:buSzPct val="100000"/>
+              <a:buChar char="•"/>
+            </a:pPr>
+            <a:r>
+              <a:rPr lang="en-US" sz="1600" dirty="0">
+                <a:solidFill>
+                  <a:srgbClr val="1B2A22"/>
+                </a:solidFill>
+                <a:latin typeface="Malgun Gothic" pitchFamily="34" charset="0"/>
+                <a:ea typeface="Malgun Gothic" pitchFamily="34" charset="-122"/>
+                <a:cs typeface="Malgun Gothic" pitchFamily="34" charset="-120"/>
+              </a:rPr>
+              <a:t>admin_version2: design-log와 ?mockStatus로 상태 화면 확인</a:t>
+            </a:r>
+            <a:endParaRPr lang="en-US" sz="1600" dirty="0"/>
+          </a:p>
+        </p:txBody>
+      </p:sp>
+      <p:sp>
+        <p:nvSpPr>
+          <p:cNvPr id="10" name="Shape 7"/>
           <p:cNvSpPr/>
           <p:nvPr/>
         </p:nvSpPr>
         <p:spPr>
           <a:xfrm>
-            <a:off x="548640" y="2560320"/>
-            <a:ext cx="11064240" cy="914400"/>
+            <a:off x="7955280" y="1463040"/>
+            <a:ext cx="3657600" cy="4206240"/>
           </a:xfrm>
           <a:prstGeom prst="roundRect">
             <a:avLst>
-              <a:gd name="adj" fmla="val 12000"/>
+              <a:gd name="adj" fmla="val 3000"/>
             </a:avLst>
           </a:prstGeom>
           <a:solidFill>
-            <a:srgbClr val="F4F6F7"/>
+            <a:srgbClr val="EAF8EA"/>
           </a:solidFill>
           <a:ln w="12700">
             <a:solidFill>
-              <a:srgbClr val="F4F6F7"/>
+              <a:srgbClr val="EAF8EA"/>
             </a:solidFill>
             <a:prstDash val="solid"/>
           </a:ln>
@@ -3091,14 +3421,14 @@
       </p:sp>
       <p:sp>
         <p:nvSpPr>
-          <p:cNvPr id="10" name="Text 7"/>
+          <p:cNvPr id="11" name="Text 8"/>
           <p:cNvSpPr txBox="1"/>
           <p:nvPr/>
         </p:nvSpPr>
         <p:spPr>
           <a:xfrm>
-            <a:off x="822960" y="2560320"/>
-            <a:ext cx="4206240" cy="914400"/>
+            <a:off x="8229600" y="1600200"/>
+            <a:ext cx="3108960" cy="365760"/>
           </a:xfrm>
           <a:prstGeom prst="rect">
             <a:avLst/>
@@ -3107,7 +3437,7 @@
           <a:ln/>
         </p:spPr>
         <p:txBody>
-          <a:bodyPr wrap="square" lIns="0" tIns="0" rIns="0" bIns="0" rtlCol="0" anchor="ctr"/>
+          <a:bodyPr wrap="square" lIns="0" tIns="0" rIns="0" bIns="0" rtlCol="0" anchor="t"/>
           <a:lstStyle/>
           <a:p>
             <a:pPr indent="0" marL="0">
@@ -3116,44 +3446,17 @@
             <a:r>
               <a:rPr lang="en-US" sz="1800" b="1" dirty="0">
                 <a:solidFill>
-                  <a:srgbClr val="1B2A22"/>
-                </a:solidFill>
-                <a:latin typeface="Malgun Gothic" pitchFamily="34" charset="0"/>
-                <a:ea typeface="Malgun Gothic" pitchFamily="34" charset="-122"/>
-                <a:cs typeface="Malgun Gothic" pitchFamily="34" charset="-120"/>
-              </a:rPr>
-              <a:t>새 서비스를 처음부터 만든다</a:t>
+                  <a:srgbClr val="00B80C"/>
+                </a:solidFill>
+                <a:latin typeface="Malgun Gothic" pitchFamily="34" charset="0"/>
+                <a:ea typeface="Malgun Gothic" pitchFamily="34" charset="-122"/>
+                <a:cs typeface="Malgun Gothic" pitchFamily="34" charset="-120"/>
+              </a:rPr>
+              <a:t>결정이 필요한 항목</a:t>
             </a:r>
             <a:endParaRPr lang="en-US" sz="1800" dirty="0"/>
           </a:p>
         </p:txBody>
-      </p:sp>
-      <p:sp>
-        <p:nvSpPr>
-          <p:cNvPr id="11" name="Shape 8"/>
-          <p:cNvSpPr/>
-          <p:nvPr/>
-        </p:nvSpPr>
-        <p:spPr>
-          <a:xfrm>
-            <a:off x="5212080" y="2743200"/>
-            <a:ext cx="2103120" cy="548640"/>
-          </a:xfrm>
-          <a:prstGeom prst="roundRect">
-            <a:avLst>
-              <a:gd name="adj" fmla="val 50000"/>
-            </a:avLst>
-          </a:prstGeom>
-          <a:solidFill>
-            <a:srgbClr val="7047D8"/>
-          </a:solidFill>
-          <a:ln w="12700">
-            <a:solidFill>
-              <a:srgbClr val="7047D8"/>
-            </a:solidFill>
-            <a:prstDash val="solid"/>
-          </a:ln>
-        </p:spPr>
       </p:sp>
       <p:sp>
         <p:nvSpPr>
@@ -3163,8 +3466,8 @@
         </p:nvSpPr>
         <p:spPr>
           <a:xfrm>
-            <a:off x="5212080" y="2743200"/>
-            <a:ext cx="2103120" cy="548640"/>
+            <a:off x="8229600" y="2103120"/>
+            <a:ext cx="3108960" cy="3383280"/>
           </a:xfrm>
           <a:prstGeom prst="rect">
             <a:avLst/>
@@ -3173,119 +3476,18 @@
           <a:ln/>
         </p:spPr>
         <p:txBody>
-          <a:bodyPr wrap="square" lIns="0" tIns="0" rIns="0" bIns="0" rtlCol="0" anchor="ctr"/>
-          <a:lstStyle/>
-          <a:p>
-            <a:pPr algn="ctr" indent="0" marL="0">
-              <a:buNone/>
-            </a:pPr>
-            <a:r>
-              <a:rPr lang="en-US" sz="1500" b="1" dirty="0">
-                <a:solidFill>
-                  <a:srgbClr val="FFFFFF"/>
-                </a:solidFill>
-                <a:latin typeface="Malgun Gothic" pitchFamily="34" charset="0"/>
-                <a:ea typeface="Malgun Gothic" pitchFamily="34" charset="-122"/>
-                <a:cs typeface="Malgun Gothic" pitchFamily="34" charset="-120"/>
-              </a:rPr>
-              <a:t>front2 방식</a:t>
-            </a:r>
-            <a:endParaRPr lang="en-US" sz="1500" dirty="0"/>
-          </a:p>
-        </p:txBody>
-      </p:sp>
-      <p:sp>
-        <p:nvSpPr>
-          <p:cNvPr id="13" name="Text 10"/>
-          <p:cNvSpPr txBox="1"/>
-          <p:nvPr/>
-        </p:nvSpPr>
-        <p:spPr>
-          <a:xfrm>
-            <a:off x="7589520" y="2560320"/>
-            <a:ext cx="3840480" cy="914400"/>
-          </a:xfrm>
-          <a:prstGeom prst="rect">
-            <a:avLst/>
-          </a:prstGeom>
-          <a:noFill/>
-          <a:ln/>
-        </p:spPr>
-        <p:txBody>
-          <a:bodyPr wrap="square" lIns="0" tIns="0" rIns="0" bIns="0" rtlCol="0" anchor="ctr"/>
-          <a:lstStyle/>
-          <a:p>
-            <a:pPr indent="0" marL="0">
-              <a:buNone/>
-            </a:pPr>
-            <a:r>
-              <a:rPr lang="en-US" sz="1400" dirty="0">
-                <a:solidFill>
-                  <a:srgbClr val="666B70"/>
-                </a:solidFill>
-                <a:latin typeface="Malgun Gothic" pitchFamily="34" charset="0"/>
-                <a:ea typeface="Malgun Gothic" pitchFamily="34" charset="-122"/>
-                <a:cs typeface="Malgun Gothic" pitchFamily="34" charset="-120"/>
-              </a:rPr>
-              <a:t>문서 → 설계 → 계획 → 구현 → 검증</a:t>
-            </a:r>
-            <a:endParaRPr lang="en-US" sz="1400" dirty="0"/>
-          </a:p>
-        </p:txBody>
-      </p:sp>
-      <p:sp>
-        <p:nvSpPr>
-          <p:cNvPr id="14" name="Shape 11"/>
-          <p:cNvSpPr/>
-          <p:nvPr/>
-        </p:nvSpPr>
-        <p:spPr>
-          <a:xfrm>
-            <a:off x="548640" y="3657600"/>
-            <a:ext cx="11064240" cy="914400"/>
-          </a:xfrm>
-          <a:prstGeom prst="roundRect">
-            <a:avLst>
-              <a:gd name="adj" fmla="val 12000"/>
-            </a:avLst>
-          </a:prstGeom>
-          <a:solidFill>
-            <a:srgbClr val="F4F6F7"/>
-          </a:solidFill>
-          <a:ln w="12700">
-            <a:solidFill>
-              <a:srgbClr val="F4F6F7"/>
-            </a:solidFill>
-            <a:prstDash val="solid"/>
-          </a:ln>
-        </p:spPr>
-      </p:sp>
-      <p:sp>
-        <p:nvSpPr>
-          <p:cNvPr id="15" name="Text 12"/>
-          <p:cNvSpPr txBox="1"/>
-          <p:nvPr/>
-        </p:nvSpPr>
-        <p:spPr>
-          <a:xfrm>
-            <a:off x="822960" y="3657600"/>
-            <a:ext cx="4206240" cy="914400"/>
-          </a:xfrm>
-          <a:prstGeom prst="rect">
-            <a:avLst/>
-          </a:prstGeom>
-          <a:noFill/>
-          <a:ln/>
-        </p:spPr>
-        <p:txBody>
-          <a:bodyPr wrap="square" lIns="0" tIns="0" rIns="0" bIns="0" rtlCol="0" anchor="ctr"/>
-          <a:lstStyle/>
-          <a:p>
-            <a:pPr indent="0" marL="0">
-              <a:buNone/>
-            </a:pPr>
-            <a:r>
-              <a:rPr lang="en-US" sz="1800" b="1" dirty="0">
+          <a:bodyPr wrap="square" lIns="0" tIns="0" rIns="0" bIns="0" rtlCol="0" anchor="t"/>
+          <a:lstStyle/>
+          <a:p>
+            <a:pPr marL="342900" indent="-342900">
+              <a:spcAft>
+                <a:spcPts val="600"/>
+              </a:spcAft>
+              <a:buSzPct val="100000"/>
+              <a:buChar char="•"/>
+            </a:pPr>
+            <a:r>
+              <a:rPr lang="en-US" sz="1600" dirty="0">
                 <a:solidFill>
                   <a:srgbClr val="1B2A22"/>
                 </a:solidFill>
@@ -3293,170 +3495,20 @@
                 <a:ea typeface="Malgun Gothic" pitchFamily="34" charset="-122"/>
                 <a:cs typeface="Malgun Gothic" pitchFamily="34" charset="-120"/>
               </a:rPr>
-              <a:t>팀원에게 개념을 가르친다</a:t>
-            </a:r>
-            <a:endParaRPr lang="en-US" sz="1800" dirty="0"/>
-          </a:p>
-        </p:txBody>
-      </p:sp>
-      <p:sp>
-        <p:nvSpPr>
-          <p:cNvPr id="16" name="Shape 13"/>
-          <p:cNvSpPr/>
-          <p:nvPr/>
-        </p:nvSpPr>
-        <p:spPr>
-          <a:xfrm>
-            <a:off x="5212080" y="3840480"/>
-            <a:ext cx="2103120" cy="548640"/>
-          </a:xfrm>
-          <a:prstGeom prst="roundRect">
-            <a:avLst>
-              <a:gd name="adj" fmla="val 50000"/>
-            </a:avLst>
-          </a:prstGeom>
-          <a:solidFill>
-            <a:srgbClr val="00B80C"/>
-          </a:solidFill>
-          <a:ln w="12700">
-            <a:solidFill>
-              <a:srgbClr val="00B80C"/>
-            </a:solidFill>
-            <a:prstDash val="solid"/>
-          </a:ln>
-        </p:spPr>
-      </p:sp>
-      <p:sp>
-        <p:nvSpPr>
-          <p:cNvPr id="17" name="Text 14"/>
-          <p:cNvSpPr txBox="1"/>
-          <p:nvPr/>
-        </p:nvSpPr>
-        <p:spPr>
-          <a:xfrm>
-            <a:off x="5212080" y="3840480"/>
-            <a:ext cx="2103120" cy="548640"/>
-          </a:xfrm>
-          <a:prstGeom prst="rect">
-            <a:avLst/>
-          </a:prstGeom>
-          <a:noFill/>
-          <a:ln/>
-        </p:spPr>
-        <p:txBody>
-          <a:bodyPr wrap="square" lIns="0" tIns="0" rIns="0" bIns="0" rtlCol="0" anchor="ctr"/>
-          <a:lstStyle/>
-          <a:p>
-            <a:pPr algn="ctr" indent="0" marL="0">
-              <a:buNone/>
-            </a:pPr>
-            <a:r>
-              <a:rPr lang="en-US" sz="1500" b="1" dirty="0">
-                <a:solidFill>
-                  <a:srgbClr val="FFFFFF"/>
-                </a:solidFill>
-                <a:latin typeface="Malgun Gothic" pitchFamily="34" charset="0"/>
-                <a:ea typeface="Malgun Gothic" pitchFamily="34" charset="-122"/>
-                <a:cs typeface="Malgun Gothic" pitchFamily="34" charset="-120"/>
-              </a:rPr>
-              <a:t>happicare 자료</a:t>
-            </a:r>
-            <a:endParaRPr lang="en-US" sz="1500" dirty="0"/>
-          </a:p>
-        </p:txBody>
-      </p:sp>
-      <p:sp>
-        <p:nvSpPr>
-          <p:cNvPr id="18" name="Text 15"/>
-          <p:cNvSpPr txBox="1"/>
-          <p:nvPr/>
-        </p:nvSpPr>
-        <p:spPr>
-          <a:xfrm>
-            <a:off x="7589520" y="3657600"/>
-            <a:ext cx="3840480" cy="914400"/>
-          </a:xfrm>
-          <a:prstGeom prst="rect">
-            <a:avLst/>
-          </a:prstGeom>
-          <a:noFill/>
-          <a:ln/>
-        </p:spPr>
-        <p:txBody>
-          <a:bodyPr wrap="square" lIns="0" tIns="0" rIns="0" bIns="0" rtlCol="0" anchor="ctr"/>
-          <a:lstStyle/>
-          <a:p>
-            <a:pPr indent="0" marL="0">
-              <a:buNone/>
-            </a:pPr>
-            <a:r>
-              <a:rPr lang="en-US" sz="1400" dirty="0">
-                <a:solidFill>
-                  <a:srgbClr val="666B70"/>
-                </a:solidFill>
-                <a:latin typeface="Malgun Gothic" pitchFamily="34" charset="0"/>
-                <a:ea typeface="Malgun Gothic" pitchFamily="34" charset="-122"/>
-                <a:cs typeface="Malgun Gothic" pitchFamily="34" charset="-120"/>
-              </a:rPr>
-              <a:t>학습 가이드·발표 대본 구성</a:t>
-            </a:r>
-            <a:endParaRPr lang="en-US" sz="1400" dirty="0"/>
-          </a:p>
-        </p:txBody>
-      </p:sp>
-      <p:sp>
-        <p:nvSpPr>
-          <p:cNvPr id="19" name="Shape 16"/>
-          <p:cNvSpPr/>
-          <p:nvPr/>
-        </p:nvSpPr>
-        <p:spPr>
-          <a:xfrm>
-            <a:off x="548640" y="4754880"/>
-            <a:ext cx="11064240" cy="914400"/>
-          </a:xfrm>
-          <a:prstGeom prst="roundRect">
-            <a:avLst>
-              <a:gd name="adj" fmla="val 12000"/>
-            </a:avLst>
-          </a:prstGeom>
-          <a:solidFill>
-            <a:srgbClr val="F4F6F7"/>
-          </a:solidFill>
-          <a:ln w="12700">
-            <a:solidFill>
-              <a:srgbClr val="F4F6F7"/>
-            </a:solidFill>
-            <a:prstDash val="solid"/>
-          </a:ln>
-        </p:spPr>
-      </p:sp>
-      <p:sp>
-        <p:nvSpPr>
-          <p:cNvPr id="20" name="Text 17"/>
-          <p:cNvSpPr txBox="1"/>
-          <p:nvPr/>
-        </p:nvSpPr>
-        <p:spPr>
-          <a:xfrm>
-            <a:off x="822960" y="4754880"/>
-            <a:ext cx="4206240" cy="914400"/>
-          </a:xfrm>
-          <a:prstGeom prst="rect">
-            <a:avLst/>
-          </a:prstGeom>
-          <a:noFill/>
-          <a:ln/>
-        </p:spPr>
-        <p:txBody>
-          <a:bodyPr wrap="square" lIns="0" tIns="0" rIns="0" bIns="0" rtlCol="0" anchor="ctr"/>
-          <a:lstStyle/>
-          <a:p>
-            <a:pPr indent="0" marL="0">
-              <a:buNone/>
-            </a:pPr>
-            <a:r>
-              <a:rPr lang="en-US" sz="1800" b="1" dirty="0">
+              <a:t>D1 색 대비 AA(4.5:1) 미달 10쌍, 브랜드 색 확정 후 조정</a:t>
+            </a:r>
+            <a:endParaRPr lang="en-US" sz="1600" dirty="0"/>
+          </a:p>
+          <a:p>
+            <a:pPr marL="342900" indent="-342900">
+              <a:spcAft>
+                <a:spcPts val="600"/>
+              </a:spcAft>
+              <a:buSzPct val="100000"/>
+              <a:buChar char="•"/>
+            </a:pPr>
+            <a:r>
+              <a:rPr lang="en-US" sz="1600" dirty="0">
                 <a:solidFill>
                   <a:srgbClr val="1B2A22"/>
                 </a:solidFill>
@@ -3464,114 +3516,51 @@
                 <a:ea typeface="Malgun Gothic" pitchFamily="34" charset="-122"/>
                 <a:cs typeface="Malgun Gothic" pitchFamily="34" charset="-120"/>
               </a:rPr>
-              <a:t>운영까지 고려한다</a:t>
-            </a:r>
-            <a:endParaRPr lang="en-US" sz="1800" dirty="0"/>
-          </a:p>
-        </p:txBody>
-      </p:sp>
-      <p:sp>
-        <p:nvSpPr>
-          <p:cNvPr id="21" name="Shape 18"/>
-          <p:cNvSpPr/>
-          <p:nvPr/>
-        </p:nvSpPr>
-        <p:spPr>
-          <a:xfrm>
-            <a:off x="5212080" y="4937760"/>
-            <a:ext cx="2103120" cy="548640"/>
-          </a:xfrm>
-          <a:prstGeom prst="roundRect">
-            <a:avLst>
-              <a:gd name="adj" fmla="val 50000"/>
-            </a:avLst>
-          </a:prstGeom>
-          <a:solidFill>
-            <a:srgbClr val="7047D8"/>
-          </a:solidFill>
-          <a:ln w="12700">
-            <a:solidFill>
-              <a:srgbClr val="7047D8"/>
-            </a:solidFill>
-            <a:prstDash val="solid"/>
-          </a:ln>
-        </p:spPr>
-      </p:sp>
-      <p:sp>
-        <p:nvSpPr>
-          <p:cNvPr id="22" name="Text 19"/>
-          <p:cNvSpPr txBox="1"/>
-          <p:nvPr/>
-        </p:nvSpPr>
-        <p:spPr>
-          <a:xfrm>
-            <a:off x="5212080" y="4937760"/>
-            <a:ext cx="2103120" cy="548640"/>
-          </a:xfrm>
-          <a:prstGeom prst="rect">
-            <a:avLst/>
-          </a:prstGeom>
-          <a:noFill/>
-          <a:ln/>
-        </p:spPr>
-        <p:txBody>
-          <a:bodyPr wrap="square" lIns="0" tIns="0" rIns="0" bIns="0" rtlCol="0" anchor="ctr"/>
-          <a:lstStyle/>
-          <a:p>
-            <a:pPr algn="ctr" indent="0" marL="0">
-              <a:buNone/>
-            </a:pPr>
-            <a:r>
-              <a:rPr lang="en-US" sz="1500" b="1" dirty="0">
-                <a:solidFill>
-                  <a:srgbClr val="FFFFFF"/>
-                </a:solidFill>
-                <a:latin typeface="Malgun Gothic" pitchFamily="34" charset="0"/>
-                <a:ea typeface="Malgun Gothic" pitchFamily="34" charset="-122"/>
-                <a:cs typeface="Malgun Gothic" pitchFamily="34" charset="-120"/>
-              </a:rPr>
-              <a:t>front2 방식</a:t>
-            </a:r>
-            <a:endParaRPr lang="en-US" sz="1500" dirty="0"/>
-          </a:p>
-        </p:txBody>
-      </p:sp>
-      <p:sp>
-        <p:nvSpPr>
-          <p:cNvPr id="23" name="Text 20"/>
-          <p:cNvSpPr txBox="1"/>
-          <p:nvPr/>
-        </p:nvSpPr>
-        <p:spPr>
-          <a:xfrm>
-            <a:off x="7589520" y="4754880"/>
-            <a:ext cx="3840480" cy="914400"/>
-          </a:xfrm>
-          <a:prstGeom prst="rect">
-            <a:avLst/>
-          </a:prstGeom>
-          <a:noFill/>
-          <a:ln/>
-        </p:spPr>
-        <p:txBody>
-          <a:bodyPr wrap="square" lIns="0" tIns="0" rIns="0" bIns="0" rtlCol="0" anchor="ctr"/>
-          <a:lstStyle/>
-          <a:p>
-            <a:pPr indent="0" marL="0">
-              <a:buNone/>
-            </a:pPr>
-            <a:r>
-              <a:rPr lang="en-US" sz="1400" dirty="0">
-                <a:solidFill>
-                  <a:srgbClr val="666B70"/>
-                </a:solidFill>
-                <a:latin typeface="Malgun Gothic" pitchFamily="34" charset="0"/>
-                <a:ea typeface="Malgun Gothic" pitchFamily="34" charset="-122"/>
-                <a:cs typeface="Malgun Gothic" pitchFamily="34" charset="-120"/>
-              </a:rPr>
-              <a:t>CI·런북·점검 스크립트</a:t>
-            </a:r>
-            <a:endParaRPr lang="en-US" sz="1400" dirty="0"/>
+              <a:t>D2 Tab 순서: 내부 관리 패널이 본문 뒤</a:t>
+            </a:r>
+            <a:endParaRPr lang="en-US" sz="1600" dirty="0"/>
+          </a:p>
+          <a:p>
+            <a:pPr marL="342900" indent="-342900">
+              <a:spcAft>
+                <a:spcPts val="600"/>
+              </a:spcAft>
+              <a:buSzPct val="100000"/>
+              <a:buChar char="•"/>
+            </a:pPr>
+            <a:r>
+              <a:rPr lang="en-US" sz="1600" dirty="0">
+                <a:solidFill>
+                  <a:srgbClr val="1B2A22"/>
+                </a:solidFill>
+                <a:latin typeface="Malgun Gothic" pitchFamily="34" charset="0"/>
+                <a:ea typeface="Malgun Gothic" pitchFamily="34" charset="-122"/>
+                <a:cs typeface="Malgun Gothic" pitchFamily="34" charset="-120"/>
+              </a:rPr>
+              <a:t>D3 설정 화면 저장 버튼 고정</a:t>
+            </a:r>
+            <a:endParaRPr lang="en-US" sz="1600" dirty="0"/>
+          </a:p>
+          <a:p>
+            <a:pPr marL="342900" indent="-342900">
+              <a:spcAft>
+                <a:spcPts val="600"/>
+              </a:spcAft>
+              <a:buSzPct val="100000"/>
+              <a:buChar char="•"/>
+            </a:pPr>
+            <a:r>
+              <a:rPr lang="en-US" sz="1600" dirty="0">
+                <a:solidFill>
+                  <a:srgbClr val="1B2A22"/>
+                </a:solidFill>
+                <a:latin typeface="Malgun Gothic" pitchFamily="34" charset="0"/>
+                <a:ea typeface="Malgun Gothic" pitchFamily="34" charset="-122"/>
+                <a:cs typeface="Malgun Gothic" pitchFamily="34" charset="-120"/>
+              </a:rPr>
+              <a:t>병원 화면 시안 보강</a:t>
+            </a:r>
+            <a:endParaRPr lang="en-US" sz="1600" dirty="0"/>
           </a:p>
         </p:txBody>
       </p:sp>
@@ -3681,7 +3670,7 @@
                 <a:ea typeface="Malgun Gothic" pitchFamily="34" charset="-122"/>
                 <a:cs typeface="Malgun Gothic" pitchFamily="34" charset="-120"/>
               </a:rPr>
-              <a:t>합친다면, 그리고 팀에 요청할 결정</a:t>
+              <a:t>개발자: 계층 분리와 검증 자동화</a:t>
             </a:r>
             <a:endParaRPr lang="en-US" sz="3200" dirty="0"/>
           </a:p>
@@ -3695,20 +3684,20 @@
         </p:nvSpPr>
         <p:spPr>
           <a:xfrm>
-            <a:off x="548640" y="1417320"/>
-            <a:ext cx="5486400" cy="4480560"/>
+            <a:off x="548640" y="1463040"/>
+            <a:ext cx="3474720" cy="4206240"/>
           </a:xfrm>
           <a:prstGeom prst="roundRect">
             <a:avLst>
-              <a:gd name="adj" fmla="val 2449"/>
+              <a:gd name="adj" fmla="val 3158"/>
             </a:avLst>
           </a:prstGeom>
           <a:solidFill>
-            <a:srgbClr val="F4F6F7"/>
+            <a:srgbClr val="E4F2FF"/>
           </a:solidFill>
           <a:ln w="12700">
             <a:solidFill>
-              <a:srgbClr val="F4F6F7"/>
+              <a:srgbClr val="E4F2FF"/>
             </a:solidFill>
             <a:prstDash val="solid"/>
           </a:ln>
@@ -3723,7 +3712,7 @@
         <p:spPr>
           <a:xfrm>
             <a:off x="822960" y="1600200"/>
-            <a:ext cx="4937760" cy="365760"/>
+            <a:ext cx="2926080" cy="365760"/>
           </a:xfrm>
           <a:prstGeom prst="rect">
             <a:avLst/>
@@ -3741,13 +3730,13 @@
             <a:r>
               <a:rPr lang="en-US" sz="1800" b="1" dirty="0">
                 <a:solidFill>
-                  <a:srgbClr val="00B80C"/>
-                </a:solidFill>
-                <a:latin typeface="Malgun Gothic" pitchFamily="34" charset="0"/>
-                <a:ea typeface="Malgun Gothic" pitchFamily="34" charset="-122"/>
-                <a:cs typeface="Malgun Gothic" pitchFamily="34" charset="-120"/>
-              </a:rPr>
-              <a:t>합치는 방향 (제안)</a:t>
+                  <a:srgbClr val="2477B3"/>
+                </a:solidFill>
+                <a:latin typeface="Malgun Gothic" pitchFamily="34" charset="0"/>
+                <a:ea typeface="Malgun Gothic" pitchFamily="34" charset="-122"/>
+                <a:cs typeface="Malgun Gothic" pitchFamily="34" charset="-120"/>
+              </a:rPr>
+              <a:t>먼저 볼 것</a:t>
             </a:r>
             <a:endParaRPr lang="en-US" sz="1800" dirty="0"/>
           </a:p>
@@ -3762,7 +3751,7 @@
         <p:spPr>
           <a:xfrm>
             <a:off x="822960" y="2103120"/>
-            <a:ext cx="4937760" cy="3657600"/>
+            <a:ext cx="2926080" cy="3383280"/>
           </a:xfrm>
           <a:prstGeom prst="rect">
             <a:avLst/>
@@ -3776,11 +3765,10 @@
           <a:p>
             <a:pPr marL="342900" indent="-342900">
               <a:spcAft>
-                <a:spcPts val="800"/>
+                <a:spcPts val="600"/>
               </a:spcAft>
               <a:buSzPct val="100000"/>
-              <a:buFont typeface="+mj-lt"/>
-              <a:buAutoNum type="arabicPeriod" startAt="1"/>
+              <a:buChar char="•"/>
             </a:pPr>
             <a:r>
               <a:rPr lang="en-US" sz="1600" dirty="0">
@@ -3791,18 +3779,17 @@
                 <a:ea typeface="Malgun Gothic" pitchFamily="34" charset="-122"/>
                 <a:cs typeface="Malgun Gothic" pitchFamily="34" charset="-120"/>
               </a:rPr>
-              <a:t>happicare의 셀프 해결 가이드·FAQ·4단계 위저드를 front2 병원 화면으로 이식</a:t>
+              <a:t>apps/api/src/domain/*</a:t>
             </a:r>
             <a:endParaRPr lang="en-US" sz="1600" dirty="0"/>
           </a:p>
           <a:p>
             <a:pPr marL="342900" indent="-342900">
               <a:spcAft>
-                <a:spcPts val="800"/>
+                <a:spcPts val="600"/>
               </a:spcAft>
               <a:buSzPct val="100000"/>
-              <a:buFont typeface="+mj-lt"/>
-              <a:buAutoNum type="arabicPeriod" startAt="1"/>
+              <a:buChar char="•"/>
             </a:pPr>
             <a:r>
               <a:rPr lang="en-US" sz="1600" dirty="0">
@@ -3813,18 +3800,17 @@
                 <a:ea typeface="Malgun Gothic" pitchFamily="34" charset="-122"/>
                 <a:cs typeface="Malgun Gothic" pitchFamily="34" charset="-120"/>
               </a:rPr>
-              <a:t>API 계약 문서와 실제 API 응답 형식 통일</a:t>
+              <a:t>apps/web/src/features/*</a:t>
             </a:r>
             <a:endParaRPr lang="en-US" sz="1600" dirty="0"/>
           </a:p>
           <a:p>
             <a:pPr marL="342900" indent="-342900">
               <a:spcAft>
-                <a:spcPts val="800"/>
+                <a:spcPts val="600"/>
               </a:spcAft>
               <a:buSzPct val="100000"/>
-              <a:buFont typeface="+mj-lt"/>
-              <a:buAutoNum type="arabicPeriod" startAt="1"/>
+              <a:buChar char="•"/>
             </a:pPr>
             <a:r>
               <a:rPr lang="en-US" sz="1600" dirty="0">
@@ -3835,18 +3821,17 @@
                 <a:ea typeface="Malgun Gothic" pitchFamily="34" charset="-122"/>
                 <a:cs typeface="Malgun Gothic" pitchFamily="34" charset="-120"/>
               </a:rPr>
-              <a:t>문의 유형 정의(wizardSchemas.js, InquiryCategory)를 하나로</a:t>
+              <a:t>prisma/schema.prisma</a:t>
             </a:r>
             <a:endParaRPr lang="en-US" sz="1600" dirty="0"/>
           </a:p>
           <a:p>
             <a:pPr marL="342900" indent="-342900">
               <a:spcAft>
-                <a:spcPts val="800"/>
+                <a:spcPts val="600"/>
               </a:spcAft>
               <a:buSzPct val="100000"/>
-              <a:buFont typeface="+mj-lt"/>
-              <a:buAutoNum type="arabicPeriod" startAt="1"/>
+              <a:buChar char="•"/>
             </a:pPr>
             <a:r>
               <a:rPr lang="en-US" sz="1600" dirty="0">
@@ -3857,7 +3842,7 @@
                 <a:ea typeface="Malgun Gothic" pitchFamily="34" charset="-122"/>
                 <a:cs typeface="Malgun Gothic" pitchFamily="34" charset="-120"/>
               </a:rPr>
-              <a:t>단계 0 확정 후 CRM 연동과 첫 배포</a:t>
+              <a:t>docs/ops/runbook.md</a:t>
             </a:r>
             <a:endParaRPr lang="en-US" sz="1600" dirty="0"/>
           </a:p>
@@ -3871,20 +3856,20 @@
         </p:nvSpPr>
         <p:spPr>
           <a:xfrm>
-            <a:off x="6309360" y="1417320"/>
-            <a:ext cx="5303520" cy="1417320"/>
+            <a:off x="4206240" y="1463040"/>
+            <a:ext cx="3566160" cy="4206240"/>
           </a:xfrm>
           <a:prstGeom prst="roundRect">
             <a:avLst>
-              <a:gd name="adj" fmla="val 7742"/>
+              <a:gd name="adj" fmla="val 3077"/>
             </a:avLst>
           </a:prstGeom>
           <a:solidFill>
-            <a:srgbClr val="F4F6F7"/>
+            <a:srgbClr val="E4F2FF"/>
           </a:solidFill>
           <a:ln w="12700">
             <a:solidFill>
-              <a:srgbClr val="F4F6F7"/>
+              <a:srgbClr val="E4F2FF"/>
             </a:solidFill>
             <a:prstDash val="solid"/>
           </a:ln>
@@ -3898,8 +3883,8 @@
         </p:nvSpPr>
         <p:spPr>
           <a:xfrm>
-            <a:off x="6583680" y="1600200"/>
-            <a:ext cx="4754880" cy="365760"/>
+            <a:off x="4480560" y="1600200"/>
+            <a:ext cx="3017520" cy="365760"/>
           </a:xfrm>
           <a:prstGeom prst="rect">
             <a:avLst/>
@@ -3917,13 +3902,13 @@
             <a:r>
               <a:rPr lang="en-US" sz="1800" b="1" dirty="0">
                 <a:solidFill>
-                  <a:srgbClr val="7047D8"/>
-                </a:solidFill>
-                <a:latin typeface="Malgun Gothic" pitchFamily="34" charset="0"/>
-                <a:ea typeface="Malgun Gothic" pitchFamily="34" charset="-122"/>
-                <a:cs typeface="Malgun Gothic" pitchFamily="34" charset="-120"/>
-              </a:rPr>
-              <a:t>기획</a:t>
+                  <a:srgbClr val="2477B3"/>
+                </a:solidFill>
+                <a:latin typeface="Malgun Gothic" pitchFamily="34" charset="0"/>
+                <a:ea typeface="Malgun Gothic" pitchFamily="34" charset="-122"/>
+                <a:cs typeface="Malgun Gothic" pitchFamily="34" charset="-120"/>
+              </a:rPr>
+              <a:t>배운 점</a:t>
             </a:r>
             <a:endParaRPr lang="en-US" sz="1800" dirty="0"/>
           </a:p>
@@ -3937,8 +3922,8 @@
         </p:nvSpPr>
         <p:spPr>
           <a:xfrm>
-            <a:off x="6583680" y="2057400"/>
-            <a:ext cx="4754880" cy="640080"/>
+            <a:off x="4480560" y="2103120"/>
+            <a:ext cx="3017520" cy="3383280"/>
           </a:xfrm>
           <a:prstGeom prst="rect">
             <a:avLst/>
@@ -3950,11 +3935,15 @@
           <a:bodyPr wrap="square" lIns="0" tIns="0" rIns="0" bIns="0" rtlCol="0" anchor="t"/>
           <a:lstStyle/>
           <a:p>
-            <a:pPr indent="0" marL="0">
-              <a:buNone/>
-            </a:pPr>
-            <a:r>
-              <a:rPr lang="en-US" sz="1500" dirty="0">
+            <a:pPr marL="342900" indent="-342900">
+              <a:spcAft>
+                <a:spcPts val="600"/>
+              </a:spcAft>
+              <a:buSzPct val="100000"/>
+              <a:buChar char="•"/>
+            </a:pPr>
+            <a:r>
+              <a:rPr lang="en-US" sz="1600" dirty="0">
                 <a:solidFill>
                   <a:srgbClr val="1B2A22"/>
                 </a:solidFill>
@@ -3962,9 +3951,93 @@
                 <a:ea typeface="Malgun Gothic" pitchFamily="34" charset="-122"/>
                 <a:cs typeface="Malgun Gothic" pitchFamily="34" charset="-120"/>
               </a:rPr>
-              <a:t>단계 0 여섯 정책의 확정 일정</a:t>
-            </a:r>
-            <a:endParaRPr lang="en-US" sz="1500" dirty="0"/>
+              <a:t>happicare: DataSource·Mapper·Repository로 저장소 교체 가능</a:t>
+            </a:r>
+            <a:endParaRPr lang="en-US" sz="1600" dirty="0"/>
+          </a:p>
+          <a:p>
+            <a:pPr marL="342900" indent="-342900">
+              <a:spcAft>
+                <a:spcPts val="600"/>
+              </a:spcAft>
+              <a:buSzPct val="100000"/>
+              <a:buChar char="•"/>
+            </a:pPr>
+            <a:r>
+              <a:rPr lang="en-US" sz="1600" dirty="0">
+                <a:solidFill>
+                  <a:srgbClr val="1B2A22"/>
+                </a:solidFill>
+                <a:latin typeface="Malgun Gothic" pitchFamily="34" charset="0"/>
+                <a:ea typeface="Malgun Gothic" pitchFamily="34" charset="-122"/>
+                <a:cs typeface="Malgun Gothic" pitchFamily="34" charset="-120"/>
+              </a:rPr>
+              <a:t>front2: 모듈형 모놀리스, 모델 22개, 마이그레이션 14개</a:t>
+            </a:r>
+            <a:endParaRPr lang="en-US" sz="1600" dirty="0"/>
+          </a:p>
+          <a:p>
+            <a:pPr marL="342900" indent="-342900">
+              <a:spcAft>
+                <a:spcPts val="600"/>
+              </a:spcAft>
+              <a:buSzPct val="100000"/>
+              <a:buChar char="•"/>
+            </a:pPr>
+            <a:r>
+              <a:rPr lang="en-US" sz="1600" dirty="0">
+                <a:solidFill>
+                  <a:srgbClr val="1B2A22"/>
+                </a:solidFill>
+                <a:latin typeface="Malgun Gothic" pitchFamily="34" charset="0"/>
+                <a:ea typeface="Malgun Gothic" pitchFamily="34" charset="-122"/>
+                <a:cs typeface="Malgun Gothic" pitchFamily="34" charset="-120"/>
+              </a:rPr>
+              <a:t>상태 전이·감사 로그·알림 대기열은 서버가 책임</a:t>
+            </a:r>
+            <a:endParaRPr lang="en-US" sz="1600" dirty="0"/>
+          </a:p>
+          <a:p>
+            <a:pPr marL="342900" indent="-342900">
+              <a:spcAft>
+                <a:spcPts val="600"/>
+              </a:spcAft>
+              <a:buSzPct val="100000"/>
+              <a:buChar char="•"/>
+            </a:pPr>
+            <a:r>
+              <a:rPr lang="en-US" sz="1600" dirty="0">
+                <a:solidFill>
+                  <a:srgbClr val="1B2A22"/>
+                </a:solidFill>
+                <a:latin typeface="Malgun Gothic" pitchFamily="34" charset="0"/>
+                <a:ea typeface="Malgun Gothic" pitchFamily="34" charset="-122"/>
+                <a:cs typeface="Malgun Gothic" pitchFamily="34" charset="-120"/>
+              </a:rPr>
+              <a:t>웹 테스트 64개·API spec 104개, CI 분리</a:t>
+            </a:r>
+            <a:endParaRPr lang="en-US" sz="1600" dirty="0"/>
+          </a:p>
+          <a:p>
+            <a:pPr marL="342900" indent="-342900">
+              <a:spcAft>
+                <a:spcPts val="600"/>
+              </a:spcAft>
+              <a:buSzPct val="100000"/>
+              <a:buChar char="•"/>
+            </a:pPr>
+            <a:r>
+              <a:rPr lang="en-US" sz="1600" dirty="0">
+                <a:solidFill>
+                  <a:srgbClr val="1B2A22"/>
+                </a:solidFill>
+                <a:latin typeface="Malgun Gothic" pitchFamily="34" charset="0"/>
+                <a:ea typeface="Malgun Gothic" pitchFamily="34" charset="-122"/>
+                <a:cs typeface="Malgun Gothic" pitchFamily="34" charset="-120"/>
+              </a:rPr>
+              <a:t>admin_version2: MSW로 프론트·백엔드 병렬 개발</a:t>
+            </a:r>
+            <a:endParaRPr lang="en-US" sz="1600" dirty="0"/>
           </a:p>
         </p:txBody>
       </p:sp>
@@ -3976,20 +4049,20 @@
         </p:nvSpPr>
         <p:spPr>
           <a:xfrm>
-            <a:off x="6309360" y="3017520"/>
-            <a:ext cx="5303520" cy="1417320"/>
+            <a:off x="7955280" y="1463040"/>
+            <a:ext cx="3657600" cy="4206240"/>
           </a:xfrm>
           <a:prstGeom prst="roundRect">
             <a:avLst>
-              <a:gd name="adj" fmla="val 7742"/>
+              <a:gd name="adj" fmla="val 3000"/>
             </a:avLst>
           </a:prstGeom>
           <a:solidFill>
-            <a:srgbClr val="F4F6F7"/>
+            <a:srgbClr val="E4F2FF"/>
           </a:solidFill>
           <a:ln w="12700">
             <a:solidFill>
-              <a:srgbClr val="F4F6F7"/>
+              <a:srgbClr val="E4F2FF"/>
             </a:solidFill>
             <a:prstDash val="solid"/>
           </a:ln>
@@ -4003,8 +4076,8 @@
         </p:nvSpPr>
         <p:spPr>
           <a:xfrm>
-            <a:off x="6583680" y="3200400"/>
-            <a:ext cx="4754880" cy="365760"/>
+            <a:off x="8229600" y="1600200"/>
+            <a:ext cx="3108960" cy="365760"/>
           </a:xfrm>
           <a:prstGeom prst="rect">
             <a:avLst/>
@@ -4022,13 +4095,13 @@
             <a:r>
               <a:rPr lang="en-US" sz="1800" b="1" dirty="0">
                 <a:solidFill>
-                  <a:srgbClr val="00B80C"/>
-                </a:solidFill>
-                <a:latin typeface="Malgun Gothic" pitchFamily="34" charset="0"/>
-                <a:ea typeface="Malgun Gothic" pitchFamily="34" charset="-122"/>
-                <a:cs typeface="Malgun Gothic" pitchFamily="34" charset="-120"/>
-              </a:rPr>
-              <a:t>퍼블리싱</a:t>
+                  <a:srgbClr val="2477B3"/>
+                </a:solidFill>
+                <a:latin typeface="Malgun Gothic" pitchFamily="34" charset="0"/>
+                <a:ea typeface="Malgun Gothic" pitchFamily="34" charset="-122"/>
+                <a:cs typeface="Malgun Gothic" pitchFamily="34" charset="-120"/>
+              </a:rPr>
+              <a:t>기술 부채와 위험</a:t>
             </a:r>
             <a:endParaRPr lang="en-US" sz="1800" dirty="0"/>
           </a:p>
@@ -4042,8 +4115,8 @@
         </p:nvSpPr>
         <p:spPr>
           <a:xfrm>
-            <a:off x="6583680" y="3657600"/>
-            <a:ext cx="4754880" cy="640080"/>
+            <a:off x="8229600" y="2103120"/>
+            <a:ext cx="3108960" cy="3383280"/>
           </a:xfrm>
           <a:prstGeom prst="rect">
             <a:avLst/>
@@ -4055,11 +4128,15 @@
           <a:bodyPr wrap="square" lIns="0" tIns="0" rIns="0" bIns="0" rtlCol="0" anchor="t"/>
           <a:lstStyle/>
           <a:p>
-            <a:pPr indent="0" marL="0">
-              <a:buNone/>
-            </a:pPr>
-            <a:r>
-              <a:rPr lang="en-US" sz="1500" dirty="0">
+            <a:pPr marL="342900" indent="-342900">
+              <a:spcAft>
+                <a:spcPts val="600"/>
+              </a:spcAft>
+              <a:buSzPct val="100000"/>
+              <a:buChar char="•"/>
+            </a:pPr>
+            <a:r>
+              <a:rPr lang="en-US" sz="1600" dirty="0">
                 <a:solidFill>
                   <a:srgbClr val="1B2A22"/>
                 </a:solidFill>
@@ -4067,104 +4144,20 @@
                 <a:ea typeface="Malgun Gothic" pitchFamily="34" charset="-122"/>
                 <a:cs typeface="Malgun Gothic" pitchFamily="34" charset="-120"/>
               </a:rPr>
-              <a:t>브랜드 원본 색 확정, 병원 화면 시안 보강</a:t>
-            </a:r>
-            <a:endParaRPr lang="en-US" sz="1500" dirty="0"/>
-          </a:p>
-        </p:txBody>
-      </p:sp>
-      <p:sp>
-        <p:nvSpPr>
-          <p:cNvPr id="13" name="Shape 10"/>
-          <p:cNvSpPr/>
-          <p:nvPr/>
-        </p:nvSpPr>
-        <p:spPr>
-          <a:xfrm>
-            <a:off x="6309360" y="4617720"/>
-            <a:ext cx="5303520" cy="1417320"/>
-          </a:xfrm>
-          <a:prstGeom prst="roundRect">
-            <a:avLst>
-              <a:gd name="adj" fmla="val 7742"/>
-            </a:avLst>
-          </a:prstGeom>
-          <a:solidFill>
-            <a:srgbClr val="F4F6F7"/>
-          </a:solidFill>
-          <a:ln w="12700">
-            <a:solidFill>
-              <a:srgbClr val="F4F6F7"/>
-            </a:solidFill>
-            <a:prstDash val="solid"/>
-          </a:ln>
-        </p:spPr>
-      </p:sp>
-      <p:sp>
-        <p:nvSpPr>
-          <p:cNvPr id="14" name="Text 11"/>
-          <p:cNvSpPr txBox="1"/>
-          <p:nvPr/>
-        </p:nvSpPr>
-        <p:spPr>
-          <a:xfrm>
-            <a:off x="6583680" y="4800600"/>
-            <a:ext cx="4754880" cy="365760"/>
-          </a:xfrm>
-          <a:prstGeom prst="rect">
-            <a:avLst/>
-          </a:prstGeom>
-          <a:noFill/>
-          <a:ln/>
-        </p:spPr>
-        <p:txBody>
-          <a:bodyPr wrap="square" lIns="0" tIns="0" rIns="0" bIns="0" rtlCol="0" anchor="t"/>
-          <a:lstStyle/>
-          <a:p>
-            <a:pPr indent="0" marL="0">
-              <a:buNone/>
-            </a:pPr>
-            <a:r>
-              <a:rPr lang="en-US" sz="1800" b="1" dirty="0">
-                <a:solidFill>
-                  <a:srgbClr val="2477B3"/>
-                </a:solidFill>
-                <a:latin typeface="Malgun Gothic" pitchFamily="34" charset="0"/>
-                <a:ea typeface="Malgun Gothic" pitchFamily="34" charset="-122"/>
-                <a:cs typeface="Malgun Gothic" pitchFamily="34" charset="-120"/>
-              </a:rPr>
-              <a:t>개발</a:t>
-            </a:r>
-            <a:endParaRPr lang="en-US" sz="1800" dirty="0"/>
-          </a:p>
-        </p:txBody>
-      </p:sp>
-      <p:sp>
-        <p:nvSpPr>
-          <p:cNvPr id="15" name="Text 12"/>
-          <p:cNvSpPr txBox="1"/>
-          <p:nvPr/>
-        </p:nvSpPr>
-        <p:spPr>
-          <a:xfrm>
-            <a:off x="6583680" y="5257800"/>
-            <a:ext cx="4754880" cy="640080"/>
-          </a:xfrm>
-          <a:prstGeom prst="rect">
-            <a:avLst/>
-          </a:prstGeom>
-          <a:noFill/>
-          <a:ln/>
-        </p:spPr>
-        <p:txBody>
-          <a:bodyPr wrap="square" lIns="0" tIns="0" rIns="0" bIns="0" rtlCol="0" anchor="t"/>
-          <a:lstStyle/>
-          <a:p>
-            <a:pPr indent="0" marL="0">
-              <a:buNone/>
-            </a:pPr>
-            <a:r>
-              <a:rPr lang="en-US" sz="1500" dirty="0">
+              <a:t>웹이 TypeScript가 아니라 JSX</a:t>
+            </a:r>
+            <a:endParaRPr lang="en-US" sz="1600" dirty="0"/>
+          </a:p>
+          <a:p>
+            <a:pPr marL="342900" indent="-342900">
+              <a:spcAft>
+                <a:spcPts val="600"/>
+              </a:spcAft>
+              <a:buSzPct val="100000"/>
+              <a:buChar char="•"/>
+            </a:pPr>
+            <a:r>
+              <a:rPr lang="en-US" sz="1600" dirty="0">
                 <a:solidFill>
                   <a:srgbClr val="1B2A22"/>
                 </a:solidFill>
@@ -4172,9 +4165,51 @@
                 <a:ea typeface="Malgun Gothic" pitchFamily="34" charset="-122"/>
                 <a:cs typeface="Malgun Gothic" pitchFamily="34" charset="-120"/>
               </a:rPr>
-              <a:t>저장소 통합 여부, 웹 TypeScript 전환 여부</a:t>
-            </a:r>
-            <a:endParaRPr lang="en-US" sz="1500" dirty="0"/>
+              <a:t>첨부 운영 항목 미결(바이러스 검사, 보관·파기)</a:t>
+            </a:r>
+            <a:endParaRPr lang="en-US" sz="1600" dirty="0"/>
+          </a:p>
+          <a:p>
+            <a:pPr marL="342900" indent="-342900">
+              <a:spcAft>
+                <a:spcPts val="600"/>
+              </a:spcAft>
+              <a:buSzPct val="100000"/>
+              <a:buChar char="•"/>
+            </a:pPr>
+            <a:r>
+              <a:rPr lang="en-US" sz="1600" dirty="0">
+                <a:solidFill>
+                  <a:srgbClr val="1B2A22"/>
+                </a:solidFill>
+                <a:latin typeface="Malgun Gothic" pitchFamily="34" charset="0"/>
+                <a:ea typeface="Malgun Gothic" pitchFamily="34" charset="-122"/>
+                <a:cs typeface="Malgun Gothic" pitchFamily="34" charset="-120"/>
+              </a:rPr>
+              <a:t>저장소 간 API 규격이 다름, 관리자 화면 중복</a:t>
+            </a:r>
+            <a:endParaRPr lang="en-US" sz="1600" dirty="0"/>
+          </a:p>
+          <a:p>
+            <a:pPr marL="342900" indent="-342900">
+              <a:spcAft>
+                <a:spcPts val="600"/>
+              </a:spcAft>
+              <a:buSzPct val="100000"/>
+              <a:buChar char="•"/>
+            </a:pPr>
+            <a:r>
+              <a:rPr lang="en-US" sz="1600" dirty="0">
+                <a:solidFill>
+                  <a:srgbClr val="1B2A22"/>
+                </a:solidFill>
+                <a:latin typeface="Malgun Gothic" pitchFamily="34" charset="0"/>
+                <a:ea typeface="Malgun Gothic" pitchFamily="34" charset="-122"/>
+                <a:cs typeface="Malgun Gothic" pitchFamily="34" charset="-120"/>
+              </a:rPr>
+              <a:t>단계 0 전에는 운영 로그인 불가</a:t>
+            </a:r>
+            <a:endParaRPr lang="en-US" sz="1600" dirty="0"/>
           </a:p>
         </p:txBody>
       </p:sp>
@@ -4237,6 +4272,1405 @@
 <file path=ppt/slides/slide12.xml><?xml version="1.0" encoding="utf-8"?>
 <p:sld xmlns:a="http://schemas.openxmlformats.org/drawingml/2006/main" xmlns:r="http://schemas.openxmlformats.org/officeDocument/2006/relationships" xmlns:p="http://schemas.openxmlformats.org/presentationml/2006/main">
   <p:cSld name="Slide 12">
+    <p:spTree>
+      <p:nvGrpSpPr>
+        <p:cNvPr id="1" name=""/>
+        <p:cNvGrpSpPr/>
+        <p:nvPr/>
+      </p:nvGrpSpPr>
+      <p:grpSpPr>
+        <a:xfrm>
+          <a:off x="0" y="0"/>
+          <a:ext cx="0" cy="0"/>
+          <a:chOff x="0" y="0"/>
+          <a:chExt cx="0" cy="0"/>
+        </a:xfrm>
+      </p:grpSpPr>
+      <p:sp>
+        <p:nvSpPr>
+          <p:cNvPr id="2" name="Text 0"/>
+          <p:cNvSpPr txBox="1"/>
+          <p:nvPr/>
+        </p:nvSpPr>
+        <p:spPr>
+          <a:xfrm>
+            <a:off x="548640" y="365760"/>
+            <a:ext cx="11064240" cy="822960"/>
+          </a:xfrm>
+          <a:prstGeom prst="rect">
+            <a:avLst/>
+          </a:prstGeom>
+          <a:noFill/>
+          <a:ln/>
+        </p:spPr>
+        <p:txBody>
+          <a:bodyPr wrap="square" lIns="0" tIns="0" rIns="0" bIns="0" rtlCol="0" anchor="ctr"/>
+          <a:lstStyle/>
+          <a:p>
+            <a:pPr indent="0" marL="0">
+              <a:buNone/>
+            </a:pPr>
+            <a:r>
+              <a:rPr lang="en-US" sz="3200" b="1" dirty="0">
+                <a:solidFill>
+                  <a:srgbClr val="1B2A22"/>
+                </a:solidFill>
+                <a:latin typeface="Malgun Gothic" pitchFamily="34" charset="0"/>
+                <a:ea typeface="Malgun Gothic" pitchFamily="34" charset="-122"/>
+                <a:cs typeface="Malgun Gothic" pitchFamily="34" charset="-120"/>
+              </a:rPr>
+              <a:t>어떤 방식을 언제 쓸까</a:t>
+            </a:r>
+            <a:endParaRPr lang="en-US" sz="3200" dirty="0"/>
+          </a:p>
+        </p:txBody>
+      </p:sp>
+      <p:sp>
+        <p:nvSpPr>
+          <p:cNvPr id="4" name="Shape 1"/>
+          <p:cNvSpPr/>
+          <p:nvPr/>
+        </p:nvSpPr>
+        <p:spPr>
+          <a:xfrm>
+            <a:off x="548640" y="1463040"/>
+            <a:ext cx="11064240" cy="914400"/>
+          </a:xfrm>
+          <a:prstGeom prst="roundRect">
+            <a:avLst>
+              <a:gd name="adj" fmla="val 12000"/>
+            </a:avLst>
+          </a:prstGeom>
+          <a:solidFill>
+            <a:srgbClr val="F4F6F7"/>
+          </a:solidFill>
+          <a:ln w="12700">
+            <a:solidFill>
+              <a:srgbClr val="F4F6F7"/>
+            </a:solidFill>
+            <a:prstDash val="solid"/>
+          </a:ln>
+        </p:spPr>
+      </p:sp>
+      <p:sp>
+        <p:nvSpPr>
+          <p:cNvPr id="5" name="Text 2"/>
+          <p:cNvSpPr txBox="1"/>
+          <p:nvPr/>
+        </p:nvSpPr>
+        <p:spPr>
+          <a:xfrm>
+            <a:off x="822960" y="1463040"/>
+            <a:ext cx="4206240" cy="914400"/>
+          </a:xfrm>
+          <a:prstGeom prst="rect">
+            <a:avLst/>
+          </a:prstGeom>
+          <a:noFill/>
+          <a:ln/>
+        </p:spPr>
+        <p:txBody>
+          <a:bodyPr wrap="square" lIns="0" tIns="0" rIns="0" bIns="0" rtlCol="0" anchor="ctr"/>
+          <a:lstStyle/>
+          <a:p>
+            <a:pPr indent="0" marL="0">
+              <a:buNone/>
+            </a:pPr>
+            <a:r>
+              <a:rPr lang="en-US" sz="1800" b="1" dirty="0">
+                <a:solidFill>
+                  <a:srgbClr val="1B2A22"/>
+                </a:solidFill>
+                <a:latin typeface="Malgun Gothic" pitchFamily="34" charset="0"/>
+                <a:ea typeface="Malgun Gothic" pitchFamily="34" charset="-122"/>
+                <a:cs typeface="Malgun Gothic" pitchFamily="34" charset="-120"/>
+              </a:rPr>
+              <a:t>이미 있는 화면을 React로 옮긴다</a:t>
+            </a:r>
+            <a:endParaRPr lang="en-US" sz="1800" dirty="0"/>
+          </a:p>
+        </p:txBody>
+      </p:sp>
+      <p:sp>
+        <p:nvSpPr>
+          <p:cNvPr id="6" name="Shape 3"/>
+          <p:cNvSpPr/>
+          <p:nvPr/>
+        </p:nvSpPr>
+        <p:spPr>
+          <a:xfrm>
+            <a:off x="5212080" y="1645920"/>
+            <a:ext cx="2103120" cy="548640"/>
+          </a:xfrm>
+          <a:prstGeom prst="roundRect">
+            <a:avLst>
+              <a:gd name="adj" fmla="val 50000"/>
+            </a:avLst>
+          </a:prstGeom>
+          <a:solidFill>
+            <a:srgbClr val="00B80C"/>
+          </a:solidFill>
+          <a:ln w="12700">
+            <a:solidFill>
+              <a:srgbClr val="00B80C"/>
+            </a:solidFill>
+            <a:prstDash val="solid"/>
+          </a:ln>
+        </p:spPr>
+      </p:sp>
+      <p:sp>
+        <p:nvSpPr>
+          <p:cNvPr id="7" name="Text 4"/>
+          <p:cNvSpPr txBox="1"/>
+          <p:nvPr/>
+        </p:nvSpPr>
+        <p:spPr>
+          <a:xfrm>
+            <a:off x="5212080" y="1645920"/>
+            <a:ext cx="2103120" cy="548640"/>
+          </a:xfrm>
+          <a:prstGeom prst="rect">
+            <a:avLst/>
+          </a:prstGeom>
+          <a:noFill/>
+          <a:ln/>
+        </p:spPr>
+        <p:txBody>
+          <a:bodyPr wrap="square" lIns="0" tIns="0" rIns="0" bIns="0" rtlCol="0" anchor="ctr"/>
+          <a:lstStyle/>
+          <a:p>
+            <a:pPr algn="ctr" indent="0" marL="0">
+              <a:buNone/>
+            </a:pPr>
+            <a:r>
+              <a:rPr lang="en-US" sz="1500" b="1" dirty="0">
+                <a:solidFill>
+                  <a:srgbClr val="FFFFFF"/>
+                </a:solidFill>
+                <a:latin typeface="Malgun Gothic" pitchFamily="34" charset="0"/>
+                <a:ea typeface="Malgun Gothic" pitchFamily="34" charset="-122"/>
+                <a:cs typeface="Malgun Gothic" pitchFamily="34" charset="-120"/>
+              </a:rPr>
+              <a:t>happicare 방식</a:t>
+            </a:r>
+            <a:endParaRPr lang="en-US" sz="1500" dirty="0"/>
+          </a:p>
+        </p:txBody>
+      </p:sp>
+      <p:sp>
+        <p:nvSpPr>
+          <p:cNvPr id="8" name="Text 5"/>
+          <p:cNvSpPr txBox="1"/>
+          <p:nvPr/>
+        </p:nvSpPr>
+        <p:spPr>
+          <a:xfrm>
+            <a:off x="7589520" y="1463040"/>
+            <a:ext cx="3840480" cy="914400"/>
+          </a:xfrm>
+          <a:prstGeom prst="rect">
+            <a:avLst/>
+          </a:prstGeom>
+          <a:noFill/>
+          <a:ln/>
+        </p:spPr>
+        <p:txBody>
+          <a:bodyPr wrap="square" lIns="0" tIns="0" rIns="0" bIns="0" rtlCol="0" anchor="ctr"/>
+          <a:lstStyle/>
+          <a:p>
+            <a:pPr indent="0" marL="0">
+              <a:buNone/>
+            </a:pPr>
+            <a:r>
+              <a:rPr lang="en-US" sz="1400" dirty="0">
+                <a:solidFill>
+                  <a:srgbClr val="666B70"/>
+                </a:solidFill>
+                <a:latin typeface="Malgun Gothic" pitchFamily="34" charset="0"/>
+                <a:ea typeface="Malgun Gothic" pitchFamily="34" charset="-122"/>
+                <a:cs typeface="Malgun Gothic" pitchFamily="34" charset="-120"/>
+              </a:rPr>
+              <a:t>원본을 기준으로 두고 비교 검수 반복</a:t>
+            </a:r>
+            <a:endParaRPr lang="en-US" sz="1400" dirty="0"/>
+          </a:p>
+        </p:txBody>
+      </p:sp>
+      <p:sp>
+        <p:nvSpPr>
+          <p:cNvPr id="9" name="Shape 6"/>
+          <p:cNvSpPr/>
+          <p:nvPr/>
+        </p:nvSpPr>
+        <p:spPr>
+          <a:xfrm>
+            <a:off x="548640" y="2560320"/>
+            <a:ext cx="11064240" cy="914400"/>
+          </a:xfrm>
+          <a:prstGeom prst="roundRect">
+            <a:avLst>
+              <a:gd name="adj" fmla="val 12000"/>
+            </a:avLst>
+          </a:prstGeom>
+          <a:solidFill>
+            <a:srgbClr val="F4F6F7"/>
+          </a:solidFill>
+          <a:ln w="12700">
+            <a:solidFill>
+              <a:srgbClr val="F4F6F7"/>
+            </a:solidFill>
+            <a:prstDash val="solid"/>
+          </a:ln>
+        </p:spPr>
+      </p:sp>
+      <p:sp>
+        <p:nvSpPr>
+          <p:cNvPr id="10" name="Text 7"/>
+          <p:cNvSpPr txBox="1"/>
+          <p:nvPr/>
+        </p:nvSpPr>
+        <p:spPr>
+          <a:xfrm>
+            <a:off x="822960" y="2560320"/>
+            <a:ext cx="4206240" cy="914400"/>
+          </a:xfrm>
+          <a:prstGeom prst="rect">
+            <a:avLst/>
+          </a:prstGeom>
+          <a:noFill/>
+          <a:ln/>
+        </p:spPr>
+        <p:txBody>
+          <a:bodyPr wrap="square" lIns="0" tIns="0" rIns="0" bIns="0" rtlCol="0" anchor="ctr"/>
+          <a:lstStyle/>
+          <a:p>
+            <a:pPr indent="0" marL="0">
+              <a:buNone/>
+            </a:pPr>
+            <a:r>
+              <a:rPr lang="en-US" sz="1800" b="1" dirty="0">
+                <a:solidFill>
+                  <a:srgbClr val="1B2A22"/>
+                </a:solidFill>
+                <a:latin typeface="Malgun Gothic" pitchFamily="34" charset="0"/>
+                <a:ea typeface="Malgun Gothic" pitchFamily="34" charset="-122"/>
+                <a:cs typeface="Malgun Gothic" pitchFamily="34" charset="-120"/>
+              </a:rPr>
+              <a:t>새 서비스를 처음부터 만든다</a:t>
+            </a:r>
+            <a:endParaRPr lang="en-US" sz="1800" dirty="0"/>
+          </a:p>
+        </p:txBody>
+      </p:sp>
+      <p:sp>
+        <p:nvSpPr>
+          <p:cNvPr id="11" name="Shape 8"/>
+          <p:cNvSpPr/>
+          <p:nvPr/>
+        </p:nvSpPr>
+        <p:spPr>
+          <a:xfrm>
+            <a:off x="5212080" y="2743200"/>
+            <a:ext cx="2103120" cy="548640"/>
+          </a:xfrm>
+          <a:prstGeom prst="roundRect">
+            <a:avLst>
+              <a:gd name="adj" fmla="val 50000"/>
+            </a:avLst>
+          </a:prstGeom>
+          <a:solidFill>
+            <a:srgbClr val="7047D8"/>
+          </a:solidFill>
+          <a:ln w="12700">
+            <a:solidFill>
+              <a:srgbClr val="7047D8"/>
+            </a:solidFill>
+            <a:prstDash val="solid"/>
+          </a:ln>
+        </p:spPr>
+      </p:sp>
+      <p:sp>
+        <p:nvSpPr>
+          <p:cNvPr id="12" name="Text 9"/>
+          <p:cNvSpPr txBox="1"/>
+          <p:nvPr/>
+        </p:nvSpPr>
+        <p:spPr>
+          <a:xfrm>
+            <a:off x="5212080" y="2743200"/>
+            <a:ext cx="2103120" cy="548640"/>
+          </a:xfrm>
+          <a:prstGeom prst="rect">
+            <a:avLst/>
+          </a:prstGeom>
+          <a:noFill/>
+          <a:ln/>
+        </p:spPr>
+        <p:txBody>
+          <a:bodyPr wrap="square" lIns="0" tIns="0" rIns="0" bIns="0" rtlCol="0" anchor="ctr"/>
+          <a:lstStyle/>
+          <a:p>
+            <a:pPr algn="ctr" indent="0" marL="0">
+              <a:buNone/>
+            </a:pPr>
+            <a:r>
+              <a:rPr lang="en-US" sz="1500" b="1" dirty="0">
+                <a:solidFill>
+                  <a:srgbClr val="FFFFFF"/>
+                </a:solidFill>
+                <a:latin typeface="Malgun Gothic" pitchFamily="34" charset="0"/>
+                <a:ea typeface="Malgun Gothic" pitchFamily="34" charset="-122"/>
+                <a:cs typeface="Malgun Gothic" pitchFamily="34" charset="-120"/>
+              </a:rPr>
+              <a:t>front2 방식</a:t>
+            </a:r>
+            <a:endParaRPr lang="en-US" sz="1500" dirty="0"/>
+          </a:p>
+        </p:txBody>
+      </p:sp>
+      <p:sp>
+        <p:nvSpPr>
+          <p:cNvPr id="13" name="Text 10"/>
+          <p:cNvSpPr txBox="1"/>
+          <p:nvPr/>
+        </p:nvSpPr>
+        <p:spPr>
+          <a:xfrm>
+            <a:off x="7589520" y="2560320"/>
+            <a:ext cx="3840480" cy="914400"/>
+          </a:xfrm>
+          <a:prstGeom prst="rect">
+            <a:avLst/>
+          </a:prstGeom>
+          <a:noFill/>
+          <a:ln/>
+        </p:spPr>
+        <p:txBody>
+          <a:bodyPr wrap="square" lIns="0" tIns="0" rIns="0" bIns="0" rtlCol="0" anchor="ctr"/>
+          <a:lstStyle/>
+          <a:p>
+            <a:pPr indent="0" marL="0">
+              <a:buNone/>
+            </a:pPr>
+            <a:r>
+              <a:rPr lang="en-US" sz="1400" dirty="0">
+                <a:solidFill>
+                  <a:srgbClr val="666B70"/>
+                </a:solidFill>
+                <a:latin typeface="Malgun Gothic" pitchFamily="34" charset="0"/>
+                <a:ea typeface="Malgun Gothic" pitchFamily="34" charset="-122"/>
+                <a:cs typeface="Malgun Gothic" pitchFamily="34" charset="-120"/>
+              </a:rPr>
+              <a:t>문서 → 설계 → 계획 → 구현 → 검증</a:t>
+            </a:r>
+            <a:endParaRPr lang="en-US" sz="1400" dirty="0"/>
+          </a:p>
+        </p:txBody>
+      </p:sp>
+      <p:sp>
+        <p:nvSpPr>
+          <p:cNvPr id="14" name="Shape 11"/>
+          <p:cNvSpPr/>
+          <p:nvPr/>
+        </p:nvSpPr>
+        <p:spPr>
+          <a:xfrm>
+            <a:off x="548640" y="3657600"/>
+            <a:ext cx="11064240" cy="914400"/>
+          </a:xfrm>
+          <a:prstGeom prst="roundRect">
+            <a:avLst>
+              <a:gd name="adj" fmla="val 12000"/>
+            </a:avLst>
+          </a:prstGeom>
+          <a:solidFill>
+            <a:srgbClr val="F4F6F7"/>
+          </a:solidFill>
+          <a:ln w="12700">
+            <a:solidFill>
+              <a:srgbClr val="F4F6F7"/>
+            </a:solidFill>
+            <a:prstDash val="solid"/>
+          </a:ln>
+        </p:spPr>
+      </p:sp>
+      <p:sp>
+        <p:nvSpPr>
+          <p:cNvPr id="15" name="Text 12"/>
+          <p:cNvSpPr txBox="1"/>
+          <p:nvPr/>
+        </p:nvSpPr>
+        <p:spPr>
+          <a:xfrm>
+            <a:off x="822960" y="3657600"/>
+            <a:ext cx="4206240" cy="914400"/>
+          </a:xfrm>
+          <a:prstGeom prst="rect">
+            <a:avLst/>
+          </a:prstGeom>
+          <a:noFill/>
+          <a:ln/>
+        </p:spPr>
+        <p:txBody>
+          <a:bodyPr wrap="square" lIns="0" tIns="0" rIns="0" bIns="0" rtlCol="0" anchor="ctr"/>
+          <a:lstStyle/>
+          <a:p>
+            <a:pPr indent="0" marL="0">
+              <a:buNone/>
+            </a:pPr>
+            <a:r>
+              <a:rPr lang="en-US" sz="1800" b="1" dirty="0">
+                <a:solidFill>
+                  <a:srgbClr val="1B2A22"/>
+                </a:solidFill>
+                <a:latin typeface="Malgun Gothic" pitchFamily="34" charset="0"/>
+                <a:ea typeface="Malgun Gothic" pitchFamily="34" charset="-122"/>
+                <a:cs typeface="Malgun Gothic" pitchFamily="34" charset="-120"/>
+              </a:rPr>
+              <a:t>팀원에게 개념을 가르친다</a:t>
+            </a:r>
+            <a:endParaRPr lang="en-US" sz="1800" dirty="0"/>
+          </a:p>
+        </p:txBody>
+      </p:sp>
+      <p:sp>
+        <p:nvSpPr>
+          <p:cNvPr id="16" name="Shape 13"/>
+          <p:cNvSpPr/>
+          <p:nvPr/>
+        </p:nvSpPr>
+        <p:spPr>
+          <a:xfrm>
+            <a:off x="5212080" y="3840480"/>
+            <a:ext cx="2103120" cy="548640"/>
+          </a:xfrm>
+          <a:prstGeom prst="roundRect">
+            <a:avLst>
+              <a:gd name="adj" fmla="val 50000"/>
+            </a:avLst>
+          </a:prstGeom>
+          <a:solidFill>
+            <a:srgbClr val="00B80C"/>
+          </a:solidFill>
+          <a:ln w="12700">
+            <a:solidFill>
+              <a:srgbClr val="00B80C"/>
+            </a:solidFill>
+            <a:prstDash val="solid"/>
+          </a:ln>
+        </p:spPr>
+      </p:sp>
+      <p:sp>
+        <p:nvSpPr>
+          <p:cNvPr id="17" name="Text 14"/>
+          <p:cNvSpPr txBox="1"/>
+          <p:nvPr/>
+        </p:nvSpPr>
+        <p:spPr>
+          <a:xfrm>
+            <a:off x="5212080" y="3840480"/>
+            <a:ext cx="2103120" cy="548640"/>
+          </a:xfrm>
+          <a:prstGeom prst="rect">
+            <a:avLst/>
+          </a:prstGeom>
+          <a:noFill/>
+          <a:ln/>
+        </p:spPr>
+        <p:txBody>
+          <a:bodyPr wrap="square" lIns="0" tIns="0" rIns="0" bIns="0" rtlCol="0" anchor="ctr"/>
+          <a:lstStyle/>
+          <a:p>
+            <a:pPr algn="ctr" indent="0" marL="0">
+              <a:buNone/>
+            </a:pPr>
+            <a:r>
+              <a:rPr lang="en-US" sz="1500" b="1" dirty="0">
+                <a:solidFill>
+                  <a:srgbClr val="FFFFFF"/>
+                </a:solidFill>
+                <a:latin typeface="Malgun Gothic" pitchFamily="34" charset="0"/>
+                <a:ea typeface="Malgun Gothic" pitchFamily="34" charset="-122"/>
+                <a:cs typeface="Malgun Gothic" pitchFamily="34" charset="-120"/>
+              </a:rPr>
+              <a:t>happicare 자료</a:t>
+            </a:r>
+            <a:endParaRPr lang="en-US" sz="1500" dirty="0"/>
+          </a:p>
+        </p:txBody>
+      </p:sp>
+      <p:sp>
+        <p:nvSpPr>
+          <p:cNvPr id="18" name="Text 15"/>
+          <p:cNvSpPr txBox="1"/>
+          <p:nvPr/>
+        </p:nvSpPr>
+        <p:spPr>
+          <a:xfrm>
+            <a:off x="7589520" y="3657600"/>
+            <a:ext cx="3840480" cy="914400"/>
+          </a:xfrm>
+          <a:prstGeom prst="rect">
+            <a:avLst/>
+          </a:prstGeom>
+          <a:noFill/>
+          <a:ln/>
+        </p:spPr>
+        <p:txBody>
+          <a:bodyPr wrap="square" lIns="0" tIns="0" rIns="0" bIns="0" rtlCol="0" anchor="ctr"/>
+          <a:lstStyle/>
+          <a:p>
+            <a:pPr indent="0" marL="0">
+              <a:buNone/>
+            </a:pPr>
+            <a:r>
+              <a:rPr lang="en-US" sz="1400" dirty="0">
+                <a:solidFill>
+                  <a:srgbClr val="666B70"/>
+                </a:solidFill>
+                <a:latin typeface="Malgun Gothic" pitchFamily="34" charset="0"/>
+                <a:ea typeface="Malgun Gothic" pitchFamily="34" charset="-122"/>
+                <a:cs typeface="Malgun Gothic" pitchFamily="34" charset="-120"/>
+              </a:rPr>
+              <a:t>학습 가이드·발표 대본 구성</a:t>
+            </a:r>
+            <a:endParaRPr lang="en-US" sz="1400" dirty="0"/>
+          </a:p>
+        </p:txBody>
+      </p:sp>
+      <p:sp>
+        <p:nvSpPr>
+          <p:cNvPr id="19" name="Shape 16"/>
+          <p:cNvSpPr/>
+          <p:nvPr/>
+        </p:nvSpPr>
+        <p:spPr>
+          <a:xfrm>
+            <a:off x="548640" y="4754880"/>
+            <a:ext cx="11064240" cy="914400"/>
+          </a:xfrm>
+          <a:prstGeom prst="roundRect">
+            <a:avLst>
+              <a:gd name="adj" fmla="val 12000"/>
+            </a:avLst>
+          </a:prstGeom>
+          <a:solidFill>
+            <a:srgbClr val="F4F6F7"/>
+          </a:solidFill>
+          <a:ln w="12700">
+            <a:solidFill>
+              <a:srgbClr val="F4F6F7"/>
+            </a:solidFill>
+            <a:prstDash val="solid"/>
+          </a:ln>
+        </p:spPr>
+      </p:sp>
+      <p:sp>
+        <p:nvSpPr>
+          <p:cNvPr id="20" name="Text 17"/>
+          <p:cNvSpPr txBox="1"/>
+          <p:nvPr/>
+        </p:nvSpPr>
+        <p:spPr>
+          <a:xfrm>
+            <a:off x="822960" y="4754880"/>
+            <a:ext cx="4206240" cy="914400"/>
+          </a:xfrm>
+          <a:prstGeom prst="rect">
+            <a:avLst/>
+          </a:prstGeom>
+          <a:noFill/>
+          <a:ln/>
+        </p:spPr>
+        <p:txBody>
+          <a:bodyPr wrap="square" lIns="0" tIns="0" rIns="0" bIns="0" rtlCol="0" anchor="ctr"/>
+          <a:lstStyle/>
+          <a:p>
+            <a:pPr indent="0" marL="0">
+              <a:buNone/>
+            </a:pPr>
+            <a:r>
+              <a:rPr lang="en-US" sz="1800" b="1" dirty="0">
+                <a:solidFill>
+                  <a:srgbClr val="1B2A22"/>
+                </a:solidFill>
+                <a:latin typeface="Malgun Gothic" pitchFamily="34" charset="0"/>
+                <a:ea typeface="Malgun Gothic" pitchFamily="34" charset="-122"/>
+                <a:cs typeface="Malgun Gothic" pitchFamily="34" charset="-120"/>
+              </a:rPr>
+              <a:t>운영까지 고려한다</a:t>
+            </a:r>
+            <a:endParaRPr lang="en-US" sz="1800" dirty="0"/>
+          </a:p>
+        </p:txBody>
+      </p:sp>
+      <p:sp>
+        <p:nvSpPr>
+          <p:cNvPr id="21" name="Shape 18"/>
+          <p:cNvSpPr/>
+          <p:nvPr/>
+        </p:nvSpPr>
+        <p:spPr>
+          <a:xfrm>
+            <a:off x="5212080" y="4937760"/>
+            <a:ext cx="2103120" cy="548640"/>
+          </a:xfrm>
+          <a:prstGeom prst="roundRect">
+            <a:avLst>
+              <a:gd name="adj" fmla="val 50000"/>
+            </a:avLst>
+          </a:prstGeom>
+          <a:solidFill>
+            <a:srgbClr val="7047D8"/>
+          </a:solidFill>
+          <a:ln w="12700">
+            <a:solidFill>
+              <a:srgbClr val="7047D8"/>
+            </a:solidFill>
+            <a:prstDash val="solid"/>
+          </a:ln>
+        </p:spPr>
+      </p:sp>
+      <p:sp>
+        <p:nvSpPr>
+          <p:cNvPr id="22" name="Text 19"/>
+          <p:cNvSpPr txBox="1"/>
+          <p:nvPr/>
+        </p:nvSpPr>
+        <p:spPr>
+          <a:xfrm>
+            <a:off x="5212080" y="4937760"/>
+            <a:ext cx="2103120" cy="548640"/>
+          </a:xfrm>
+          <a:prstGeom prst="rect">
+            <a:avLst/>
+          </a:prstGeom>
+          <a:noFill/>
+          <a:ln/>
+        </p:spPr>
+        <p:txBody>
+          <a:bodyPr wrap="square" lIns="0" tIns="0" rIns="0" bIns="0" rtlCol="0" anchor="ctr"/>
+          <a:lstStyle/>
+          <a:p>
+            <a:pPr algn="ctr" indent="0" marL="0">
+              <a:buNone/>
+            </a:pPr>
+            <a:r>
+              <a:rPr lang="en-US" sz="1500" b="1" dirty="0">
+                <a:solidFill>
+                  <a:srgbClr val="FFFFFF"/>
+                </a:solidFill>
+                <a:latin typeface="Malgun Gothic" pitchFamily="34" charset="0"/>
+                <a:ea typeface="Malgun Gothic" pitchFamily="34" charset="-122"/>
+                <a:cs typeface="Malgun Gothic" pitchFamily="34" charset="-120"/>
+              </a:rPr>
+              <a:t>front2 방식</a:t>
+            </a:r>
+            <a:endParaRPr lang="en-US" sz="1500" dirty="0"/>
+          </a:p>
+        </p:txBody>
+      </p:sp>
+      <p:sp>
+        <p:nvSpPr>
+          <p:cNvPr id="23" name="Text 20"/>
+          <p:cNvSpPr txBox="1"/>
+          <p:nvPr/>
+        </p:nvSpPr>
+        <p:spPr>
+          <a:xfrm>
+            <a:off x="7589520" y="4754880"/>
+            <a:ext cx="3840480" cy="914400"/>
+          </a:xfrm>
+          <a:prstGeom prst="rect">
+            <a:avLst/>
+          </a:prstGeom>
+          <a:noFill/>
+          <a:ln/>
+        </p:spPr>
+        <p:txBody>
+          <a:bodyPr wrap="square" lIns="0" tIns="0" rIns="0" bIns="0" rtlCol="0" anchor="ctr"/>
+          <a:lstStyle/>
+          <a:p>
+            <a:pPr indent="0" marL="0">
+              <a:buNone/>
+            </a:pPr>
+            <a:r>
+              <a:rPr lang="en-US" sz="1400" dirty="0">
+                <a:solidFill>
+                  <a:srgbClr val="666B70"/>
+                </a:solidFill>
+                <a:latin typeface="Malgun Gothic" pitchFamily="34" charset="0"/>
+                <a:ea typeface="Malgun Gothic" pitchFamily="34" charset="-122"/>
+                <a:cs typeface="Malgun Gothic" pitchFamily="34" charset="-120"/>
+              </a:rPr>
+              <a:t>CI·런북·점검 스크립트</a:t>
+            </a:r>
+            <a:endParaRPr lang="en-US" sz="1400" dirty="0"/>
+          </a:p>
+        </p:txBody>
+      </p:sp>
+      <p:sp>
+        <p:nvSpPr>
+          <p:cNvPr id="25" name="Slide Number Placeholder 0"/>
+          <p:cNvSpPr>
+            <a:spLocks noGrp="1"/>
+          </p:cNvSpPr>
+          <p:nvPr>
+            <p:ph type="sldNum" sz="quarter" idx="4294967295"/>
+          </p:nvPr>
+        </p:nvSpPr>
+        <p:spPr>
+          <a:xfrm>
+            <a:off x="11064240" y="6400800"/>
+            <a:ext cx="548640" cy="274320"/>
+          </a:xfrm>
+          <a:prstGeom prst="rect">
+            <a:avLst/>
+          </a:prstGeom>
+          <a:extLst>
+            <a:ext uri="{C572A759-6A51-4108-AA02-DFA0A04FC94B}">
+              <ma14:wrappingTextBoxFlag xmlns:ma14="http://schemas.microsoft.com/office/mac/drawingml/2011/main" val="0"/>
+            </a:ext>
+          </a:extLst>
+        </p:spPr>
+        <p:txBody>
+          <a:bodyPr/>
+          <a:lstStyle>
+            <a:lvl1pPr>
+              <a:defRPr sz="1000">
+                <a:solidFill>
+                  <a:srgbClr val="666B70"/>
+                </a:solidFill>
+                <a:latin typeface="Malgun Gothic"/>
+                <a:ea typeface="Malgun Gothic"/>
+                <a:cs typeface="Malgun Gothic"/>
+              </a:defRPr>
+            </a:lvl1pPr>
+          </a:lstStyle>
+          <a:p>
+            <a:pPr algn="r"/>
+            <a:fld id="{F7021451-1387-4CA6-816F-3879F97B5CBC}" type="slidenum">
+              <a:rPr b="0" lang="en-US"/>
+              <a:t>12</a:t>
+            </a:fld>
+            <a:endParaRPr lang="en-US"/>
+          </a:p>
+        </p:txBody>
+      </p:sp>
+    </p:spTree>
+  </p:cSld>
+  <p:clrMapOvr>
+    <a:masterClrMapping/>
+  </p:clrMapOvr>
+</p:sld>
+</file>
+
+<file path=ppt/slides/slide13.xml><?xml version="1.0" encoding="utf-8"?>
+<p:sld xmlns:a="http://schemas.openxmlformats.org/drawingml/2006/main" xmlns:r="http://schemas.openxmlformats.org/officeDocument/2006/relationships" xmlns:p="http://schemas.openxmlformats.org/presentationml/2006/main">
+  <p:cSld name="Slide 13">
+    <p:spTree>
+      <p:nvGrpSpPr>
+        <p:cNvPr id="1" name=""/>
+        <p:cNvGrpSpPr/>
+        <p:nvPr/>
+      </p:nvGrpSpPr>
+      <p:grpSpPr>
+        <a:xfrm>
+          <a:off x="0" y="0"/>
+          <a:ext cx="0" cy="0"/>
+          <a:chOff x="0" y="0"/>
+          <a:chExt cx="0" cy="0"/>
+        </a:xfrm>
+      </p:grpSpPr>
+      <p:sp>
+        <p:nvSpPr>
+          <p:cNvPr id="2" name="Text 0"/>
+          <p:cNvSpPr txBox="1"/>
+          <p:nvPr/>
+        </p:nvSpPr>
+        <p:spPr>
+          <a:xfrm>
+            <a:off x="548640" y="365760"/>
+            <a:ext cx="11064240" cy="822960"/>
+          </a:xfrm>
+          <a:prstGeom prst="rect">
+            <a:avLst/>
+          </a:prstGeom>
+          <a:noFill/>
+          <a:ln/>
+        </p:spPr>
+        <p:txBody>
+          <a:bodyPr wrap="square" lIns="0" tIns="0" rIns="0" bIns="0" rtlCol="0" anchor="ctr"/>
+          <a:lstStyle/>
+          <a:p>
+            <a:pPr indent="0" marL="0">
+              <a:buNone/>
+            </a:pPr>
+            <a:r>
+              <a:rPr lang="en-US" sz="3200" b="1" dirty="0">
+                <a:solidFill>
+                  <a:srgbClr val="1B2A22"/>
+                </a:solidFill>
+                <a:latin typeface="Malgun Gothic" pitchFamily="34" charset="0"/>
+                <a:ea typeface="Malgun Gothic" pitchFamily="34" charset="-122"/>
+                <a:cs typeface="Malgun Gothic" pitchFamily="34" charset="-120"/>
+              </a:rPr>
+              <a:t>합친다면, 그리고 팀에 요청할 결정</a:t>
+            </a:r>
+            <a:endParaRPr lang="en-US" sz="3200" dirty="0"/>
+          </a:p>
+        </p:txBody>
+      </p:sp>
+      <p:sp>
+        <p:nvSpPr>
+          <p:cNvPr id="4" name="Shape 1"/>
+          <p:cNvSpPr/>
+          <p:nvPr/>
+        </p:nvSpPr>
+        <p:spPr>
+          <a:xfrm>
+            <a:off x="548640" y="1417320"/>
+            <a:ext cx="5486400" cy="4480560"/>
+          </a:xfrm>
+          <a:prstGeom prst="roundRect">
+            <a:avLst>
+              <a:gd name="adj" fmla="val 2449"/>
+            </a:avLst>
+          </a:prstGeom>
+          <a:solidFill>
+            <a:srgbClr val="F4F6F7"/>
+          </a:solidFill>
+          <a:ln w="12700">
+            <a:solidFill>
+              <a:srgbClr val="F4F6F7"/>
+            </a:solidFill>
+            <a:prstDash val="solid"/>
+          </a:ln>
+        </p:spPr>
+      </p:sp>
+      <p:sp>
+        <p:nvSpPr>
+          <p:cNvPr id="5" name="Text 2"/>
+          <p:cNvSpPr txBox="1"/>
+          <p:nvPr/>
+        </p:nvSpPr>
+        <p:spPr>
+          <a:xfrm>
+            <a:off x="822960" y="1600200"/>
+            <a:ext cx="4937760" cy="365760"/>
+          </a:xfrm>
+          <a:prstGeom prst="rect">
+            <a:avLst/>
+          </a:prstGeom>
+          <a:noFill/>
+          <a:ln/>
+        </p:spPr>
+        <p:txBody>
+          <a:bodyPr wrap="square" lIns="0" tIns="0" rIns="0" bIns="0" rtlCol="0" anchor="t"/>
+          <a:lstStyle/>
+          <a:p>
+            <a:pPr indent="0" marL="0">
+              <a:buNone/>
+            </a:pPr>
+            <a:r>
+              <a:rPr lang="en-US" sz="1800" b="1" dirty="0">
+                <a:solidFill>
+                  <a:srgbClr val="00B80C"/>
+                </a:solidFill>
+                <a:latin typeface="Malgun Gothic" pitchFamily="34" charset="0"/>
+                <a:ea typeface="Malgun Gothic" pitchFamily="34" charset="-122"/>
+                <a:cs typeface="Malgun Gothic" pitchFamily="34" charset="-120"/>
+              </a:rPr>
+              <a:t>합치는 방향 (제안)</a:t>
+            </a:r>
+            <a:endParaRPr lang="en-US" sz="1800" dirty="0"/>
+          </a:p>
+        </p:txBody>
+      </p:sp>
+      <p:sp>
+        <p:nvSpPr>
+          <p:cNvPr id="6" name="Text 3"/>
+          <p:cNvSpPr txBox="1"/>
+          <p:nvPr/>
+        </p:nvSpPr>
+        <p:spPr>
+          <a:xfrm>
+            <a:off x="822960" y="2103120"/>
+            <a:ext cx="4937760" cy="3657600"/>
+          </a:xfrm>
+          <a:prstGeom prst="rect">
+            <a:avLst/>
+          </a:prstGeom>
+          <a:noFill/>
+          <a:ln/>
+        </p:spPr>
+        <p:txBody>
+          <a:bodyPr wrap="square" lIns="0" tIns="0" rIns="0" bIns="0" rtlCol="0" anchor="t"/>
+          <a:lstStyle/>
+          <a:p>
+            <a:pPr marL="342900" indent="-342900">
+              <a:spcAft>
+                <a:spcPts val="800"/>
+              </a:spcAft>
+              <a:buSzPct val="100000"/>
+              <a:buFont typeface="+mj-lt"/>
+              <a:buAutoNum type="arabicPeriod" startAt="1"/>
+            </a:pPr>
+            <a:r>
+              <a:rPr lang="en-US" sz="1600" dirty="0">
+                <a:solidFill>
+                  <a:srgbClr val="1B2A22"/>
+                </a:solidFill>
+                <a:latin typeface="Malgun Gothic" pitchFamily="34" charset="0"/>
+                <a:ea typeface="Malgun Gothic" pitchFamily="34" charset="-122"/>
+                <a:cs typeface="Malgun Gothic" pitchFamily="34" charset="-120"/>
+              </a:rPr>
+              <a:t>happicare의 셀프 해결 가이드·FAQ·4단계 위저드를 front2 병원 화면으로 이식</a:t>
+            </a:r>
+            <a:endParaRPr lang="en-US" sz="1600" dirty="0"/>
+          </a:p>
+          <a:p>
+            <a:pPr marL="342900" indent="-342900">
+              <a:spcAft>
+                <a:spcPts val="800"/>
+              </a:spcAft>
+              <a:buSzPct val="100000"/>
+              <a:buFont typeface="+mj-lt"/>
+              <a:buAutoNum type="arabicPeriod" startAt="1"/>
+            </a:pPr>
+            <a:r>
+              <a:rPr lang="en-US" sz="1600" dirty="0">
+                <a:solidFill>
+                  <a:srgbClr val="1B2A22"/>
+                </a:solidFill>
+                <a:latin typeface="Malgun Gothic" pitchFamily="34" charset="0"/>
+                <a:ea typeface="Malgun Gothic" pitchFamily="34" charset="-122"/>
+                <a:cs typeface="Malgun Gothic" pitchFamily="34" charset="-120"/>
+              </a:rPr>
+              <a:t>API 계약 문서와 실제 API 응답 형식 통일</a:t>
+            </a:r>
+            <a:endParaRPr lang="en-US" sz="1600" dirty="0"/>
+          </a:p>
+          <a:p>
+            <a:pPr marL="342900" indent="-342900">
+              <a:spcAft>
+                <a:spcPts val="800"/>
+              </a:spcAft>
+              <a:buSzPct val="100000"/>
+              <a:buFont typeface="+mj-lt"/>
+              <a:buAutoNum type="arabicPeriod" startAt="1"/>
+            </a:pPr>
+            <a:r>
+              <a:rPr lang="en-US" sz="1600" dirty="0">
+                <a:solidFill>
+                  <a:srgbClr val="1B2A22"/>
+                </a:solidFill>
+                <a:latin typeface="Malgun Gothic" pitchFamily="34" charset="0"/>
+                <a:ea typeface="Malgun Gothic" pitchFamily="34" charset="-122"/>
+                <a:cs typeface="Malgun Gothic" pitchFamily="34" charset="-120"/>
+              </a:rPr>
+              <a:t>문의 유형 정의(wizardSchemas.js, InquiryCategory)를 하나로</a:t>
+            </a:r>
+            <a:endParaRPr lang="en-US" sz="1600" dirty="0"/>
+          </a:p>
+          <a:p>
+            <a:pPr marL="342900" indent="-342900">
+              <a:spcAft>
+                <a:spcPts val="800"/>
+              </a:spcAft>
+              <a:buSzPct val="100000"/>
+              <a:buFont typeface="+mj-lt"/>
+              <a:buAutoNum type="arabicPeriod" startAt="1"/>
+            </a:pPr>
+            <a:r>
+              <a:rPr lang="en-US" sz="1600" dirty="0">
+                <a:solidFill>
+                  <a:srgbClr val="1B2A22"/>
+                </a:solidFill>
+                <a:latin typeface="Malgun Gothic" pitchFamily="34" charset="0"/>
+                <a:ea typeface="Malgun Gothic" pitchFamily="34" charset="-122"/>
+                <a:cs typeface="Malgun Gothic" pitchFamily="34" charset="-120"/>
+              </a:rPr>
+              <a:t>단계 0 확정 후 CRM 연동과 첫 배포</a:t>
+            </a:r>
+            <a:endParaRPr lang="en-US" sz="1600" dirty="0"/>
+          </a:p>
+        </p:txBody>
+      </p:sp>
+      <p:sp>
+        <p:nvSpPr>
+          <p:cNvPr id="7" name="Shape 4"/>
+          <p:cNvSpPr/>
+          <p:nvPr/>
+        </p:nvSpPr>
+        <p:spPr>
+          <a:xfrm>
+            <a:off x="6309360" y="1417320"/>
+            <a:ext cx="5303520" cy="1417320"/>
+          </a:xfrm>
+          <a:prstGeom prst="roundRect">
+            <a:avLst>
+              <a:gd name="adj" fmla="val 7742"/>
+            </a:avLst>
+          </a:prstGeom>
+          <a:solidFill>
+            <a:srgbClr val="F4F6F7"/>
+          </a:solidFill>
+          <a:ln w="12700">
+            <a:solidFill>
+              <a:srgbClr val="F4F6F7"/>
+            </a:solidFill>
+            <a:prstDash val="solid"/>
+          </a:ln>
+        </p:spPr>
+      </p:sp>
+      <p:sp>
+        <p:nvSpPr>
+          <p:cNvPr id="8" name="Text 5"/>
+          <p:cNvSpPr txBox="1"/>
+          <p:nvPr/>
+        </p:nvSpPr>
+        <p:spPr>
+          <a:xfrm>
+            <a:off x="6583680" y="1600200"/>
+            <a:ext cx="4754880" cy="365760"/>
+          </a:xfrm>
+          <a:prstGeom prst="rect">
+            <a:avLst/>
+          </a:prstGeom>
+          <a:noFill/>
+          <a:ln/>
+        </p:spPr>
+        <p:txBody>
+          <a:bodyPr wrap="square" lIns="0" tIns="0" rIns="0" bIns="0" rtlCol="0" anchor="t"/>
+          <a:lstStyle/>
+          <a:p>
+            <a:pPr indent="0" marL="0">
+              <a:buNone/>
+            </a:pPr>
+            <a:r>
+              <a:rPr lang="en-US" sz="1800" b="1" dirty="0">
+                <a:solidFill>
+                  <a:srgbClr val="7047D8"/>
+                </a:solidFill>
+                <a:latin typeface="Malgun Gothic" pitchFamily="34" charset="0"/>
+                <a:ea typeface="Malgun Gothic" pitchFamily="34" charset="-122"/>
+                <a:cs typeface="Malgun Gothic" pitchFamily="34" charset="-120"/>
+              </a:rPr>
+              <a:t>기획</a:t>
+            </a:r>
+            <a:endParaRPr lang="en-US" sz="1800" dirty="0"/>
+          </a:p>
+        </p:txBody>
+      </p:sp>
+      <p:sp>
+        <p:nvSpPr>
+          <p:cNvPr id="9" name="Text 6"/>
+          <p:cNvSpPr txBox="1"/>
+          <p:nvPr/>
+        </p:nvSpPr>
+        <p:spPr>
+          <a:xfrm>
+            <a:off x="6583680" y="2057400"/>
+            <a:ext cx="4754880" cy="640080"/>
+          </a:xfrm>
+          <a:prstGeom prst="rect">
+            <a:avLst/>
+          </a:prstGeom>
+          <a:noFill/>
+          <a:ln/>
+        </p:spPr>
+        <p:txBody>
+          <a:bodyPr wrap="square" lIns="0" tIns="0" rIns="0" bIns="0" rtlCol="0" anchor="t"/>
+          <a:lstStyle/>
+          <a:p>
+            <a:pPr indent="0" marL="0">
+              <a:buNone/>
+            </a:pPr>
+            <a:r>
+              <a:rPr lang="en-US" sz="1500" dirty="0">
+                <a:solidFill>
+                  <a:srgbClr val="1B2A22"/>
+                </a:solidFill>
+                <a:latin typeface="Malgun Gothic" pitchFamily="34" charset="0"/>
+                <a:ea typeface="Malgun Gothic" pitchFamily="34" charset="-122"/>
+                <a:cs typeface="Malgun Gothic" pitchFamily="34" charset="-120"/>
+              </a:rPr>
+              <a:t>단계 0 여섯 정책의 확정 일정</a:t>
+            </a:r>
+            <a:endParaRPr lang="en-US" sz="1500" dirty="0"/>
+          </a:p>
+        </p:txBody>
+      </p:sp>
+      <p:sp>
+        <p:nvSpPr>
+          <p:cNvPr id="10" name="Shape 7"/>
+          <p:cNvSpPr/>
+          <p:nvPr/>
+        </p:nvSpPr>
+        <p:spPr>
+          <a:xfrm>
+            <a:off x="6309360" y="3017520"/>
+            <a:ext cx="5303520" cy="1417320"/>
+          </a:xfrm>
+          <a:prstGeom prst="roundRect">
+            <a:avLst>
+              <a:gd name="adj" fmla="val 7742"/>
+            </a:avLst>
+          </a:prstGeom>
+          <a:solidFill>
+            <a:srgbClr val="F4F6F7"/>
+          </a:solidFill>
+          <a:ln w="12700">
+            <a:solidFill>
+              <a:srgbClr val="F4F6F7"/>
+            </a:solidFill>
+            <a:prstDash val="solid"/>
+          </a:ln>
+        </p:spPr>
+      </p:sp>
+      <p:sp>
+        <p:nvSpPr>
+          <p:cNvPr id="11" name="Text 8"/>
+          <p:cNvSpPr txBox="1"/>
+          <p:nvPr/>
+        </p:nvSpPr>
+        <p:spPr>
+          <a:xfrm>
+            <a:off x="6583680" y="3200400"/>
+            <a:ext cx="4754880" cy="365760"/>
+          </a:xfrm>
+          <a:prstGeom prst="rect">
+            <a:avLst/>
+          </a:prstGeom>
+          <a:noFill/>
+          <a:ln/>
+        </p:spPr>
+        <p:txBody>
+          <a:bodyPr wrap="square" lIns="0" tIns="0" rIns="0" bIns="0" rtlCol="0" anchor="t"/>
+          <a:lstStyle/>
+          <a:p>
+            <a:pPr indent="0" marL="0">
+              <a:buNone/>
+            </a:pPr>
+            <a:r>
+              <a:rPr lang="en-US" sz="1800" b="1" dirty="0">
+                <a:solidFill>
+                  <a:srgbClr val="00B80C"/>
+                </a:solidFill>
+                <a:latin typeface="Malgun Gothic" pitchFamily="34" charset="0"/>
+                <a:ea typeface="Malgun Gothic" pitchFamily="34" charset="-122"/>
+                <a:cs typeface="Malgun Gothic" pitchFamily="34" charset="-120"/>
+              </a:rPr>
+              <a:t>퍼블리싱</a:t>
+            </a:r>
+            <a:endParaRPr lang="en-US" sz="1800" dirty="0"/>
+          </a:p>
+        </p:txBody>
+      </p:sp>
+      <p:sp>
+        <p:nvSpPr>
+          <p:cNvPr id="12" name="Text 9"/>
+          <p:cNvSpPr txBox="1"/>
+          <p:nvPr/>
+        </p:nvSpPr>
+        <p:spPr>
+          <a:xfrm>
+            <a:off x="6583680" y="3657600"/>
+            <a:ext cx="4754880" cy="640080"/>
+          </a:xfrm>
+          <a:prstGeom prst="rect">
+            <a:avLst/>
+          </a:prstGeom>
+          <a:noFill/>
+          <a:ln/>
+        </p:spPr>
+        <p:txBody>
+          <a:bodyPr wrap="square" lIns="0" tIns="0" rIns="0" bIns="0" rtlCol="0" anchor="t"/>
+          <a:lstStyle/>
+          <a:p>
+            <a:pPr indent="0" marL="0">
+              <a:buNone/>
+            </a:pPr>
+            <a:r>
+              <a:rPr lang="en-US" sz="1500" dirty="0">
+                <a:solidFill>
+                  <a:srgbClr val="1B2A22"/>
+                </a:solidFill>
+                <a:latin typeface="Malgun Gothic" pitchFamily="34" charset="0"/>
+                <a:ea typeface="Malgun Gothic" pitchFamily="34" charset="-122"/>
+                <a:cs typeface="Malgun Gothic" pitchFamily="34" charset="-120"/>
+              </a:rPr>
+              <a:t>브랜드 원본 색 확정, 병원 화면 시안 보강</a:t>
+            </a:r>
+            <a:endParaRPr lang="en-US" sz="1500" dirty="0"/>
+          </a:p>
+        </p:txBody>
+      </p:sp>
+      <p:sp>
+        <p:nvSpPr>
+          <p:cNvPr id="13" name="Shape 10"/>
+          <p:cNvSpPr/>
+          <p:nvPr/>
+        </p:nvSpPr>
+        <p:spPr>
+          <a:xfrm>
+            <a:off x="6309360" y="4617720"/>
+            <a:ext cx="5303520" cy="1417320"/>
+          </a:xfrm>
+          <a:prstGeom prst="roundRect">
+            <a:avLst>
+              <a:gd name="adj" fmla="val 7742"/>
+            </a:avLst>
+          </a:prstGeom>
+          <a:solidFill>
+            <a:srgbClr val="F4F6F7"/>
+          </a:solidFill>
+          <a:ln w="12700">
+            <a:solidFill>
+              <a:srgbClr val="F4F6F7"/>
+            </a:solidFill>
+            <a:prstDash val="solid"/>
+          </a:ln>
+        </p:spPr>
+      </p:sp>
+      <p:sp>
+        <p:nvSpPr>
+          <p:cNvPr id="14" name="Text 11"/>
+          <p:cNvSpPr txBox="1"/>
+          <p:nvPr/>
+        </p:nvSpPr>
+        <p:spPr>
+          <a:xfrm>
+            <a:off x="6583680" y="4800600"/>
+            <a:ext cx="4754880" cy="365760"/>
+          </a:xfrm>
+          <a:prstGeom prst="rect">
+            <a:avLst/>
+          </a:prstGeom>
+          <a:noFill/>
+          <a:ln/>
+        </p:spPr>
+        <p:txBody>
+          <a:bodyPr wrap="square" lIns="0" tIns="0" rIns="0" bIns="0" rtlCol="0" anchor="t"/>
+          <a:lstStyle/>
+          <a:p>
+            <a:pPr indent="0" marL="0">
+              <a:buNone/>
+            </a:pPr>
+            <a:r>
+              <a:rPr lang="en-US" sz="1800" b="1" dirty="0">
+                <a:solidFill>
+                  <a:srgbClr val="2477B3"/>
+                </a:solidFill>
+                <a:latin typeface="Malgun Gothic" pitchFamily="34" charset="0"/>
+                <a:ea typeface="Malgun Gothic" pitchFamily="34" charset="-122"/>
+                <a:cs typeface="Malgun Gothic" pitchFamily="34" charset="-120"/>
+              </a:rPr>
+              <a:t>개발</a:t>
+            </a:r>
+            <a:endParaRPr lang="en-US" sz="1800" dirty="0"/>
+          </a:p>
+        </p:txBody>
+      </p:sp>
+      <p:sp>
+        <p:nvSpPr>
+          <p:cNvPr id="15" name="Text 12"/>
+          <p:cNvSpPr txBox="1"/>
+          <p:nvPr/>
+        </p:nvSpPr>
+        <p:spPr>
+          <a:xfrm>
+            <a:off x="6583680" y="5257800"/>
+            <a:ext cx="4754880" cy="640080"/>
+          </a:xfrm>
+          <a:prstGeom prst="rect">
+            <a:avLst/>
+          </a:prstGeom>
+          <a:noFill/>
+          <a:ln/>
+        </p:spPr>
+        <p:txBody>
+          <a:bodyPr wrap="square" lIns="0" tIns="0" rIns="0" bIns="0" rtlCol="0" anchor="t"/>
+          <a:lstStyle/>
+          <a:p>
+            <a:pPr indent="0" marL="0">
+              <a:buNone/>
+            </a:pPr>
+            <a:r>
+              <a:rPr lang="en-US" sz="1500" dirty="0">
+                <a:solidFill>
+                  <a:srgbClr val="1B2A22"/>
+                </a:solidFill>
+                <a:latin typeface="Malgun Gothic" pitchFamily="34" charset="0"/>
+                <a:ea typeface="Malgun Gothic" pitchFamily="34" charset="-122"/>
+                <a:cs typeface="Malgun Gothic" pitchFamily="34" charset="-120"/>
+              </a:rPr>
+              <a:t>저장소 통합 여부, 관리자 화면 기준 저장소, 웹 TypeScript 전환 여부</a:t>
+            </a:r>
+            <a:endParaRPr lang="en-US" sz="1500" dirty="0"/>
+          </a:p>
+        </p:txBody>
+      </p:sp>
+      <p:sp>
+        <p:nvSpPr>
+          <p:cNvPr id="25" name="Slide Number Placeholder 0"/>
+          <p:cNvSpPr>
+            <a:spLocks noGrp="1"/>
+          </p:cNvSpPr>
+          <p:nvPr>
+            <p:ph type="sldNum" sz="quarter" idx="4294967295"/>
+          </p:nvPr>
+        </p:nvSpPr>
+        <p:spPr>
+          <a:xfrm>
+            <a:off x="11064240" y="6400800"/>
+            <a:ext cx="548640" cy="274320"/>
+          </a:xfrm>
+          <a:prstGeom prst="rect">
+            <a:avLst/>
+          </a:prstGeom>
+          <a:extLst>
+            <a:ext uri="{C572A759-6A51-4108-AA02-DFA0A04FC94B}">
+              <ma14:wrappingTextBoxFlag xmlns:ma14="http://schemas.microsoft.com/office/mac/drawingml/2011/main" val="0"/>
+            </a:ext>
+          </a:extLst>
+        </p:spPr>
+        <p:txBody>
+          <a:bodyPr/>
+          <a:lstStyle>
+            <a:lvl1pPr>
+              <a:defRPr sz="1000">
+                <a:solidFill>
+                  <a:srgbClr val="666B70"/>
+                </a:solidFill>
+                <a:latin typeface="Malgun Gothic"/>
+                <a:ea typeface="Malgun Gothic"/>
+                <a:cs typeface="Malgun Gothic"/>
+              </a:defRPr>
+            </a:lvl1pPr>
+          </a:lstStyle>
+          <a:p>
+            <a:pPr algn="r"/>
+            <a:fld id="{F7021451-1387-4CA6-816F-3879F97B5CBC}" type="slidenum">
+              <a:rPr b="0" lang="en-US"/>
+              <a:t>13</a:t>
+            </a:fld>
+            <a:endParaRPr lang="en-US"/>
+          </a:p>
+        </p:txBody>
+      </p:sp>
+    </p:spTree>
+  </p:cSld>
+  <p:clrMapOvr>
+    <a:masterClrMapping/>
+  </p:clrMapOvr>
+</p:sld>
+</file>
+
+<file path=ppt/slides/slide14.xml><?xml version="1.0" encoding="utf-8"?>
+<p:sld xmlns:a="http://schemas.openxmlformats.org/drawingml/2006/main" xmlns:r="http://schemas.openxmlformats.org/officeDocument/2006/relationships" xmlns:p="http://schemas.openxmlformats.org/presentationml/2006/main">
+  <p:cSld name="Slide 14">
     <p:spTree>
       <p:nvGrpSpPr>
         <p:cNvPr id="1" name=""/>
@@ -8867,7 +10301,7 @@
                 <a:ea typeface="Malgun Gothic" pitchFamily="34" charset="-122"/>
                 <a:cs typeface="Malgun Gothic" pitchFamily="34" charset="-120"/>
               </a:rPr>
-              <a:t>기획자: 문서가 곧 구현 기준입니다</a:t>
+              <a:t>저장소 4개의 관계: 프로토타입에서 풀스택으로</a:t>
             </a:r>
             <a:endParaRPr lang="en-US" sz="3200" dirty="0"/>
           </a:p>
@@ -8881,12 +10315,456 @@
         </p:nvSpPr>
         <p:spPr>
           <a:xfrm>
-            <a:off x="548640" y="1463040"/>
-            <a:ext cx="3474720" cy="4206240"/>
+            <a:off x="548640" y="1554480"/>
+            <a:ext cx="3474720" cy="2834640"/>
           </a:xfrm>
           <a:prstGeom prst="roundRect">
             <a:avLst>
-              <a:gd name="adj" fmla="val 3158"/>
+              <a:gd name="adj" fmla="val 3871"/>
+            </a:avLst>
+          </a:prstGeom>
+          <a:solidFill>
+            <a:srgbClr val="EAF8EA"/>
+          </a:solidFill>
+          <a:ln w="12700">
+            <a:solidFill>
+              <a:srgbClr val="EAF8EA"/>
+            </a:solidFill>
+            <a:prstDash val="solid"/>
+          </a:ln>
+        </p:spPr>
+      </p:sp>
+      <p:sp>
+        <p:nvSpPr>
+          <p:cNvPr id="5" name="Text 2"/>
+          <p:cNvSpPr txBox="1"/>
+          <p:nvPr/>
+        </p:nvSpPr>
+        <p:spPr>
+          <a:xfrm>
+            <a:off x="822960" y="1783080"/>
+            <a:ext cx="3017520" cy="365760"/>
+          </a:xfrm>
+          <a:prstGeom prst="rect">
+            <a:avLst/>
+          </a:prstGeom>
+          <a:noFill/>
+          <a:ln/>
+        </p:spPr>
+        <p:txBody>
+          <a:bodyPr wrap="square" lIns="0" tIns="0" rIns="0" bIns="0" rtlCol="0" anchor="t"/>
+          <a:lstStyle/>
+          <a:p>
+            <a:pPr indent="0" marL="0">
+              <a:buNone/>
+            </a:pPr>
+            <a:r>
+              <a:rPr lang="en-US" sz="1700" b="1" dirty="0">
+                <a:solidFill>
+                  <a:srgbClr val="00B80C"/>
+                </a:solidFill>
+                <a:latin typeface="Malgun Gothic" pitchFamily="34" charset="0"/>
+                <a:ea typeface="Malgun Gothic" pitchFamily="34" charset="-122"/>
+                <a:cs typeface="Malgun Gothic" pitchFamily="34" charset="-120"/>
+              </a:rPr>
+              <a:t>happicare</a:t>
+            </a:r>
+            <a:endParaRPr lang="en-US" sz="1700" dirty="0"/>
+          </a:p>
+        </p:txBody>
+      </p:sp>
+      <p:sp>
+        <p:nvSpPr>
+          <p:cNvPr id="6" name="Text 3"/>
+          <p:cNvSpPr txBox="1"/>
+          <p:nvPr/>
+        </p:nvSpPr>
+        <p:spPr>
+          <a:xfrm>
+            <a:off x="822960" y="2331720"/>
+            <a:ext cx="3017520" cy="457200"/>
+          </a:xfrm>
+          <a:prstGeom prst="rect">
+            <a:avLst/>
+          </a:prstGeom>
+          <a:noFill/>
+          <a:ln/>
+        </p:spPr>
+        <p:txBody>
+          <a:bodyPr wrap="square" lIns="0" tIns="0" rIns="0" bIns="0" rtlCol="0" anchor="t"/>
+          <a:lstStyle/>
+          <a:p>
+            <a:pPr indent="0" marL="0">
+              <a:buNone/>
+            </a:pPr>
+            <a:r>
+              <a:rPr lang="en-US" sz="2200" b="1" dirty="0">
+                <a:solidFill>
+                  <a:srgbClr val="1B2A22"/>
+                </a:solidFill>
+                <a:latin typeface="Malgun Gothic" pitchFamily="34" charset="0"/>
+                <a:ea typeface="Malgun Gothic" pitchFamily="34" charset="-122"/>
+                <a:cs typeface="Malgun Gothic" pitchFamily="34" charset="-120"/>
+              </a:rPr>
+              <a:t>고객 화면 이식</a:t>
+            </a:r>
+            <a:endParaRPr lang="en-US" sz="2200" dirty="0"/>
+          </a:p>
+        </p:txBody>
+      </p:sp>
+      <p:sp>
+        <p:nvSpPr>
+          <p:cNvPr id="7" name="Text 4"/>
+          <p:cNvSpPr txBox="1"/>
+          <p:nvPr/>
+        </p:nvSpPr>
+        <p:spPr>
+          <a:xfrm>
+            <a:off x="822960" y="3108960"/>
+            <a:ext cx="3017520" cy="365760"/>
+          </a:xfrm>
+          <a:prstGeom prst="rect">
+            <a:avLst/>
+          </a:prstGeom>
+          <a:noFill/>
+          <a:ln/>
+        </p:spPr>
+        <p:txBody>
+          <a:bodyPr wrap="square" lIns="0" tIns="0" rIns="0" bIns="0" rtlCol="0" anchor="t"/>
+          <a:lstStyle/>
+          <a:p>
+            <a:pPr indent="0" marL="0">
+              <a:buNone/>
+            </a:pPr>
+            <a:r>
+              <a:rPr lang="en-US" sz="1400" dirty="0">
+                <a:solidFill>
+                  <a:srgbClr val="666B70"/>
+                </a:solidFill>
+                <a:latin typeface="Malgun Gothic" pitchFamily="34" charset="0"/>
+                <a:ea typeface="Malgun Gothic" pitchFamily="34" charset="-122"/>
+                <a:cs typeface="Malgun Gothic" pitchFamily="34" charset="-120"/>
+              </a:rPr>
+              <a:t>8/25 ~ 10/13 · 커밋 12</a:t>
+            </a:r>
+            <a:endParaRPr lang="en-US" sz="1400" dirty="0"/>
+          </a:p>
+        </p:txBody>
+      </p:sp>
+      <p:sp>
+        <p:nvSpPr>
+          <p:cNvPr id="8" name="Text 5"/>
+          <p:cNvSpPr txBox="1"/>
+          <p:nvPr/>
+        </p:nvSpPr>
+        <p:spPr>
+          <a:xfrm>
+            <a:off x="822960" y="3611880"/>
+            <a:ext cx="3017520" cy="457200"/>
+          </a:xfrm>
+          <a:prstGeom prst="rect">
+            <a:avLst/>
+          </a:prstGeom>
+          <a:noFill/>
+          <a:ln/>
+        </p:spPr>
+        <p:txBody>
+          <a:bodyPr wrap="square" lIns="0" tIns="0" rIns="0" bIns="0" rtlCol="0" anchor="t"/>
+          <a:lstStyle/>
+          <a:p>
+            <a:pPr indent="0" marL="0">
+              <a:buNone/>
+            </a:pPr>
+            <a:r>
+              <a:rPr lang="en-US" sz="1500" dirty="0">
+                <a:solidFill>
+                  <a:srgbClr val="1B2A22"/>
+                </a:solidFill>
+                <a:latin typeface="Malgun Gothic" pitchFamily="34" charset="0"/>
+                <a:ea typeface="Malgun Gothic" pitchFamily="34" charset="-122"/>
+                <a:cs typeface="Malgun Gothic" pitchFamily="34" charset="-120"/>
+              </a:rPr>
+              <a:t>sessionStorage mock</a:t>
+            </a:r>
+            <a:endParaRPr lang="en-US" sz="1500" dirty="0"/>
+          </a:p>
+        </p:txBody>
+      </p:sp>
+      <p:sp>
+        <p:nvSpPr>
+          <p:cNvPr id="9" name="Text 6"/>
+          <p:cNvSpPr txBox="1"/>
+          <p:nvPr/>
+        </p:nvSpPr>
+        <p:spPr>
+          <a:xfrm>
+            <a:off x="4023360" y="2468880"/>
+            <a:ext cx="320040" cy="548640"/>
+          </a:xfrm>
+          <a:prstGeom prst="rect">
+            <a:avLst/>
+          </a:prstGeom>
+          <a:noFill/>
+          <a:ln/>
+        </p:spPr>
+        <p:txBody>
+          <a:bodyPr wrap="square" lIns="0" tIns="0" rIns="0" bIns="0" rtlCol="0" anchor="ctr"/>
+          <a:lstStyle/>
+          <a:p>
+            <a:pPr algn="ctr" indent="0" marL="0">
+              <a:buNone/>
+            </a:pPr>
+            <a:r>
+              <a:rPr lang="en-US" sz="2400" dirty="0">
+                <a:solidFill>
+                  <a:srgbClr val="666B70"/>
+                </a:solidFill>
+                <a:latin typeface="Malgun Gothic" pitchFamily="34" charset="0"/>
+                <a:ea typeface="Malgun Gothic" pitchFamily="34" charset="-122"/>
+                <a:cs typeface="Malgun Gothic" pitchFamily="34" charset="-120"/>
+              </a:rPr>
+              <a:t>→</a:t>
+            </a:r>
+            <a:endParaRPr lang="en-US" sz="2400" dirty="0"/>
+          </a:p>
+        </p:txBody>
+      </p:sp>
+      <p:sp>
+        <p:nvSpPr>
+          <p:cNvPr id="10" name="Shape 7"/>
+          <p:cNvSpPr/>
+          <p:nvPr/>
+        </p:nvSpPr>
+        <p:spPr>
+          <a:xfrm>
+            <a:off x="4343400" y="1554480"/>
+            <a:ext cx="3474720" cy="2834640"/>
+          </a:xfrm>
+          <a:prstGeom prst="roundRect">
+            <a:avLst>
+              <a:gd name="adj" fmla="val 3871"/>
+            </a:avLst>
+          </a:prstGeom>
+          <a:solidFill>
+            <a:srgbClr val="FFF1D7"/>
+          </a:solidFill>
+          <a:ln w="12700">
+            <a:solidFill>
+              <a:srgbClr val="FFF1D7"/>
+            </a:solidFill>
+            <a:prstDash val="solid"/>
+          </a:ln>
+        </p:spPr>
+      </p:sp>
+      <p:sp>
+        <p:nvSpPr>
+          <p:cNvPr id="11" name="Text 8"/>
+          <p:cNvSpPr txBox="1"/>
+          <p:nvPr/>
+        </p:nvSpPr>
+        <p:spPr>
+          <a:xfrm>
+            <a:off x="4617720" y="1783080"/>
+            <a:ext cx="3017520" cy="365760"/>
+          </a:xfrm>
+          <a:prstGeom prst="rect">
+            <a:avLst/>
+          </a:prstGeom>
+          <a:noFill/>
+          <a:ln/>
+        </p:spPr>
+        <p:txBody>
+          <a:bodyPr wrap="square" lIns="0" tIns="0" rIns="0" bIns="0" rtlCol="0" anchor="t"/>
+          <a:lstStyle/>
+          <a:p>
+            <a:pPr indent="0" marL="0">
+              <a:buNone/>
+            </a:pPr>
+            <a:r>
+              <a:rPr lang="en-US" sz="1700" b="1" dirty="0">
+                <a:solidFill>
+                  <a:srgbClr val="B77600"/>
+                </a:solidFill>
+                <a:latin typeface="Malgun Gothic" pitchFamily="34" charset="0"/>
+                <a:ea typeface="Malgun Gothic" pitchFamily="34" charset="-122"/>
+                <a:cs typeface="Malgun Gothic" pitchFamily="34" charset="-120"/>
+              </a:rPr>
+              <a:t>happicare_admin_version2</a:t>
+            </a:r>
+            <a:endParaRPr lang="en-US" sz="1700" dirty="0"/>
+          </a:p>
+        </p:txBody>
+      </p:sp>
+      <p:sp>
+        <p:nvSpPr>
+          <p:cNvPr id="12" name="Text 9"/>
+          <p:cNvSpPr txBox="1"/>
+          <p:nvPr/>
+        </p:nvSpPr>
+        <p:spPr>
+          <a:xfrm>
+            <a:off x="4617720" y="2331720"/>
+            <a:ext cx="3017520" cy="457200"/>
+          </a:xfrm>
+          <a:prstGeom prst="rect">
+            <a:avLst/>
+          </a:prstGeom>
+          <a:noFill/>
+          <a:ln/>
+        </p:spPr>
+        <p:txBody>
+          <a:bodyPr wrap="square" lIns="0" tIns="0" rIns="0" bIns="0" rtlCol="0" anchor="t"/>
+          <a:lstStyle/>
+          <a:p>
+            <a:pPr indent="0" marL="0">
+              <a:buNone/>
+            </a:pPr>
+            <a:r>
+              <a:rPr lang="en-US" sz="2200" b="1" dirty="0">
+                <a:solidFill>
+                  <a:srgbClr val="1B2A22"/>
+                </a:solidFill>
+                <a:latin typeface="Malgun Gothic" pitchFamily="34" charset="0"/>
+                <a:ea typeface="Malgun Gothic" pitchFamily="34" charset="-122"/>
+                <a:cs typeface="Malgun Gothic" pitchFamily="34" charset="-120"/>
+              </a:rPr>
+              <a:t>관리자 프로토타입</a:t>
+            </a:r>
+            <a:endParaRPr lang="en-US" sz="2200" dirty="0"/>
+          </a:p>
+        </p:txBody>
+      </p:sp>
+      <p:sp>
+        <p:nvSpPr>
+          <p:cNvPr id="13" name="Text 10"/>
+          <p:cNvSpPr txBox="1"/>
+          <p:nvPr/>
+        </p:nvSpPr>
+        <p:spPr>
+          <a:xfrm>
+            <a:off x="4617720" y="3108960"/>
+            <a:ext cx="3017520" cy="365760"/>
+          </a:xfrm>
+          <a:prstGeom prst="rect">
+            <a:avLst/>
+          </a:prstGeom>
+          <a:noFill/>
+          <a:ln/>
+        </p:spPr>
+        <p:txBody>
+          <a:bodyPr wrap="square" lIns="0" tIns="0" rIns="0" bIns="0" rtlCol="0" anchor="t"/>
+          <a:lstStyle/>
+          <a:p>
+            <a:pPr indent="0" marL="0">
+              <a:buNone/>
+            </a:pPr>
+            <a:r>
+              <a:rPr lang="en-US" sz="1400" dirty="0">
+                <a:solidFill>
+                  <a:srgbClr val="666B70"/>
+                </a:solidFill>
+                <a:latin typeface="Malgun Gothic" pitchFamily="34" charset="0"/>
+                <a:ea typeface="Malgun Gothic" pitchFamily="34" charset="-122"/>
+                <a:cs typeface="Malgun Gothic" pitchFamily="34" charset="-120"/>
+              </a:rPr>
+              <a:t>9/6 ~ 9/20 · 커밋 8</a:t>
+            </a:r>
+            <a:endParaRPr lang="en-US" sz="1400" dirty="0"/>
+          </a:p>
+        </p:txBody>
+      </p:sp>
+      <p:sp>
+        <p:nvSpPr>
+          <p:cNvPr id="14" name="Text 11"/>
+          <p:cNvSpPr txBox="1"/>
+          <p:nvPr/>
+        </p:nvSpPr>
+        <p:spPr>
+          <a:xfrm>
+            <a:off x="4617720" y="3611880"/>
+            <a:ext cx="3017520" cy="457200"/>
+          </a:xfrm>
+          <a:prstGeom prst="rect">
+            <a:avLst/>
+          </a:prstGeom>
+          <a:noFill/>
+          <a:ln/>
+        </p:spPr>
+        <p:txBody>
+          <a:bodyPr wrap="square" lIns="0" tIns="0" rIns="0" bIns="0" rtlCol="0" anchor="t"/>
+          <a:lstStyle/>
+          <a:p>
+            <a:pPr indent="0" marL="0">
+              <a:buNone/>
+            </a:pPr>
+            <a:r>
+              <a:rPr lang="en-US" sz="1500" dirty="0">
+                <a:solidFill>
+                  <a:srgbClr val="1B2A22"/>
+                </a:solidFill>
+                <a:latin typeface="Malgun Gothic" pitchFamily="34" charset="0"/>
+                <a:ea typeface="Malgun Gothic" pitchFamily="34" charset="-122"/>
+                <a:cs typeface="Malgun Gothic" pitchFamily="34" charset="-120"/>
+              </a:rPr>
+              <a:t>MSW mock · 계약 정의</a:t>
+            </a:r>
+            <a:endParaRPr lang="en-US" sz="1500" dirty="0"/>
+          </a:p>
+        </p:txBody>
+      </p:sp>
+      <p:sp>
+        <p:nvSpPr>
+          <p:cNvPr id="15" name="Text 12"/>
+          <p:cNvSpPr txBox="1"/>
+          <p:nvPr/>
+        </p:nvSpPr>
+        <p:spPr>
+          <a:xfrm>
+            <a:off x="7818120" y="2468880"/>
+            <a:ext cx="320040" cy="548640"/>
+          </a:xfrm>
+          <a:prstGeom prst="rect">
+            <a:avLst/>
+          </a:prstGeom>
+          <a:noFill/>
+          <a:ln/>
+        </p:spPr>
+        <p:txBody>
+          <a:bodyPr wrap="square" lIns="0" tIns="0" rIns="0" bIns="0" rtlCol="0" anchor="ctr"/>
+          <a:lstStyle/>
+          <a:p>
+            <a:pPr algn="ctr" indent="0" marL="0">
+              <a:buNone/>
+            </a:pPr>
+            <a:r>
+              <a:rPr lang="en-US" sz="2400" dirty="0">
+                <a:solidFill>
+                  <a:srgbClr val="666B70"/>
+                </a:solidFill>
+                <a:latin typeface="Malgun Gothic" pitchFamily="34" charset="0"/>
+                <a:ea typeface="Malgun Gothic" pitchFamily="34" charset="-122"/>
+                <a:cs typeface="Malgun Gothic" pitchFamily="34" charset="-120"/>
+              </a:rPr>
+              <a:t>→</a:t>
+            </a:r>
+            <a:endParaRPr lang="en-US" sz="2400" dirty="0"/>
+          </a:p>
+        </p:txBody>
+      </p:sp>
+      <p:sp>
+        <p:nvSpPr>
+          <p:cNvPr id="16" name="Shape 13"/>
+          <p:cNvSpPr/>
+          <p:nvPr/>
+        </p:nvSpPr>
+        <p:spPr>
+          <a:xfrm>
+            <a:off x="8138160" y="1554480"/>
+            <a:ext cx="3474720" cy="2834640"/>
+          </a:xfrm>
+          <a:prstGeom prst="roundRect">
+            <a:avLst>
+              <a:gd name="adj" fmla="val 3871"/>
             </a:avLst>
           </a:prstGeom>
           <a:solidFill>
@@ -8902,14 +10780,14 @@
       </p:sp>
       <p:sp>
         <p:nvSpPr>
-          <p:cNvPr id="5" name="Text 2"/>
+          <p:cNvPr id="17" name="Text 14"/>
           <p:cNvSpPr txBox="1"/>
           <p:nvPr/>
         </p:nvSpPr>
         <p:spPr>
           <a:xfrm>
-            <a:off x="822960" y="1600200"/>
-            <a:ext cx="2926080" cy="365760"/>
+            <a:off x="8412480" y="1783080"/>
+            <a:ext cx="3017520" cy="365760"/>
           </a:xfrm>
           <a:prstGeom prst="rect">
             <a:avLst/>
@@ -8925,7 +10803,7 @@
               <a:buNone/>
             </a:pPr>
             <a:r>
-              <a:rPr lang="en-US" sz="1800" b="1" dirty="0">
+              <a:rPr lang="en-US" sz="1700" b="1" dirty="0">
                 <a:solidFill>
                   <a:srgbClr val="7047D8"/>
                 </a:solidFill>
@@ -8933,22 +10811,22 @@
                 <a:ea typeface="Malgun Gothic" pitchFamily="34" charset="-122"/>
                 <a:cs typeface="Malgun Gothic" pitchFamily="34" charset="-120"/>
               </a:rPr>
-              <a:t>먼저 볼 것</a:t>
-            </a:r>
-            <a:endParaRPr lang="en-US" sz="1800" dirty="0"/>
-          </a:p>
-        </p:txBody>
-      </p:sp>
-      <p:sp>
-        <p:nvSpPr>
-          <p:cNvPr id="6" name="Text 3"/>
+              <a:t>happicare_front2</a:t>
+            </a:r>
+            <a:endParaRPr lang="en-US" sz="1700" dirty="0"/>
+          </a:p>
+        </p:txBody>
+      </p:sp>
+      <p:sp>
+        <p:nvSpPr>
+          <p:cNvPr id="18" name="Text 15"/>
           <p:cNvSpPr txBox="1"/>
           <p:nvPr/>
         </p:nvSpPr>
         <p:spPr>
           <a:xfrm>
-            <a:off x="822960" y="2103120"/>
-            <a:ext cx="2926080" cy="3383280"/>
+            <a:off x="8412480" y="2331720"/>
+            <a:ext cx="3017520" cy="457200"/>
           </a:xfrm>
           <a:prstGeom prst="rect">
             <a:avLst/>
@@ -8960,15 +10838,11 @@
           <a:bodyPr wrap="square" lIns="0" tIns="0" rIns="0" bIns="0" rtlCol="0" anchor="t"/>
           <a:lstStyle/>
           <a:p>
-            <a:pPr marL="342900" indent="-342900">
-              <a:spcAft>
-                <a:spcPts val="600"/>
-              </a:spcAft>
-              <a:buSzPct val="100000"/>
-              <a:buChar char="•"/>
-            </a:pPr>
-            <a:r>
-              <a:rPr lang="en-US" sz="1600" dirty="0">
+            <a:pPr indent="0" marL="0">
+              <a:buNone/>
+            </a:pPr>
+            <a:r>
+              <a:rPr lang="en-US" sz="2200" b="1" dirty="0">
                 <a:solidFill>
                   <a:srgbClr val="1B2A22"/>
                 </a:solidFill>
@@ -8976,20 +10850,77 @@
                 <a:ea typeface="Malgun Gothic" pitchFamily="34" charset="-122"/>
                 <a:cs typeface="Malgun Gothic" pitchFamily="34" charset="-120"/>
               </a:rPr>
-              <a:t>Concept.md: 목적·사용자·화면</a:t>
-            </a:r>
-            <a:endParaRPr lang="en-US" sz="1600" dirty="0"/>
-          </a:p>
-          <a:p>
-            <a:pPr marL="342900" indent="-342900">
-              <a:spcAft>
-                <a:spcPts val="600"/>
-              </a:spcAft>
-              <a:buSzPct val="100000"/>
-              <a:buChar char="•"/>
-            </a:pPr>
-            <a:r>
-              <a:rPr lang="en-US" sz="1600" dirty="0">
+              <a:t>풀스택 시스템</a:t>
+            </a:r>
+            <a:endParaRPr lang="en-US" sz="2200" dirty="0"/>
+          </a:p>
+        </p:txBody>
+      </p:sp>
+      <p:sp>
+        <p:nvSpPr>
+          <p:cNvPr id="19" name="Text 16"/>
+          <p:cNvSpPr txBox="1"/>
+          <p:nvPr/>
+        </p:nvSpPr>
+        <p:spPr>
+          <a:xfrm>
+            <a:off x="8412480" y="3108960"/>
+            <a:ext cx="3017520" cy="365760"/>
+          </a:xfrm>
+          <a:prstGeom prst="rect">
+            <a:avLst/>
+          </a:prstGeom>
+          <a:noFill/>
+          <a:ln/>
+        </p:spPr>
+        <p:txBody>
+          <a:bodyPr wrap="square" lIns="0" tIns="0" rIns="0" bIns="0" rtlCol="0" anchor="t"/>
+          <a:lstStyle/>
+          <a:p>
+            <a:pPr indent="0" marL="0">
+              <a:buNone/>
+            </a:pPr>
+            <a:r>
+              <a:rPr lang="en-US" sz="1400" dirty="0">
+                <a:solidFill>
+                  <a:srgbClr val="666B70"/>
+                </a:solidFill>
+                <a:latin typeface="Malgun Gothic" pitchFamily="34" charset="0"/>
+                <a:ea typeface="Malgun Gothic" pitchFamily="34" charset="-122"/>
+                <a:cs typeface="Malgun Gothic" pitchFamily="34" charset="-120"/>
+              </a:rPr>
+              <a:t>9/30 ~ 10/11 · 커밋 293</a:t>
+            </a:r>
+            <a:endParaRPr lang="en-US" sz="1400" dirty="0"/>
+          </a:p>
+        </p:txBody>
+      </p:sp>
+      <p:sp>
+        <p:nvSpPr>
+          <p:cNvPr id="20" name="Text 17"/>
+          <p:cNvSpPr txBox="1"/>
+          <p:nvPr/>
+        </p:nvSpPr>
+        <p:spPr>
+          <a:xfrm>
+            <a:off x="8412480" y="3611880"/>
+            <a:ext cx="3017520" cy="457200"/>
+          </a:xfrm>
+          <a:prstGeom prst="rect">
+            <a:avLst/>
+          </a:prstGeom>
+          <a:noFill/>
+          <a:ln/>
+        </p:spPr>
+        <p:txBody>
+          <a:bodyPr wrap="square" lIns="0" tIns="0" rIns="0" bIns="0" rtlCol="0" anchor="t"/>
+          <a:lstStyle/>
+          <a:p>
+            <a:pPr indent="0" marL="0">
+              <a:buNone/>
+            </a:pPr>
+            <a:r>
+              <a:rPr lang="en-US" sz="1500" dirty="0">
                 <a:solidFill>
                   <a:srgbClr val="1B2A22"/>
                 </a:solidFill>
@@ -8997,55 +10928,34 @@
                 <a:ea typeface="Malgun Gothic" pitchFamily="34" charset="-122"/>
                 <a:cs typeface="Malgun Gothic" pitchFamily="34" charset="-120"/>
               </a:rPr>
-              <a:t>ToDo.md 단계 0: 확정할 정책</a:t>
-            </a:r>
-            <a:endParaRPr lang="en-US" sz="1600" dirty="0"/>
-          </a:p>
-          <a:p>
-            <a:pPr marL="342900" indent="-342900">
-              <a:spcAft>
-                <a:spcPts val="600"/>
-              </a:spcAft>
-              <a:buSzPct val="100000"/>
-              <a:buChar char="•"/>
-            </a:pPr>
-            <a:r>
-              <a:rPr lang="en-US" sz="1600" dirty="0">
-                <a:solidFill>
-                  <a:srgbClr val="1B2A22"/>
-                </a:solidFill>
-                <a:latin typeface="Malgun Gothic" pitchFamily="34" charset="0"/>
-                <a:ea typeface="Malgun Gothic" pitchFamily="34" charset="-122"/>
-                <a:cs typeface="Malgun Gothic" pitchFamily="34" charset="-120"/>
-              </a:rPr>
-              <a:t>design/ 시안 PNG 약 35장</a:t>
-            </a:r>
-            <a:endParaRPr lang="en-US" sz="1600" dirty="0"/>
-          </a:p>
-        </p:txBody>
-      </p:sp>
-      <p:sp>
-        <p:nvSpPr>
-          <p:cNvPr id="7" name="Shape 4"/>
+              <a:t>NestJS · MariaDB · 배포</a:t>
+            </a:r>
+            <a:endParaRPr lang="en-US" sz="1500" dirty="0"/>
+          </a:p>
+        </p:txBody>
+      </p:sp>
+      <p:sp>
+        <p:nvSpPr>
+          <p:cNvPr id="21" name="Shape 18"/>
           <p:cNvSpPr/>
           <p:nvPr/>
         </p:nvSpPr>
         <p:spPr>
           <a:xfrm>
-            <a:off x="4206240" y="1463040"/>
-            <a:ext cx="3566160" cy="4206240"/>
+            <a:off x="548640" y="4709160"/>
+            <a:ext cx="11064240" cy="1051560"/>
           </a:xfrm>
           <a:prstGeom prst="roundRect">
             <a:avLst>
-              <a:gd name="adj" fmla="val 3077"/>
+              <a:gd name="adj" fmla="val 10435"/>
             </a:avLst>
           </a:prstGeom>
           <a:solidFill>
-            <a:srgbClr val="F0E8FF"/>
+            <a:srgbClr val="F1F3F4"/>
           </a:solidFill>
           <a:ln w="12700">
             <a:solidFill>
-              <a:srgbClr val="F0E8FF"/>
+              <a:srgbClr val="F1F3F4"/>
             </a:solidFill>
             <a:prstDash val="solid"/>
           </a:ln>
@@ -9053,14 +10963,14 @@
       </p:sp>
       <p:sp>
         <p:nvSpPr>
-          <p:cNvPr id="8" name="Text 5"/>
+          <p:cNvPr id="22" name="Text 19"/>
           <p:cNvSpPr txBox="1"/>
           <p:nvPr/>
         </p:nvSpPr>
         <p:spPr>
           <a:xfrm>
-            <a:off x="4480560" y="1600200"/>
-            <a:ext cx="3017520" cy="365760"/>
+            <a:off x="822960" y="4709160"/>
+            <a:ext cx="10515600" cy="548640"/>
           </a:xfrm>
           <a:prstGeom prst="rect">
             <a:avLst/>
@@ -9069,37 +10979,37 @@
           <a:ln/>
         </p:spPr>
         <p:txBody>
-          <a:bodyPr wrap="square" lIns="0" tIns="0" rIns="0" bIns="0" rtlCol="0" anchor="t"/>
+          <a:bodyPr wrap="square" lIns="0" tIns="0" rIns="0" bIns="0" rtlCol="0" anchor="ctr"/>
           <a:lstStyle/>
           <a:p>
             <a:pPr indent="0" marL="0">
               <a:buNone/>
             </a:pPr>
             <a:r>
-              <a:rPr lang="en-US" sz="1800" b="1" dirty="0">
-                <a:solidFill>
-                  <a:srgbClr val="7047D8"/>
-                </a:solidFill>
-                <a:latin typeface="Malgun Gothic" pitchFamily="34" charset="0"/>
-                <a:ea typeface="Malgun Gothic" pitchFamily="34" charset="-122"/>
-                <a:cs typeface="Malgun Gothic" pitchFamily="34" charset="-120"/>
-              </a:rPr>
-              <a:t>배운 점</a:t>
-            </a:r>
-            <a:endParaRPr lang="en-US" sz="1800" dirty="0"/>
-          </a:p>
-        </p:txBody>
-      </p:sp>
-      <p:sp>
-        <p:nvSpPr>
-          <p:cNvPr id="9" name="Text 6"/>
+              <a:rPr lang="en-US" sz="1500" dirty="0">
+                <a:solidFill>
+                  <a:srgbClr val="1B2A22"/>
+                </a:solidFill>
+                <a:latin typeface="Malgun Gothic" pitchFamily="34" charset="0"/>
+                <a:ea typeface="Malgun Gothic" pitchFamily="34" charset="-122"/>
+                <a:cs typeface="Malgun Gothic" pitchFamily="34" charset="-120"/>
+              </a:rPr>
+              <a:t>happicare_admin: README 한 줄뿐인 빈 저장소(커밋 1개, 9/4). 보관할지 삭제할지 정리가 필요합니다.</a:t>
+            </a:r>
+            <a:endParaRPr lang="en-US" sz="1500" dirty="0"/>
+          </a:p>
+        </p:txBody>
+      </p:sp>
+      <p:sp>
+        <p:nvSpPr>
+          <p:cNvPr id="23" name="Text 20"/>
           <p:cNvSpPr txBox="1"/>
           <p:nvPr/>
         </p:nvSpPr>
         <p:spPr>
           <a:xfrm>
-            <a:off x="4480560" y="2103120"/>
-            <a:ext cx="3017520" cy="3383280"/>
+            <a:off x="822960" y="5166360"/>
+            <a:ext cx="10515600" cy="457200"/>
           </a:xfrm>
           <a:prstGeom prst="rect">
             <a:avLst/>
@@ -9108,263 +11018,24 @@
           <a:ln/>
         </p:spPr>
         <p:txBody>
-          <a:bodyPr wrap="square" lIns="0" tIns="0" rIns="0" bIns="0" rtlCol="0" anchor="t"/>
-          <a:lstStyle/>
-          <a:p>
-            <a:pPr marL="342900" indent="-342900">
-              <a:spcAft>
-                <a:spcPts val="600"/>
-              </a:spcAft>
-              <a:buSzPct val="100000"/>
-              <a:buChar char="•"/>
-            </a:pPr>
-            <a:r>
-              <a:rPr lang="en-US" sz="1600" dirty="0">
-                <a:solidFill>
-                  <a:srgbClr val="1B2A22"/>
-                </a:solidFill>
-                <a:latin typeface="Malgun Gothic" pitchFamily="34" charset="0"/>
-                <a:ea typeface="Malgun Gothic" pitchFamily="34" charset="-122"/>
-                <a:cs typeface="Malgun Gothic" pitchFamily="34" charset="-120"/>
-              </a:rPr>
-              <a:t>문서를 먼저 쓰면 AI 결과의 방향이 흔들리지 않습니다</a:t>
-            </a:r>
-            <a:endParaRPr lang="en-US" sz="1600" dirty="0"/>
-          </a:p>
-          <a:p>
-            <a:pPr marL="342900" indent="-342900">
-              <a:spcAft>
-                <a:spcPts val="600"/>
-              </a:spcAft>
-              <a:buSzPct val="100000"/>
-              <a:buChar char="•"/>
-            </a:pPr>
-            <a:r>
-              <a:rPr lang="en-US" sz="1600" dirty="0">
-                <a:solidFill>
-                  <a:srgbClr val="1B2A22"/>
-                </a:solidFill>
-                <a:latin typeface="Malgun Gothic" pitchFamily="34" charset="0"/>
-                <a:ea typeface="Malgun Gothic" pitchFamily="34" charset="-122"/>
-                <a:cs typeface="Malgun Gothic" pitchFamily="34" charset="-120"/>
-              </a:rPr>
-              <a:t>원본 HTML 기준(happicare)으로는 담당자 배정·답변 관리 같은 새 요구를 다룰 수 없습니다</a:t>
-            </a:r>
-            <a:endParaRPr lang="en-US" sz="1600" dirty="0"/>
-          </a:p>
-        </p:txBody>
-      </p:sp>
-      <p:sp>
-        <p:nvSpPr>
-          <p:cNvPr id="10" name="Shape 7"/>
-          <p:cNvSpPr/>
-          <p:nvPr/>
-        </p:nvSpPr>
-        <p:spPr>
-          <a:xfrm>
-            <a:off x="7955280" y="1463040"/>
-            <a:ext cx="3657600" cy="4206240"/>
-          </a:xfrm>
-          <a:prstGeom prst="roundRect">
-            <a:avLst>
-              <a:gd name="adj" fmla="val 3000"/>
-            </a:avLst>
-          </a:prstGeom>
-          <a:solidFill>
-            <a:srgbClr val="F0E8FF"/>
-          </a:solidFill>
-          <a:ln w="12700">
-            <a:solidFill>
-              <a:srgbClr val="F0E8FF"/>
-            </a:solidFill>
-            <a:prstDash val="solid"/>
-          </a:ln>
-        </p:spPr>
-      </p:sp>
-      <p:sp>
-        <p:nvSpPr>
-          <p:cNvPr id="11" name="Text 8"/>
-          <p:cNvSpPr txBox="1"/>
-          <p:nvPr/>
-        </p:nvSpPr>
-        <p:spPr>
-          <a:xfrm>
-            <a:off x="8229600" y="1600200"/>
-            <a:ext cx="3108960" cy="365760"/>
-          </a:xfrm>
-          <a:prstGeom prst="rect">
-            <a:avLst/>
-          </a:prstGeom>
-          <a:noFill/>
-          <a:ln/>
-        </p:spPr>
-        <p:txBody>
-          <a:bodyPr wrap="square" lIns="0" tIns="0" rIns="0" bIns="0" rtlCol="0" anchor="t"/>
+          <a:bodyPr wrap="square" lIns="0" tIns="0" rIns="0" bIns="0" rtlCol="0" anchor="ctr"/>
           <a:lstStyle/>
           <a:p>
             <a:pPr indent="0" marL="0">
               <a:buNone/>
             </a:pPr>
             <a:r>
-              <a:rPr lang="en-US" sz="1800" b="1" dirty="0">
-                <a:solidFill>
-                  <a:srgbClr val="7047D8"/>
-                </a:solidFill>
-                <a:latin typeface="Malgun Gothic" pitchFamily="34" charset="0"/>
-                <a:ea typeface="Malgun Gothic" pitchFamily="34" charset="-122"/>
-                <a:cs typeface="Malgun Gothic" pitchFamily="34" charset="-120"/>
-              </a:rPr>
-              <a:t>결정이 필요한 항목</a:t>
-            </a:r>
-            <a:endParaRPr lang="en-US" sz="1800" dirty="0"/>
-          </a:p>
-        </p:txBody>
-      </p:sp>
-      <p:sp>
-        <p:nvSpPr>
-          <p:cNvPr id="12" name="Text 9"/>
-          <p:cNvSpPr txBox="1"/>
-          <p:nvPr/>
-        </p:nvSpPr>
-        <p:spPr>
-          <a:xfrm>
-            <a:off x="8229600" y="2103120"/>
-            <a:ext cx="3108960" cy="3383280"/>
-          </a:xfrm>
-          <a:prstGeom prst="rect">
-            <a:avLst/>
-          </a:prstGeom>
-          <a:noFill/>
-          <a:ln/>
-        </p:spPr>
-        <p:txBody>
-          <a:bodyPr wrap="square" lIns="0" tIns="0" rIns="0" bIns="0" rtlCol="0" anchor="t"/>
-          <a:lstStyle/>
-          <a:p>
-            <a:pPr marL="342900" indent="-342900">
-              <a:spcAft>
-                <a:spcPts val="600"/>
-              </a:spcAft>
-              <a:buSzPct val="100000"/>
-              <a:buChar char="•"/>
-            </a:pPr>
-            <a:r>
-              <a:rPr lang="en-US" sz="1600" dirty="0">
-                <a:solidFill>
-                  <a:srgbClr val="1B2A22"/>
-                </a:solidFill>
-                <a:latin typeface="Malgun Gothic" pitchFamily="34" charset="0"/>
-                <a:ea typeface="Malgun Gothic" pitchFamily="34" charset="-122"/>
-                <a:cs typeface="Malgun Gothic" pitchFamily="34" charset="-120"/>
-              </a:rPr>
-              <a:t>CRM 자동 로그인 방식</a:t>
-            </a:r>
-            <a:endParaRPr lang="en-US" sz="1600" dirty="0"/>
-          </a:p>
-          <a:p>
-            <a:pPr marL="342900" indent="-342900">
-              <a:spcAft>
-                <a:spcPts val="600"/>
-              </a:spcAft>
-              <a:buSzPct val="100000"/>
-              <a:buChar char="•"/>
-            </a:pPr>
-            <a:r>
-              <a:rPr lang="en-US" sz="1600" dirty="0">
-                <a:solidFill>
-                  <a:srgbClr val="1B2A22"/>
-                </a:solidFill>
-                <a:latin typeface="Malgun Gothic" pitchFamily="34" charset="0"/>
-                <a:ea typeface="Malgun Gothic" pitchFamily="34" charset="-122"/>
-                <a:cs typeface="Malgun Gothic" pitchFamily="34" charset="-120"/>
-              </a:rPr>
-              <a:t>관리자 인증·권한</a:t>
-            </a:r>
-            <a:endParaRPr lang="en-US" sz="1600" dirty="0"/>
-          </a:p>
-          <a:p>
-            <a:pPr marL="342900" indent="-342900">
-              <a:spcAft>
-                <a:spcPts val="600"/>
-              </a:spcAft>
-              <a:buSzPct val="100000"/>
-              <a:buChar char="•"/>
-            </a:pPr>
-            <a:r>
-              <a:rPr lang="en-US" sz="1600" dirty="0">
-                <a:solidFill>
-                  <a:srgbClr val="1B2A22"/>
-                </a:solidFill>
-                <a:latin typeface="Malgun Gothic" pitchFamily="34" charset="0"/>
-                <a:ea typeface="Malgun Gothic" pitchFamily="34" charset="-122"/>
-                <a:cs typeface="Malgun Gothic" pitchFamily="34" charset="-120"/>
-              </a:rPr>
-              <a:t>문의 유형별 필수 항목</a:t>
-            </a:r>
-            <a:endParaRPr lang="en-US" sz="1600" dirty="0"/>
-          </a:p>
-          <a:p>
-            <a:pPr marL="342900" indent="-342900">
-              <a:spcAft>
-                <a:spcPts val="600"/>
-              </a:spcAft>
-              <a:buSzPct val="100000"/>
-              <a:buChar char="•"/>
-            </a:pPr>
-            <a:r>
-              <a:rPr lang="en-US" sz="1600" dirty="0">
-                <a:solidFill>
-                  <a:srgbClr val="1B2A22"/>
-                </a:solidFill>
-                <a:latin typeface="Malgun Gothic" pitchFamily="34" charset="0"/>
-                <a:ea typeface="Malgun Gothic" pitchFamily="34" charset="-122"/>
-                <a:cs typeface="Malgun Gothic" pitchFamily="34" charset="-120"/>
-              </a:rPr>
-              <a:t>첨부·개인정보 정책</a:t>
-            </a:r>
-            <a:endParaRPr lang="en-US" sz="1600" dirty="0"/>
-          </a:p>
-          <a:p>
-            <a:pPr marL="342900" indent="-342900">
-              <a:spcAft>
-                <a:spcPts val="600"/>
-              </a:spcAft>
-              <a:buSzPct val="100000"/>
-              <a:buChar char="•"/>
-            </a:pPr>
-            <a:r>
-              <a:rPr lang="en-US" sz="1600" dirty="0">
-                <a:solidFill>
-                  <a:srgbClr val="1B2A22"/>
-                </a:solidFill>
-                <a:latin typeface="Malgun Gothic" pitchFamily="34" charset="0"/>
-                <a:ea typeface="Malgun Gothic" pitchFamily="34" charset="-122"/>
-                <a:cs typeface="Malgun Gothic" pitchFamily="34" charset="-120"/>
-              </a:rPr>
-              <a:t>이메일·문자 발송</a:t>
-            </a:r>
-            <a:endParaRPr lang="en-US" sz="1600" dirty="0"/>
-          </a:p>
-          <a:p>
-            <a:pPr marL="342900" indent="-342900">
-              <a:spcAft>
-                <a:spcPts val="600"/>
-              </a:spcAft>
-              <a:buSzPct val="100000"/>
-              <a:buChar char="•"/>
-            </a:pPr>
-            <a:r>
-              <a:rPr lang="en-US" sz="1600" dirty="0">
-                <a:solidFill>
-                  <a:srgbClr val="1B2A22"/>
-                </a:solidFill>
-                <a:latin typeface="Malgun Gothic" pitchFamily="34" charset="0"/>
-                <a:ea typeface="Malgun Gothic" pitchFamily="34" charset="-122"/>
-                <a:cs typeface="Malgun Gothic" pitchFamily="34" charset="-120"/>
-              </a:rPr>
-              <a:t>메디세이 계정 동기화</a:t>
-            </a:r>
-            <a:endParaRPr lang="en-US" sz="1600" dirty="0"/>
+              <a:rPr lang="en-US" sz="1400" dirty="0">
+                <a:solidFill>
+                  <a:srgbClr val="B77600"/>
+                </a:solidFill>
+                <a:latin typeface="Malgun Gothic" pitchFamily="34" charset="0"/>
+                <a:ea typeface="Malgun Gothic" pitchFamily="34" charset="-122"/>
+                <a:cs typeface="Malgun Gothic" pitchFamily="34" charset="-120"/>
+              </a:rPr>
+              <a:t>admin_version2와 front2는 같은 관리자 화면 명세를 다룹니다. 코드를 가져온 흔적은 확인하지 못했습니다.</a:t>
+            </a:r>
+            <a:endParaRPr lang="en-US" sz="1400" dirty="0"/>
           </a:p>
         </p:txBody>
       </p:sp>
@@ -9474,7 +11145,7 @@
                 <a:ea typeface="Malgun Gothic" pitchFamily="34" charset="-122"/>
                 <a:cs typeface="Malgun Gothic" pitchFamily="34" charset="-120"/>
               </a:rPr>
-              <a:t>웹퍼블리셔: 토큰과 접근성이 자산입니다</a:t>
+              <a:t>MSW: 서버 없이 실제 HTTP처럼 개발하기</a:t>
             </a:r>
             <a:endParaRPr lang="en-US" sz="3200" dirty="0"/>
           </a:p>
@@ -9488,12 +11159,12 @@
         </p:nvSpPr>
         <p:spPr>
           <a:xfrm>
-            <a:off x="548640" y="1463040"/>
-            <a:ext cx="3474720" cy="4206240"/>
+            <a:off x="548640" y="1508760"/>
+            <a:ext cx="3108960" cy="777240"/>
           </a:xfrm>
           <a:prstGeom prst="roundRect">
             <a:avLst>
-              <a:gd name="adj" fmla="val 3158"/>
+              <a:gd name="adj" fmla="val 14118"/>
             </a:avLst>
           </a:prstGeom>
           <a:solidFill>
@@ -9515,8 +11186,8 @@
         </p:nvSpPr>
         <p:spPr>
           <a:xfrm>
-            <a:off x="822960" y="1600200"/>
-            <a:ext cx="2926080" cy="365760"/>
+            <a:off x="548640" y="1508760"/>
+            <a:ext cx="3108960" cy="777240"/>
           </a:xfrm>
           <a:prstGeom prst="rect">
             <a:avLst/>
@@ -9525,24 +11196,24 @@
           <a:ln/>
         </p:spPr>
         <p:txBody>
-          <a:bodyPr wrap="square" lIns="0" tIns="0" rIns="0" bIns="0" rtlCol="0" anchor="t"/>
-          <a:lstStyle/>
-          <a:p>
-            <a:pPr indent="0" marL="0">
+          <a:bodyPr wrap="square" lIns="0" tIns="0" rIns="0" bIns="0" rtlCol="0" anchor="ctr"/>
+          <a:lstStyle/>
+          <a:p>
+            <a:pPr algn="ctr" indent="0" marL="0">
               <a:buNone/>
             </a:pPr>
             <a:r>
-              <a:rPr lang="en-US" sz="1800" b="1" dirty="0">
-                <a:solidFill>
-                  <a:srgbClr val="00B80C"/>
-                </a:solidFill>
-                <a:latin typeface="Malgun Gothic" pitchFamily="34" charset="0"/>
-                <a:ea typeface="Malgun Gothic" pitchFamily="34" charset="-122"/>
-                <a:cs typeface="Malgun Gothic" pitchFamily="34" charset="-120"/>
-              </a:rPr>
-              <a:t>먼저 볼 것</a:t>
-            </a:r>
-            <a:endParaRPr lang="en-US" sz="1800" dirty="0"/>
+              <a:rPr lang="en-US" sz="1700" b="1" dirty="0">
+                <a:solidFill>
+                  <a:srgbClr val="1B2A22"/>
+                </a:solidFill>
+                <a:latin typeface="Malgun Gothic" pitchFamily="34" charset="0"/>
+                <a:ea typeface="Malgun Gothic" pitchFamily="34" charset="-122"/>
+                <a:cs typeface="Malgun Gothic" pitchFamily="34" charset="-120"/>
+              </a:rPr>
+              <a:t>화면</a:t>
+            </a:r>
+            <a:endParaRPr lang="en-US" sz="1700" dirty="0"/>
           </a:p>
         </p:txBody>
       </p:sp>
@@ -9554,8 +11225,8 @@
         </p:nvSpPr>
         <p:spPr>
           <a:xfrm>
-            <a:off x="822960" y="2103120"/>
-            <a:ext cx="2926080" cy="3383280"/>
+            <a:off x="548640" y="2258568"/>
+            <a:ext cx="3108960" cy="301752"/>
           </a:xfrm>
           <a:prstGeom prst="rect">
             <a:avLst/>
@@ -9564,68 +11235,22 @@
           <a:ln/>
         </p:spPr>
         <p:txBody>
-          <a:bodyPr wrap="square" lIns="0" tIns="0" rIns="0" bIns="0" rtlCol="0" anchor="t"/>
-          <a:lstStyle/>
-          <a:p>
-            <a:pPr marL="342900" indent="-342900">
-              <a:spcAft>
-                <a:spcPts val="600"/>
-              </a:spcAft>
-              <a:buSzPct val="100000"/>
-              <a:buChar char="•"/>
+          <a:bodyPr wrap="square" lIns="0" tIns="0" rIns="0" bIns="0" rtlCol="0" anchor="ctr"/>
+          <a:lstStyle/>
+          <a:p>
+            <a:pPr algn="ctr" indent="0" marL="0">
+              <a:buNone/>
             </a:pPr>
             <a:r>
               <a:rPr lang="en-US" sz="1600" dirty="0">
                 <a:solidFill>
-                  <a:srgbClr val="1B2A22"/>
-                </a:solidFill>
-                <a:latin typeface="Malgun Gothic" pitchFamily="34" charset="0"/>
-                <a:ea typeface="Malgun Gothic" pitchFamily="34" charset="-122"/>
-                <a:cs typeface="Malgun Gothic" pitchFamily="34" charset="-120"/>
-              </a:rPr>
-              <a:t>styles/tokens.css: 색·글꼴·간격 변수</a:t>
-            </a:r>
-            <a:endParaRPr lang="en-US" sz="1600" dirty="0"/>
-          </a:p>
-          <a:p>
-            <a:pPr marL="342900" indent="-342900">
-              <a:spcAft>
-                <a:spcPts val="600"/>
-              </a:spcAft>
-              <a:buSzPct val="100000"/>
-              <a:buChar char="•"/>
-            </a:pPr>
-            <a:r>
-              <a:rPr lang="en-US" sz="1600" dirty="0">
-                <a:solidFill>
-                  <a:srgbClr val="1B2A22"/>
-                </a:solidFill>
-                <a:latin typeface="Malgun Gothic" pitchFamily="34" charset="0"/>
-                <a:ea typeface="Malgun Gothic" pitchFamily="34" charset="-122"/>
-                <a:cs typeface="Malgun Gothic" pitchFamily="34" charset="-120"/>
-              </a:rPr>
-              <a:t>docs/quality/12c-screen-audit.md</a:t>
-            </a:r>
-            <a:endParaRPr lang="en-US" sz="1600" dirty="0"/>
-          </a:p>
-          <a:p>
-            <a:pPr marL="342900" indent="-342900">
-              <a:spcAft>
-                <a:spcPts val="600"/>
-              </a:spcAft>
-              <a:buSzPct val="100000"/>
-              <a:buChar char="•"/>
-            </a:pPr>
-            <a:r>
-              <a:rPr lang="en-US" sz="1600" dirty="0">
-                <a:solidFill>
-                  <a:srgbClr val="1B2A22"/>
-                </a:solidFill>
-                <a:latin typeface="Malgun Gothic" pitchFamily="34" charset="0"/>
-                <a:ea typeface="Malgun Gothic" pitchFamily="34" charset="-122"/>
-                <a:cs typeface="Malgun Gothic" pitchFamily="34" charset="-120"/>
-              </a:rPr>
-              <a:t>happicare/public/legacy: 원본 퍼블리싱</a:t>
+                  <a:srgbClr val="666B70"/>
+                </a:solidFill>
+                <a:latin typeface="Malgun Gothic" pitchFamily="34" charset="0"/>
+                <a:ea typeface="Malgun Gothic" pitchFamily="34" charset="-122"/>
+                <a:cs typeface="Malgun Gothic" pitchFamily="34" charset="-120"/>
+              </a:rPr>
+              <a:t>↓</a:t>
             </a:r>
             <a:endParaRPr lang="en-US" sz="1600" dirty="0"/>
           </a:p>
@@ -9639,12 +11264,12 @@
         </p:nvSpPr>
         <p:spPr>
           <a:xfrm>
-            <a:off x="4206240" y="1463040"/>
-            <a:ext cx="3566160" cy="4206240"/>
+            <a:off x="548640" y="2560320"/>
+            <a:ext cx="3108960" cy="777240"/>
           </a:xfrm>
           <a:prstGeom prst="roundRect">
             <a:avLst>
-              <a:gd name="adj" fmla="val 3077"/>
+              <a:gd name="adj" fmla="val 14118"/>
             </a:avLst>
           </a:prstGeom>
           <a:solidFill>
@@ -9666,8 +11291,8 @@
         </p:nvSpPr>
         <p:spPr>
           <a:xfrm>
-            <a:off x="4480560" y="1600200"/>
-            <a:ext cx="3017520" cy="365760"/>
+            <a:off x="548640" y="2560320"/>
+            <a:ext cx="3108960" cy="777240"/>
           </a:xfrm>
           <a:prstGeom prst="rect">
             <a:avLst/>
@@ -9676,24 +11301,24 @@
           <a:ln/>
         </p:spPr>
         <p:txBody>
-          <a:bodyPr wrap="square" lIns="0" tIns="0" rIns="0" bIns="0" rtlCol="0" anchor="t"/>
-          <a:lstStyle/>
-          <a:p>
-            <a:pPr indent="0" marL="0">
+          <a:bodyPr wrap="square" lIns="0" tIns="0" rIns="0" bIns="0" rtlCol="0" anchor="ctr"/>
+          <a:lstStyle/>
+          <a:p>
+            <a:pPr algn="ctr" indent="0" marL="0">
               <a:buNone/>
             </a:pPr>
             <a:r>
-              <a:rPr lang="en-US" sz="1800" b="1" dirty="0">
-                <a:solidFill>
-                  <a:srgbClr val="00B80C"/>
-                </a:solidFill>
-                <a:latin typeface="Malgun Gothic" pitchFamily="34" charset="0"/>
-                <a:ea typeface="Malgun Gothic" pitchFamily="34" charset="-122"/>
-                <a:cs typeface="Malgun Gothic" pitchFamily="34" charset="-120"/>
-              </a:rPr>
-              <a:t>배운 점</a:t>
-            </a:r>
-            <a:endParaRPr lang="en-US" sz="1800" dirty="0"/>
+              <a:rPr lang="en-US" sz="1700" b="1" dirty="0">
+                <a:solidFill>
+                  <a:srgbClr val="1B2A22"/>
+                </a:solidFill>
+                <a:latin typeface="Malgun Gothic" pitchFamily="34" charset="0"/>
+                <a:ea typeface="Malgun Gothic" pitchFamily="34" charset="-122"/>
+                <a:cs typeface="Malgun Gothic" pitchFamily="34" charset="-120"/>
+              </a:rPr>
+              <a:t>/api/* 요청</a:t>
+            </a:r>
+            <a:endParaRPr lang="en-US" sz="1700" dirty="0"/>
           </a:p>
         </p:txBody>
       </p:sp>
@@ -9705,8 +11330,8 @@
         </p:nvSpPr>
         <p:spPr>
           <a:xfrm>
-            <a:off x="4480560" y="2103120"/>
-            <a:ext cx="3017520" cy="3383280"/>
+            <a:off x="548640" y="3310128"/>
+            <a:ext cx="3108960" cy="301752"/>
           </a:xfrm>
           <a:prstGeom prst="rect">
             <a:avLst/>
@@ -9715,68 +11340,22 @@
           <a:ln/>
         </p:spPr>
         <p:txBody>
-          <a:bodyPr wrap="square" lIns="0" tIns="0" rIns="0" bIns="0" rtlCol="0" anchor="t"/>
-          <a:lstStyle/>
-          <a:p>
-            <a:pPr marL="342900" indent="-342900">
-              <a:spcAft>
-                <a:spcPts val="600"/>
-              </a:spcAft>
-              <a:buSzPct val="100000"/>
-              <a:buChar char="•"/>
+          <a:bodyPr wrap="square" lIns="0" tIns="0" rIns="0" bIns="0" rtlCol="0" anchor="ctr"/>
+          <a:lstStyle/>
+          <a:p>
+            <a:pPr algn="ctr" indent="0" marL="0">
+              <a:buNone/>
             </a:pPr>
             <a:r>
               <a:rPr lang="en-US" sz="1600" dirty="0">
                 <a:solidFill>
-                  <a:srgbClr val="1B2A22"/>
-                </a:solidFill>
-                <a:latin typeface="Malgun Gothic" pitchFamily="34" charset="0"/>
-                <a:ea typeface="Malgun Gothic" pitchFamily="34" charset="-122"/>
-                <a:cs typeface="Malgun Gothic" pitchFamily="34" charset="-120"/>
-              </a:rPr>
-              <a:t>happicare: app.css 한 파일(약 970줄), 원본 모양 유지에 유리</a:t>
-            </a:r>
-            <a:endParaRPr lang="en-US" sz="1600" dirty="0"/>
-          </a:p>
-          <a:p>
-            <a:pPr marL="342900" indent="-342900">
-              <a:spcAft>
-                <a:spcPts val="600"/>
-              </a:spcAft>
-              <a:buSzPct val="100000"/>
-              <a:buChar char="•"/>
-            </a:pPr>
-            <a:r>
-              <a:rPr lang="en-US" sz="1600" dirty="0">
-                <a:solidFill>
-                  <a:srgbClr val="1B2A22"/>
-                </a:solidFill>
-                <a:latin typeface="Malgun Gothic" pitchFamily="34" charset="0"/>
-                <a:ea typeface="Malgun Gothic" pitchFamily="34" charset="-122"/>
-                <a:cs typeface="Malgun Gothic" pitchFamily="34" charset="-120"/>
-              </a:rPr>
-              <a:t>front2: 디자인 토큰 + CSS Modules, 브랜드 초록 #00B80C와 상태 색을 변수로 관리</a:t>
-            </a:r>
-            <a:endParaRPr lang="en-US" sz="1600" dirty="0"/>
-          </a:p>
-          <a:p>
-            <a:pPr marL="342900" indent="-342900">
-              <a:spcAft>
-                <a:spcPts val="600"/>
-              </a:spcAft>
-              <a:buSzPct val="100000"/>
-              <a:buChar char="•"/>
-            </a:pPr>
-            <a:r>
-              <a:rPr lang="en-US" sz="1600" dirty="0">
-                <a:solidFill>
-                  <a:srgbClr val="1B2A22"/>
-                </a:solidFill>
-                <a:latin typeface="Malgun Gothic" pitchFamily="34" charset="0"/>
-                <a:ea typeface="Malgun Gothic" pitchFamily="34" charset="-122"/>
-                <a:cs typeface="Malgun Gothic" pitchFamily="34" charset="-120"/>
-              </a:rPr>
-              <a:t>axe 접근성·키보드·반응형 검사가 테스트에 포함</a:t>
+                  <a:srgbClr val="666B70"/>
+                </a:solidFill>
+                <a:latin typeface="Malgun Gothic" pitchFamily="34" charset="0"/>
+                <a:ea typeface="Malgun Gothic" pitchFamily="34" charset="-122"/>
+                <a:cs typeface="Malgun Gothic" pitchFamily="34" charset="-120"/>
+              </a:rPr>
+              <a:t>↓</a:t>
             </a:r>
             <a:endParaRPr lang="en-US" sz="1600" dirty="0"/>
           </a:p>
@@ -9790,12 +11369,117 @@
         </p:nvSpPr>
         <p:spPr>
           <a:xfrm>
-            <a:off x="7955280" y="1463040"/>
-            <a:ext cx="3657600" cy="4206240"/>
+            <a:off x="548640" y="3611880"/>
+            <a:ext cx="3108960" cy="777240"/>
           </a:xfrm>
           <a:prstGeom prst="roundRect">
             <a:avLst>
-              <a:gd name="adj" fmla="val 3000"/>
+              <a:gd name="adj" fmla="val 14118"/>
+            </a:avLst>
+          </a:prstGeom>
+          <a:solidFill>
+            <a:srgbClr val="FFF1D7"/>
+          </a:solidFill>
+          <a:ln w="12700">
+            <a:solidFill>
+              <a:srgbClr val="FFF1D7"/>
+            </a:solidFill>
+            <a:prstDash val="solid"/>
+          </a:ln>
+        </p:spPr>
+      </p:sp>
+      <p:sp>
+        <p:nvSpPr>
+          <p:cNvPr id="11" name="Text 8"/>
+          <p:cNvSpPr txBox="1"/>
+          <p:nvPr/>
+        </p:nvSpPr>
+        <p:spPr>
+          <a:xfrm>
+            <a:off x="548640" y="3611880"/>
+            <a:ext cx="3108960" cy="777240"/>
+          </a:xfrm>
+          <a:prstGeom prst="rect">
+            <a:avLst/>
+          </a:prstGeom>
+          <a:noFill/>
+          <a:ln/>
+        </p:spPr>
+        <p:txBody>
+          <a:bodyPr wrap="square" lIns="0" tIns="0" rIns="0" bIns="0" rtlCol="0" anchor="ctr"/>
+          <a:lstStyle/>
+          <a:p>
+            <a:pPr algn="ctr" indent="0" marL="0">
+              <a:buNone/>
+            </a:pPr>
+            <a:r>
+              <a:rPr lang="en-US" sz="1700" b="1" dirty="0">
+                <a:solidFill>
+                  <a:srgbClr val="1B2A22"/>
+                </a:solidFill>
+                <a:latin typeface="Malgun Gothic" pitchFamily="34" charset="0"/>
+                <a:ea typeface="Malgun Gothic" pitchFamily="34" charset="-122"/>
+                <a:cs typeface="Malgun Gothic" pitchFamily="34" charset="-120"/>
+              </a:rPr>
+              <a:t>MSW</a:t>
+            </a:r>
+            <a:endParaRPr lang="en-US" sz="1700" dirty="0"/>
+          </a:p>
+        </p:txBody>
+      </p:sp>
+      <p:sp>
+        <p:nvSpPr>
+          <p:cNvPr id="12" name="Text 9"/>
+          <p:cNvSpPr txBox="1"/>
+          <p:nvPr/>
+        </p:nvSpPr>
+        <p:spPr>
+          <a:xfrm>
+            <a:off x="548640" y="4361688"/>
+            <a:ext cx="3108960" cy="301752"/>
+          </a:xfrm>
+          <a:prstGeom prst="rect">
+            <a:avLst/>
+          </a:prstGeom>
+          <a:noFill/>
+          <a:ln/>
+        </p:spPr>
+        <p:txBody>
+          <a:bodyPr wrap="square" lIns="0" tIns="0" rIns="0" bIns="0" rtlCol="0" anchor="ctr"/>
+          <a:lstStyle/>
+          <a:p>
+            <a:pPr algn="ctr" indent="0" marL="0">
+              <a:buNone/>
+            </a:pPr>
+            <a:r>
+              <a:rPr lang="en-US" sz="1600" dirty="0">
+                <a:solidFill>
+                  <a:srgbClr val="666B70"/>
+                </a:solidFill>
+                <a:latin typeface="Malgun Gothic" pitchFamily="34" charset="0"/>
+                <a:ea typeface="Malgun Gothic" pitchFamily="34" charset="-122"/>
+                <a:cs typeface="Malgun Gothic" pitchFamily="34" charset="-120"/>
+              </a:rPr>
+              <a:t>↓</a:t>
+            </a:r>
+            <a:endParaRPr lang="en-US" sz="1600" dirty="0"/>
+          </a:p>
+        </p:txBody>
+      </p:sp>
+      <p:sp>
+        <p:nvSpPr>
+          <p:cNvPr id="13" name="Shape 10"/>
+          <p:cNvSpPr/>
+          <p:nvPr/>
+        </p:nvSpPr>
+        <p:spPr>
+          <a:xfrm>
+            <a:off x="548640" y="4663440"/>
+            <a:ext cx="3108960" cy="777240"/>
+          </a:xfrm>
+          <a:prstGeom prst="roundRect">
+            <a:avLst>
+              <a:gd name="adj" fmla="val 14118"/>
             </a:avLst>
           </a:prstGeom>
           <a:solidFill>
@@ -9811,14 +11495,53 @@
       </p:sp>
       <p:sp>
         <p:nvSpPr>
-          <p:cNvPr id="11" name="Text 8"/>
+          <p:cNvPr id="14" name="Text 11"/>
           <p:cNvSpPr txBox="1"/>
           <p:nvPr/>
         </p:nvSpPr>
         <p:spPr>
           <a:xfrm>
-            <a:off x="8229600" y="1600200"/>
-            <a:ext cx="3108960" cy="365760"/>
+            <a:off x="548640" y="4663440"/>
+            <a:ext cx="3108960" cy="777240"/>
+          </a:xfrm>
+          <a:prstGeom prst="rect">
+            <a:avLst/>
+          </a:prstGeom>
+          <a:noFill/>
+          <a:ln/>
+        </p:spPr>
+        <p:txBody>
+          <a:bodyPr wrap="square" lIns="0" tIns="0" rIns="0" bIns="0" rtlCol="0" anchor="ctr"/>
+          <a:lstStyle/>
+          <a:p>
+            <a:pPr algn="ctr" indent="0" marL="0">
+              <a:buNone/>
+            </a:pPr>
+            <a:r>
+              <a:rPr lang="en-US" sz="1700" b="1" dirty="0">
+                <a:solidFill>
+                  <a:srgbClr val="1B2A22"/>
+                </a:solidFill>
+                <a:latin typeface="Malgun Gothic" pitchFamily="34" charset="0"/>
+                <a:ea typeface="Malgun Gothic" pitchFamily="34" charset="-122"/>
+                <a:cs typeface="Malgun Gothic" pitchFamily="34" charset="-120"/>
+              </a:rPr>
+              <a:t>localStorage</a:t>
+            </a:r>
+            <a:endParaRPr lang="en-US" sz="1700" dirty="0"/>
+          </a:p>
+        </p:txBody>
+      </p:sp>
+      <p:sp>
+        <p:nvSpPr>
+          <p:cNvPr id="15" name="Text 12"/>
+          <p:cNvSpPr txBox="1"/>
+          <p:nvPr/>
+        </p:nvSpPr>
+        <p:spPr>
+          <a:xfrm>
+            <a:off x="548640" y="5760720"/>
+            <a:ext cx="3291840" cy="365760"/>
           </a:xfrm>
           <a:prstGeom prst="rect">
             <a:avLst/>
@@ -9834,30 +11557,726 @@
               <a:buNone/>
             </a:pPr>
             <a:r>
-              <a:rPr lang="en-US" sz="1800" b="1" dirty="0">
-                <a:solidFill>
-                  <a:srgbClr val="00B80C"/>
-                </a:solidFill>
-                <a:latin typeface="Malgun Gothic" pitchFamily="34" charset="0"/>
-                <a:ea typeface="Malgun Gothic" pitchFamily="34" charset="-122"/>
-                <a:cs typeface="Malgun Gothic" pitchFamily="34" charset="-120"/>
-              </a:rPr>
-              <a:t>결정이 필요한 항목</a:t>
-            </a:r>
-            <a:endParaRPr lang="en-US" sz="1800" dirty="0"/>
-          </a:p>
-        </p:txBody>
-      </p:sp>
-      <p:sp>
-        <p:nvSpPr>
-          <p:cNvPr id="12" name="Text 9"/>
+              <a:rPr lang="en-US" sz="1300" dirty="0">
+                <a:solidFill>
+                  <a:srgbClr val="666B70"/>
+                </a:solidFill>
+                <a:latin typeface="Malgun Gothic" pitchFamily="34" charset="0"/>
+                <a:ea typeface="Malgun Gothic" pitchFamily="34" charset="-122"/>
+                <a:cs typeface="Malgun Gothic" pitchFamily="34" charset="-120"/>
+              </a:rPr>
+              <a:t>실서버 전환 시 MSW 단계만 빠집니다</a:t>
+            </a:r>
+            <a:endParaRPr lang="en-US" sz="1300" dirty="0"/>
+          </a:p>
+        </p:txBody>
+      </p:sp>
+      <p:graphicFrame>
+        <p:nvGraphicFramePr>
+          <p:cNvPr id="9" name="Table 0"/>
+          <p:cNvGraphicFramePr>
+            <a:graphicFrameLocks noGrp="1"/>
+          </p:cNvGraphicFramePr>
+          <p:nvPr>
+            <p:extLst>
+              <p:ext uri="{D42A27DB-BD31-4B8C-83A1-F6EECF244321}">
+                <p14:modId xmlns:p14="http://schemas.microsoft.com/office/powerpoint/2010/main" val="1579011935"/>
+              </p:ext>
+            </p:extLst>
+          </p:nvPr>
+        </p:nvGraphicFramePr>
+        <p:xfrm>
+          <a:off x="4206240" y="1508760"/>
+          <a:ext cx="7406640" cy="914400"/>
+        </p:xfrm>
+        <a:graphic>
+          <a:graphicData uri="http://schemas.openxmlformats.org/drawingml/2006/table">
+            <a:tbl>
+              <a:tblPr/>
+              <a:tblGrid>
+                <a:gridCol w="3017520"/>
+                <a:gridCol w="4389120"/>
+              </a:tblGrid>
+              <a:tr h="731520">
+                <a:tc>
+                  <a:txBody>
+                    <a:bodyPr/>
+                    <a:lstStyle/>
+                    <a:p>
+                      <a:pPr indent="0" marL="0">
+                        <a:buNone/>
+                      </a:pPr>
+                      <a:r>
+                        <a:rPr lang="en-US" sz="1400" b="1" dirty="0">
+                          <a:solidFill>
+                            <a:srgbClr val="FFFFFF"/>
+                          </a:solidFill>
+                          <a:latin typeface="Malgun Gothic" pitchFamily="34" charset="0"/>
+                          <a:ea typeface="Malgun Gothic" pitchFamily="34" charset="-122"/>
+                          <a:cs typeface="Malgun Gothic" pitchFamily="34" charset="-120"/>
+                        </a:rPr>
+                        <a:t>설정</a:t>
+                      </a:r>
+                      <a:endParaRPr lang="en-US" sz="1400" dirty="0">
+                        <a:latin typeface="Malgun Gothic" charset="0"/>
+                        <a:ea typeface="Malgun Gothic" charset="0"/>
+                        <a:cs typeface="Malgun Gothic" charset="0"/>
+                      </a:endParaRPr>
+                    </a:p>
+                  </a:txBody>
+                  <a:tcPr marL="137160" marR="137160" marT="45720" marB="45720" anchor="ctr">
+                    <a:lnL w="12700" cap="flat" cmpd="sng" algn="ctr">
+                      <a:solidFill>
+                        <a:srgbClr val="DDE1E4"/>
+                      </a:solidFill>
+                      <a:prstDash val="solid"/>
+                      <a:round/>
+                      <a:headEnd type="none" w="med" len="med"/>
+                      <a:tailEnd type="none" w="med" len="med"/>
+                    </a:lnL>
+                    <a:lnR w="12700" cap="flat" cmpd="sng" algn="ctr">
+                      <a:solidFill>
+                        <a:srgbClr val="DDE1E4"/>
+                      </a:solidFill>
+                      <a:prstDash val="solid"/>
+                      <a:round/>
+                      <a:headEnd type="none" w="med" len="med"/>
+                      <a:tailEnd type="none" w="med" len="med"/>
+                    </a:lnR>
+                    <a:lnT w="12700" cap="flat" cmpd="sng" algn="ctr">
+                      <a:solidFill>
+                        <a:srgbClr val="DDE1E4"/>
+                      </a:solidFill>
+                      <a:prstDash val="solid"/>
+                      <a:round/>
+                      <a:headEnd type="none" w="med" len="med"/>
+                      <a:tailEnd type="none" w="med" len="med"/>
+                    </a:lnT>
+                    <a:lnB w="12700" cap="flat" cmpd="sng" algn="ctr">
+                      <a:solidFill>
+                        <a:srgbClr val="DDE1E4"/>
+                      </a:solidFill>
+                      <a:prstDash val="solid"/>
+                      <a:round/>
+                      <a:headEnd type="none" w="med" len="med"/>
+                      <a:tailEnd type="none" w="med" len="med"/>
+                    </a:lnB>
+                    <a:solidFill>
+                      <a:srgbClr val="0F3D1F"/>
+                    </a:solidFill>
+                  </a:tcPr>
+                </a:tc>
+                <a:tc>
+                  <a:txBody>
+                    <a:bodyPr/>
+                    <a:lstStyle/>
+                    <a:p>
+                      <a:pPr indent="0" marL="0">
+                        <a:buNone/>
+                      </a:pPr>
+                      <a:r>
+                        <a:rPr lang="en-US" sz="1400" b="1" dirty="0">
+                          <a:solidFill>
+                            <a:srgbClr val="FFFFFF"/>
+                          </a:solidFill>
+                          <a:latin typeface="Malgun Gothic" pitchFamily="34" charset="0"/>
+                          <a:ea typeface="Malgun Gothic" pitchFamily="34" charset="-122"/>
+                          <a:cs typeface="Malgun Gothic" pitchFamily="34" charset="-120"/>
+                        </a:rPr>
+                        <a:t>동작</a:t>
+                      </a:r>
+                      <a:endParaRPr lang="en-US" sz="1400" dirty="0">
+                        <a:latin typeface="Malgun Gothic" charset="0"/>
+                        <a:ea typeface="Malgun Gothic" charset="0"/>
+                        <a:cs typeface="Malgun Gothic" charset="0"/>
+                      </a:endParaRPr>
+                    </a:p>
+                  </a:txBody>
+                  <a:tcPr marL="137160" marR="137160" marT="45720" marB="45720" anchor="ctr">
+                    <a:lnL w="12700" cap="flat" cmpd="sng" algn="ctr">
+                      <a:solidFill>
+                        <a:srgbClr val="DDE1E4"/>
+                      </a:solidFill>
+                      <a:prstDash val="solid"/>
+                      <a:round/>
+                      <a:headEnd type="none" w="med" len="med"/>
+                      <a:tailEnd type="none" w="med" len="med"/>
+                    </a:lnL>
+                    <a:lnR w="12700" cap="flat" cmpd="sng" algn="ctr">
+                      <a:solidFill>
+                        <a:srgbClr val="DDE1E4"/>
+                      </a:solidFill>
+                      <a:prstDash val="solid"/>
+                      <a:round/>
+                      <a:headEnd type="none" w="med" len="med"/>
+                      <a:tailEnd type="none" w="med" len="med"/>
+                    </a:lnR>
+                    <a:lnT w="12700" cap="flat" cmpd="sng" algn="ctr">
+                      <a:solidFill>
+                        <a:srgbClr val="DDE1E4"/>
+                      </a:solidFill>
+                      <a:prstDash val="solid"/>
+                      <a:round/>
+                      <a:headEnd type="none" w="med" len="med"/>
+                      <a:tailEnd type="none" w="med" len="med"/>
+                    </a:lnT>
+                    <a:lnB w="12700" cap="flat" cmpd="sng" algn="ctr">
+                      <a:solidFill>
+                        <a:srgbClr val="DDE1E4"/>
+                      </a:solidFill>
+                      <a:prstDash val="solid"/>
+                      <a:round/>
+                      <a:headEnd type="none" w="med" len="med"/>
+                      <a:tailEnd type="none" w="med" len="med"/>
+                    </a:lnB>
+                    <a:solidFill>
+                      <a:srgbClr val="0F3D1F"/>
+                    </a:solidFill>
+                  </a:tcPr>
+                </a:tc>
+              </a:tr>
+              <a:tr h="731520">
+                <a:tc>
+                  <a:txBody>
+                    <a:bodyPr/>
+                    <a:lstStyle/>
+                    <a:p>
+                      <a:pPr indent="0" marL="0">
+                        <a:buNone/>
+                      </a:pPr>
+                      <a:r>
+                        <a:rPr lang="en-US" sz="1400" b="1" dirty="0">
+                          <a:solidFill>
+                            <a:srgbClr val="1B2A22"/>
+                          </a:solidFill>
+                          <a:latin typeface="Malgun Gothic" pitchFamily="34" charset="0"/>
+                          <a:ea typeface="Malgun Gothic" pitchFamily="34" charset="-122"/>
+                          <a:cs typeface="Malgun Gothic" pitchFamily="34" charset="-120"/>
+                        </a:rPr>
+                        <a:t>VITE_USE_MOCKS=true (기본)</a:t>
+                      </a:r>
+                      <a:endParaRPr lang="en-US" sz="1400" dirty="0">
+                        <a:latin typeface="Malgun Gothic" charset="0"/>
+                        <a:ea typeface="Malgun Gothic" charset="0"/>
+                        <a:cs typeface="Malgun Gothic" charset="0"/>
+                      </a:endParaRPr>
+                    </a:p>
+                  </a:txBody>
+                  <a:tcPr marL="137160" marR="137160" marT="45720" marB="45720" anchor="ctr">
+                    <a:lnL w="12700" cap="flat" cmpd="sng" algn="ctr">
+                      <a:solidFill>
+                        <a:srgbClr val="DDE1E4"/>
+                      </a:solidFill>
+                      <a:prstDash val="solid"/>
+                      <a:round/>
+                      <a:headEnd type="none" w="med" len="med"/>
+                      <a:tailEnd type="none" w="med" len="med"/>
+                    </a:lnL>
+                    <a:lnR w="12700" cap="flat" cmpd="sng" algn="ctr">
+                      <a:solidFill>
+                        <a:srgbClr val="DDE1E4"/>
+                      </a:solidFill>
+                      <a:prstDash val="solid"/>
+                      <a:round/>
+                      <a:headEnd type="none" w="med" len="med"/>
+                      <a:tailEnd type="none" w="med" len="med"/>
+                    </a:lnR>
+                    <a:lnT w="12700" cap="flat" cmpd="sng" algn="ctr">
+                      <a:solidFill>
+                        <a:srgbClr val="DDE1E4"/>
+                      </a:solidFill>
+                      <a:prstDash val="solid"/>
+                      <a:round/>
+                      <a:headEnd type="none" w="med" len="med"/>
+                      <a:tailEnd type="none" w="med" len="med"/>
+                    </a:lnT>
+                    <a:lnB w="12700" cap="flat" cmpd="sng" algn="ctr">
+                      <a:solidFill>
+                        <a:srgbClr val="DDE1E4"/>
+                      </a:solidFill>
+                      <a:prstDash val="solid"/>
+                      <a:round/>
+                      <a:headEnd type="none" w="med" len="med"/>
+                      <a:tailEnd type="none" w="med" len="med"/>
+                    </a:lnB>
+                  </a:tcPr>
+                </a:tc>
+                <a:tc>
+                  <a:txBody>
+                    <a:bodyPr/>
+                    <a:lstStyle/>
+                    <a:p>
+                      <a:pPr indent="0" marL="0">
+                        <a:buNone/>
+                      </a:pPr>
+                      <a:r>
+                        <a:rPr lang="en-US" sz="1400" dirty="0">
+                          <a:solidFill>
+                            <a:srgbClr val="1B2A22"/>
+                          </a:solidFill>
+                          <a:latin typeface="Malgun Gothic" pitchFamily="34" charset="0"/>
+                          <a:ea typeface="Malgun Gothic" pitchFamily="34" charset="-122"/>
+                          <a:cs typeface="Malgun Gothic" pitchFamily="34" charset="-120"/>
+                        </a:rPr>
+                        <a:t>MSW가 가짜 서버처럼 응답</a:t>
+                      </a:r>
+                      <a:endParaRPr lang="en-US" sz="1400" dirty="0">
+                        <a:latin typeface="Malgun Gothic" charset="0"/>
+                        <a:ea typeface="Malgun Gothic" charset="0"/>
+                        <a:cs typeface="Malgun Gothic" charset="0"/>
+                      </a:endParaRPr>
+                    </a:p>
+                  </a:txBody>
+                  <a:tcPr marL="137160" marR="137160" marT="45720" marB="45720" anchor="ctr">
+                    <a:lnL w="12700" cap="flat" cmpd="sng" algn="ctr">
+                      <a:solidFill>
+                        <a:srgbClr val="DDE1E4"/>
+                      </a:solidFill>
+                      <a:prstDash val="solid"/>
+                      <a:round/>
+                      <a:headEnd type="none" w="med" len="med"/>
+                      <a:tailEnd type="none" w="med" len="med"/>
+                    </a:lnL>
+                    <a:lnR w="12700" cap="flat" cmpd="sng" algn="ctr">
+                      <a:solidFill>
+                        <a:srgbClr val="DDE1E4"/>
+                      </a:solidFill>
+                      <a:prstDash val="solid"/>
+                      <a:round/>
+                      <a:headEnd type="none" w="med" len="med"/>
+                      <a:tailEnd type="none" w="med" len="med"/>
+                    </a:lnR>
+                    <a:lnT w="12700" cap="flat" cmpd="sng" algn="ctr">
+                      <a:solidFill>
+                        <a:srgbClr val="DDE1E4"/>
+                      </a:solidFill>
+                      <a:prstDash val="solid"/>
+                      <a:round/>
+                      <a:headEnd type="none" w="med" len="med"/>
+                      <a:tailEnd type="none" w="med" len="med"/>
+                    </a:lnT>
+                    <a:lnB w="12700" cap="flat" cmpd="sng" algn="ctr">
+                      <a:solidFill>
+                        <a:srgbClr val="DDE1E4"/>
+                      </a:solidFill>
+                      <a:prstDash val="solid"/>
+                      <a:round/>
+                      <a:headEnd type="none" w="med" len="med"/>
+                      <a:tailEnd type="none" w="med" len="med"/>
+                    </a:lnB>
+                  </a:tcPr>
+                </a:tc>
+              </a:tr>
+              <a:tr h="731520">
+                <a:tc>
+                  <a:txBody>
+                    <a:bodyPr/>
+                    <a:lstStyle/>
+                    <a:p>
+                      <a:pPr indent="0" marL="0">
+                        <a:buNone/>
+                      </a:pPr>
+                      <a:r>
+                        <a:rPr lang="en-US" sz="1400" b="1" dirty="0">
+                          <a:solidFill>
+                            <a:srgbClr val="1B2A22"/>
+                          </a:solidFill>
+                          <a:latin typeface="Malgun Gothic" pitchFamily="34" charset="0"/>
+                          <a:ea typeface="Malgun Gothic" pitchFamily="34" charset="-122"/>
+                          <a:cs typeface="Malgun Gothic" pitchFamily="34" charset="-120"/>
+                        </a:rPr>
+                        <a:t>VITE_USE_MOCKS=false</a:t>
+                      </a:r>
+                      <a:endParaRPr lang="en-US" sz="1400" dirty="0">
+                        <a:latin typeface="Malgun Gothic" charset="0"/>
+                        <a:ea typeface="Malgun Gothic" charset="0"/>
+                        <a:cs typeface="Malgun Gothic" charset="0"/>
+                      </a:endParaRPr>
+                    </a:p>
+                  </a:txBody>
+                  <a:tcPr marL="137160" marR="137160" marT="45720" marB="45720" anchor="ctr">
+                    <a:lnL w="12700" cap="flat" cmpd="sng" algn="ctr">
+                      <a:solidFill>
+                        <a:srgbClr val="DDE1E4"/>
+                      </a:solidFill>
+                      <a:prstDash val="solid"/>
+                      <a:round/>
+                      <a:headEnd type="none" w="med" len="med"/>
+                      <a:tailEnd type="none" w="med" len="med"/>
+                    </a:lnL>
+                    <a:lnR w="12700" cap="flat" cmpd="sng" algn="ctr">
+                      <a:solidFill>
+                        <a:srgbClr val="DDE1E4"/>
+                      </a:solidFill>
+                      <a:prstDash val="solid"/>
+                      <a:round/>
+                      <a:headEnd type="none" w="med" len="med"/>
+                      <a:tailEnd type="none" w="med" len="med"/>
+                    </a:lnR>
+                    <a:lnT w="12700" cap="flat" cmpd="sng" algn="ctr">
+                      <a:solidFill>
+                        <a:srgbClr val="DDE1E4"/>
+                      </a:solidFill>
+                      <a:prstDash val="solid"/>
+                      <a:round/>
+                      <a:headEnd type="none" w="med" len="med"/>
+                      <a:tailEnd type="none" w="med" len="med"/>
+                    </a:lnT>
+                    <a:lnB w="12700" cap="flat" cmpd="sng" algn="ctr">
+                      <a:solidFill>
+                        <a:srgbClr val="DDE1E4"/>
+                      </a:solidFill>
+                      <a:prstDash val="solid"/>
+                      <a:round/>
+                      <a:headEnd type="none" w="med" len="med"/>
+                      <a:tailEnd type="none" w="med" len="med"/>
+                    </a:lnB>
+                  </a:tcPr>
+                </a:tc>
+                <a:tc>
+                  <a:txBody>
+                    <a:bodyPr/>
+                    <a:lstStyle/>
+                    <a:p>
+                      <a:pPr indent="0" marL="0">
+                        <a:buNone/>
+                      </a:pPr>
+                      <a:r>
+                        <a:rPr lang="en-US" sz="1400" dirty="0">
+                          <a:solidFill>
+                            <a:srgbClr val="1B2A22"/>
+                          </a:solidFill>
+                          <a:latin typeface="Malgun Gothic" pitchFamily="34" charset="0"/>
+                          <a:ea typeface="Malgun Gothic" pitchFamily="34" charset="-122"/>
+                          <a:cs typeface="Malgun Gothic" pitchFamily="34" charset="-120"/>
+                        </a:rPr>
+                        <a:t>화면 수정 없이 실제 백엔드 호출</a:t>
+                      </a:r>
+                      <a:endParaRPr lang="en-US" sz="1400" dirty="0">
+                        <a:latin typeface="Malgun Gothic" charset="0"/>
+                        <a:ea typeface="Malgun Gothic" charset="0"/>
+                        <a:cs typeface="Malgun Gothic" charset="0"/>
+                      </a:endParaRPr>
+                    </a:p>
+                  </a:txBody>
+                  <a:tcPr marL="137160" marR="137160" marT="45720" marB="45720" anchor="ctr">
+                    <a:lnL w="12700" cap="flat" cmpd="sng" algn="ctr">
+                      <a:solidFill>
+                        <a:srgbClr val="DDE1E4"/>
+                      </a:solidFill>
+                      <a:prstDash val="solid"/>
+                      <a:round/>
+                      <a:headEnd type="none" w="med" len="med"/>
+                      <a:tailEnd type="none" w="med" len="med"/>
+                    </a:lnL>
+                    <a:lnR w="12700" cap="flat" cmpd="sng" algn="ctr">
+                      <a:solidFill>
+                        <a:srgbClr val="DDE1E4"/>
+                      </a:solidFill>
+                      <a:prstDash val="solid"/>
+                      <a:round/>
+                      <a:headEnd type="none" w="med" len="med"/>
+                      <a:tailEnd type="none" w="med" len="med"/>
+                    </a:lnR>
+                    <a:lnT w="12700" cap="flat" cmpd="sng" algn="ctr">
+                      <a:solidFill>
+                        <a:srgbClr val="DDE1E4"/>
+                      </a:solidFill>
+                      <a:prstDash val="solid"/>
+                      <a:round/>
+                      <a:headEnd type="none" w="med" len="med"/>
+                      <a:tailEnd type="none" w="med" len="med"/>
+                    </a:lnT>
+                    <a:lnB w="12700" cap="flat" cmpd="sng" algn="ctr">
+                      <a:solidFill>
+                        <a:srgbClr val="DDE1E4"/>
+                      </a:solidFill>
+                      <a:prstDash val="solid"/>
+                      <a:round/>
+                      <a:headEnd type="none" w="med" len="med"/>
+                      <a:tailEnd type="none" w="med" len="med"/>
+                    </a:lnB>
+                  </a:tcPr>
+                </a:tc>
+              </a:tr>
+              <a:tr h="731520">
+                <a:tc>
+                  <a:txBody>
+                    <a:bodyPr/>
+                    <a:lstStyle/>
+                    <a:p>
+                      <a:pPr indent="0" marL="0">
+                        <a:buNone/>
+                      </a:pPr>
+                      <a:r>
+                        <a:rPr lang="en-US" sz="1400" b="1" dirty="0">
+                          <a:solidFill>
+                            <a:srgbClr val="1B2A22"/>
+                          </a:solidFill>
+                          <a:latin typeface="Malgun Gothic" pitchFamily="34" charset="0"/>
+                          <a:ea typeface="Malgun Gothic" pitchFamily="34" charset="-122"/>
+                          <a:cs typeface="Malgun Gothic" pitchFamily="34" charset="-120"/>
+                        </a:rPr>
+                        <a:t>?mockDelay=1500</a:t>
+                      </a:r>
+                      <a:endParaRPr lang="en-US" sz="1400" dirty="0">
+                        <a:latin typeface="Malgun Gothic" charset="0"/>
+                        <a:ea typeface="Malgun Gothic" charset="0"/>
+                        <a:cs typeface="Malgun Gothic" charset="0"/>
+                      </a:endParaRPr>
+                    </a:p>
+                  </a:txBody>
+                  <a:tcPr marL="137160" marR="137160" marT="45720" marB="45720" anchor="ctr">
+                    <a:lnL w="12700" cap="flat" cmpd="sng" algn="ctr">
+                      <a:solidFill>
+                        <a:srgbClr val="DDE1E4"/>
+                      </a:solidFill>
+                      <a:prstDash val="solid"/>
+                      <a:round/>
+                      <a:headEnd type="none" w="med" len="med"/>
+                      <a:tailEnd type="none" w="med" len="med"/>
+                    </a:lnL>
+                    <a:lnR w="12700" cap="flat" cmpd="sng" algn="ctr">
+                      <a:solidFill>
+                        <a:srgbClr val="DDE1E4"/>
+                      </a:solidFill>
+                      <a:prstDash val="solid"/>
+                      <a:round/>
+                      <a:headEnd type="none" w="med" len="med"/>
+                      <a:tailEnd type="none" w="med" len="med"/>
+                    </a:lnR>
+                    <a:lnT w="12700" cap="flat" cmpd="sng" algn="ctr">
+                      <a:solidFill>
+                        <a:srgbClr val="DDE1E4"/>
+                      </a:solidFill>
+                      <a:prstDash val="solid"/>
+                      <a:round/>
+                      <a:headEnd type="none" w="med" len="med"/>
+                      <a:tailEnd type="none" w="med" len="med"/>
+                    </a:lnT>
+                    <a:lnB w="12700" cap="flat" cmpd="sng" algn="ctr">
+                      <a:solidFill>
+                        <a:srgbClr val="DDE1E4"/>
+                      </a:solidFill>
+                      <a:prstDash val="solid"/>
+                      <a:round/>
+                      <a:headEnd type="none" w="med" len="med"/>
+                      <a:tailEnd type="none" w="med" len="med"/>
+                    </a:lnB>
+                  </a:tcPr>
+                </a:tc>
+                <a:tc>
+                  <a:txBody>
+                    <a:bodyPr/>
+                    <a:lstStyle/>
+                    <a:p>
+                      <a:pPr indent="0" marL="0">
+                        <a:buNone/>
+                      </a:pPr>
+                      <a:r>
+                        <a:rPr lang="en-US" sz="1400" dirty="0">
+                          <a:solidFill>
+                            <a:srgbClr val="1B2A22"/>
+                          </a:solidFill>
+                          <a:latin typeface="Malgun Gothic" pitchFamily="34" charset="0"/>
+                          <a:ea typeface="Malgun Gothic" pitchFamily="34" charset="-122"/>
+                          <a:cs typeface="Malgun Gothic" pitchFamily="34" charset="-120"/>
+                        </a:rPr>
+                        <a:t>응답 1.5초 지연 → 로딩 화면</a:t>
+                      </a:r>
+                      <a:endParaRPr lang="en-US" sz="1400" dirty="0">
+                        <a:latin typeface="Malgun Gothic" charset="0"/>
+                        <a:ea typeface="Malgun Gothic" charset="0"/>
+                        <a:cs typeface="Malgun Gothic" charset="0"/>
+                      </a:endParaRPr>
+                    </a:p>
+                  </a:txBody>
+                  <a:tcPr marL="137160" marR="137160" marT="45720" marB="45720" anchor="ctr">
+                    <a:lnL w="12700" cap="flat" cmpd="sng" algn="ctr">
+                      <a:solidFill>
+                        <a:srgbClr val="DDE1E4"/>
+                      </a:solidFill>
+                      <a:prstDash val="solid"/>
+                      <a:round/>
+                      <a:headEnd type="none" w="med" len="med"/>
+                      <a:tailEnd type="none" w="med" len="med"/>
+                    </a:lnL>
+                    <a:lnR w="12700" cap="flat" cmpd="sng" algn="ctr">
+                      <a:solidFill>
+                        <a:srgbClr val="DDE1E4"/>
+                      </a:solidFill>
+                      <a:prstDash val="solid"/>
+                      <a:round/>
+                      <a:headEnd type="none" w="med" len="med"/>
+                      <a:tailEnd type="none" w="med" len="med"/>
+                    </a:lnR>
+                    <a:lnT w="12700" cap="flat" cmpd="sng" algn="ctr">
+                      <a:solidFill>
+                        <a:srgbClr val="DDE1E4"/>
+                      </a:solidFill>
+                      <a:prstDash val="solid"/>
+                      <a:round/>
+                      <a:headEnd type="none" w="med" len="med"/>
+                      <a:tailEnd type="none" w="med" len="med"/>
+                    </a:lnT>
+                    <a:lnB w="12700" cap="flat" cmpd="sng" algn="ctr">
+                      <a:solidFill>
+                        <a:srgbClr val="DDE1E4"/>
+                      </a:solidFill>
+                      <a:prstDash val="solid"/>
+                      <a:round/>
+                      <a:headEnd type="none" w="med" len="med"/>
+                      <a:tailEnd type="none" w="med" len="med"/>
+                    </a:lnB>
+                  </a:tcPr>
+                </a:tc>
+              </a:tr>
+              <a:tr h="731520">
+                <a:tc>
+                  <a:txBody>
+                    <a:bodyPr/>
+                    <a:lstStyle/>
+                    <a:p>
+                      <a:pPr indent="0" marL="0">
+                        <a:buNone/>
+                      </a:pPr>
+                      <a:r>
+                        <a:rPr lang="en-US" sz="1400" b="1" dirty="0">
+                          <a:solidFill>
+                            <a:srgbClr val="1B2A22"/>
+                          </a:solidFill>
+                          <a:latin typeface="Malgun Gothic" pitchFamily="34" charset="0"/>
+                          <a:ea typeface="Malgun Gothic" pitchFamily="34" charset="-122"/>
+                          <a:cs typeface="Malgun Gothic" pitchFamily="34" charset="-120"/>
+                        </a:rPr>
+                        <a:t>?mockStatus=500</a:t>
+                      </a:r>
+                      <a:endParaRPr lang="en-US" sz="1400" dirty="0">
+                        <a:latin typeface="Malgun Gothic" charset="0"/>
+                        <a:ea typeface="Malgun Gothic" charset="0"/>
+                        <a:cs typeface="Malgun Gothic" charset="0"/>
+                      </a:endParaRPr>
+                    </a:p>
+                  </a:txBody>
+                  <a:tcPr marL="137160" marR="137160" marT="45720" marB="45720" anchor="ctr">
+                    <a:lnL w="12700" cap="flat" cmpd="sng" algn="ctr">
+                      <a:solidFill>
+                        <a:srgbClr val="DDE1E4"/>
+                      </a:solidFill>
+                      <a:prstDash val="solid"/>
+                      <a:round/>
+                      <a:headEnd type="none" w="med" len="med"/>
+                      <a:tailEnd type="none" w="med" len="med"/>
+                    </a:lnL>
+                    <a:lnR w="12700" cap="flat" cmpd="sng" algn="ctr">
+                      <a:solidFill>
+                        <a:srgbClr val="DDE1E4"/>
+                      </a:solidFill>
+                      <a:prstDash val="solid"/>
+                      <a:round/>
+                      <a:headEnd type="none" w="med" len="med"/>
+                      <a:tailEnd type="none" w="med" len="med"/>
+                    </a:lnR>
+                    <a:lnT w="12700" cap="flat" cmpd="sng" algn="ctr">
+                      <a:solidFill>
+                        <a:srgbClr val="DDE1E4"/>
+                      </a:solidFill>
+                      <a:prstDash val="solid"/>
+                      <a:round/>
+                      <a:headEnd type="none" w="med" len="med"/>
+                      <a:tailEnd type="none" w="med" len="med"/>
+                    </a:lnT>
+                    <a:lnB w="12700" cap="flat" cmpd="sng" algn="ctr">
+                      <a:solidFill>
+                        <a:srgbClr val="DDE1E4"/>
+                      </a:solidFill>
+                      <a:prstDash val="solid"/>
+                      <a:round/>
+                      <a:headEnd type="none" w="med" len="med"/>
+                      <a:tailEnd type="none" w="med" len="med"/>
+                    </a:lnB>
+                  </a:tcPr>
+                </a:tc>
+                <a:tc>
+                  <a:txBody>
+                    <a:bodyPr/>
+                    <a:lstStyle/>
+                    <a:p>
+                      <a:pPr indent="0" marL="0">
+                        <a:buNone/>
+                      </a:pPr>
+                      <a:r>
+                        <a:rPr lang="en-US" sz="1400" dirty="0">
+                          <a:solidFill>
+                            <a:srgbClr val="1B2A22"/>
+                          </a:solidFill>
+                          <a:latin typeface="Malgun Gothic" pitchFamily="34" charset="0"/>
+                          <a:ea typeface="Malgun Gothic" pitchFamily="34" charset="-122"/>
+                          <a:cs typeface="Malgun Gothic" pitchFamily="34" charset="-120"/>
+                        </a:rPr>
+                        <a:t>모든 요청 실패 → 오류 화면 (400·403·404·409·422·500)</a:t>
+                      </a:r>
+                      <a:endParaRPr lang="en-US" sz="1400" dirty="0">
+                        <a:latin typeface="Malgun Gothic" charset="0"/>
+                        <a:ea typeface="Malgun Gothic" charset="0"/>
+                        <a:cs typeface="Malgun Gothic" charset="0"/>
+                      </a:endParaRPr>
+                    </a:p>
+                  </a:txBody>
+                  <a:tcPr marL="137160" marR="137160" marT="45720" marB="45720" anchor="ctr">
+                    <a:lnL w="12700" cap="flat" cmpd="sng" algn="ctr">
+                      <a:solidFill>
+                        <a:srgbClr val="DDE1E4"/>
+                      </a:solidFill>
+                      <a:prstDash val="solid"/>
+                      <a:round/>
+                      <a:headEnd type="none" w="med" len="med"/>
+                      <a:tailEnd type="none" w="med" len="med"/>
+                    </a:lnL>
+                    <a:lnR w="12700" cap="flat" cmpd="sng" algn="ctr">
+                      <a:solidFill>
+                        <a:srgbClr val="DDE1E4"/>
+                      </a:solidFill>
+                      <a:prstDash val="solid"/>
+                      <a:round/>
+                      <a:headEnd type="none" w="med" len="med"/>
+                      <a:tailEnd type="none" w="med" len="med"/>
+                    </a:lnR>
+                    <a:lnT w="12700" cap="flat" cmpd="sng" algn="ctr">
+                      <a:solidFill>
+                        <a:srgbClr val="DDE1E4"/>
+                      </a:solidFill>
+                      <a:prstDash val="solid"/>
+                      <a:round/>
+                      <a:headEnd type="none" w="med" len="med"/>
+                      <a:tailEnd type="none" w="med" len="med"/>
+                    </a:lnT>
+                    <a:lnB w="12700" cap="flat" cmpd="sng" algn="ctr">
+                      <a:solidFill>
+                        <a:srgbClr val="DDE1E4"/>
+                      </a:solidFill>
+                      <a:prstDash val="solid"/>
+                      <a:round/>
+                      <a:headEnd type="none" w="med" len="med"/>
+                      <a:tailEnd type="none" w="med" len="med"/>
+                    </a:lnB>
+                  </a:tcPr>
+                </a:tc>
+              </a:tr>
+            </a:tbl>
+          </a:graphicData>
+        </a:graphic>
+      </p:graphicFrame>
+      <p:sp>
+        <p:nvSpPr>
+          <p:cNvPr id="17" name="Text 13"/>
           <p:cNvSpPr txBox="1"/>
           <p:nvPr/>
         </p:nvSpPr>
         <p:spPr>
           <a:xfrm>
-            <a:off x="8229600" y="2103120"/>
-            <a:ext cx="3108960" cy="3383280"/>
+            <a:off x="4206240" y="5394960"/>
+            <a:ext cx="7406640" cy="457200"/>
           </a:xfrm>
           <a:prstGeom prst="rect">
             <a:avLst/>
@@ -9869,88 +12288,21 @@
           <a:bodyPr wrap="square" lIns="0" tIns="0" rIns="0" bIns="0" rtlCol="0" anchor="t"/>
           <a:lstStyle/>
           <a:p>
-            <a:pPr marL="342900" indent="-342900">
-              <a:spcAft>
-                <a:spcPts val="600"/>
-              </a:spcAft>
-              <a:buSzPct val="100000"/>
-              <a:buChar char="•"/>
-            </a:pPr>
-            <a:r>
-              <a:rPr lang="en-US" sz="1600" dirty="0">
-                <a:solidFill>
-                  <a:srgbClr val="1B2A22"/>
-                </a:solidFill>
-                <a:latin typeface="Malgun Gothic" pitchFamily="34" charset="0"/>
-                <a:ea typeface="Malgun Gothic" pitchFamily="34" charset="-122"/>
-                <a:cs typeface="Malgun Gothic" pitchFamily="34" charset="-120"/>
-              </a:rPr>
-              <a:t>D1 색 대비 AA(4.5:1) 미달 10쌍, 브랜드 색 확정 후 조정</a:t>
-            </a:r>
-            <a:endParaRPr lang="en-US" sz="1600" dirty="0"/>
-          </a:p>
-          <a:p>
-            <a:pPr marL="342900" indent="-342900">
-              <a:spcAft>
-                <a:spcPts val="600"/>
-              </a:spcAft>
-              <a:buSzPct val="100000"/>
-              <a:buChar char="•"/>
-            </a:pPr>
-            <a:r>
-              <a:rPr lang="en-US" sz="1600" dirty="0">
-                <a:solidFill>
-                  <a:srgbClr val="1B2A22"/>
-                </a:solidFill>
-                <a:latin typeface="Malgun Gothic" pitchFamily="34" charset="0"/>
-                <a:ea typeface="Malgun Gothic" pitchFamily="34" charset="-122"/>
-                <a:cs typeface="Malgun Gothic" pitchFamily="34" charset="-120"/>
-              </a:rPr>
-              <a:t>D2 Tab 순서: 내부 관리 패널이 본문 뒤</a:t>
-            </a:r>
-            <a:endParaRPr lang="en-US" sz="1600" dirty="0"/>
-          </a:p>
-          <a:p>
-            <a:pPr marL="342900" indent="-342900">
-              <a:spcAft>
-                <a:spcPts val="600"/>
-              </a:spcAft>
-              <a:buSzPct val="100000"/>
-              <a:buChar char="•"/>
-            </a:pPr>
-            <a:r>
-              <a:rPr lang="en-US" sz="1600" dirty="0">
-                <a:solidFill>
-                  <a:srgbClr val="1B2A22"/>
-                </a:solidFill>
-                <a:latin typeface="Malgun Gothic" pitchFamily="34" charset="0"/>
-                <a:ea typeface="Malgun Gothic" pitchFamily="34" charset="-122"/>
-                <a:cs typeface="Malgun Gothic" pitchFamily="34" charset="-120"/>
-              </a:rPr>
-              <a:t>D3 설정 화면 저장 버튼 고정</a:t>
-            </a:r>
-            <a:endParaRPr lang="en-US" sz="1600" dirty="0"/>
-          </a:p>
-          <a:p>
-            <a:pPr marL="342900" indent="-342900">
-              <a:spcAft>
-                <a:spcPts val="600"/>
-              </a:spcAft>
-              <a:buSzPct val="100000"/>
-              <a:buChar char="•"/>
-            </a:pPr>
-            <a:r>
-              <a:rPr lang="en-US" sz="1600" dirty="0">
-                <a:solidFill>
-                  <a:srgbClr val="1B2A22"/>
-                </a:solidFill>
-                <a:latin typeface="Malgun Gothic" pitchFamily="34" charset="0"/>
-                <a:ea typeface="Malgun Gothic" pitchFamily="34" charset="-122"/>
-                <a:cs typeface="Malgun Gothic" pitchFamily="34" charset="-120"/>
-              </a:rPr>
-              <a:t>병원 화면 시안 보강</a:t>
-            </a:r>
-            <a:endParaRPr lang="en-US" sz="1600" dirty="0"/>
+            <a:pPr indent="0" marL="0">
+              <a:buNone/>
+            </a:pPr>
+            <a:r>
+              <a:rPr lang="en-US" sz="1400" dirty="0">
+                <a:solidFill>
+                  <a:srgbClr val="B77600"/>
+                </a:solidFill>
+                <a:latin typeface="Malgun Gothic" pitchFamily="34" charset="0"/>
+                <a:ea typeface="Malgun Gothic" pitchFamily="34" charset="-122"/>
+                <a:cs typeface="Malgun Gothic" pitchFamily="34" charset="-120"/>
+              </a:rPr>
+              <a:t>인증·파일 업로드·알림·계정 동기화는 의도적으로 mock으로 남겨 두었습니다.</a:t>
+            </a:r>
+            <a:endParaRPr lang="en-US" sz="1400" dirty="0"/>
           </a:p>
         </p:txBody>
       </p:sp>
@@ -10060,7 +12412,7 @@
                 <a:ea typeface="Malgun Gothic" pitchFamily="34" charset="-122"/>
                 <a:cs typeface="Malgun Gothic" pitchFamily="34" charset="-120"/>
               </a:rPr>
-              <a:t>개발자: 계층 분리와 검증 자동화</a:t>
+              <a:t>기획자: 문서가 곧 구현 기준입니다</a:t>
             </a:r>
             <a:endParaRPr lang="en-US" sz="3200" dirty="0"/>
           </a:p>
@@ -10083,11 +12435,11 @@
             </a:avLst>
           </a:prstGeom>
           <a:solidFill>
-            <a:srgbClr val="E4F2FF"/>
+            <a:srgbClr val="F0E8FF"/>
           </a:solidFill>
           <a:ln w="12700">
             <a:solidFill>
-              <a:srgbClr val="E4F2FF"/>
+              <a:srgbClr val="F0E8FF"/>
             </a:solidFill>
             <a:prstDash val="solid"/>
           </a:ln>
@@ -10120,7 +12472,7 @@
             <a:r>
               <a:rPr lang="en-US" sz="1800" b="1" dirty="0">
                 <a:solidFill>
-                  <a:srgbClr val="2477B3"/>
+                  <a:srgbClr val="7047D8"/>
                 </a:solidFill>
                 <a:latin typeface="Malgun Gothic" pitchFamily="34" charset="0"/>
                 <a:ea typeface="Malgun Gothic" pitchFamily="34" charset="-122"/>
@@ -10169,7 +12521,7 @@
                 <a:ea typeface="Malgun Gothic" pitchFamily="34" charset="-122"/>
                 <a:cs typeface="Malgun Gothic" pitchFamily="34" charset="-120"/>
               </a:rPr>
-              <a:t>apps/api/src/domain/*</a:t>
+              <a:t>Concept.md: 목적·사용자·화면</a:t>
             </a:r>
             <a:endParaRPr lang="en-US" sz="1600" dirty="0"/>
           </a:p>
@@ -10190,7 +12542,7 @@
                 <a:ea typeface="Malgun Gothic" pitchFamily="34" charset="-122"/>
                 <a:cs typeface="Malgun Gothic" pitchFamily="34" charset="-120"/>
               </a:rPr>
-              <a:t>apps/web/src/features/*</a:t>
+              <a:t>ToDo.md 단계 0: 확정할 정책</a:t>
             </a:r>
             <a:endParaRPr lang="en-US" sz="1600" dirty="0"/>
           </a:p>
@@ -10211,7 +12563,7 @@
                 <a:ea typeface="Malgun Gothic" pitchFamily="34" charset="-122"/>
                 <a:cs typeface="Malgun Gothic" pitchFamily="34" charset="-120"/>
               </a:rPr>
-              <a:t>prisma/schema.prisma</a:t>
+              <a:t>design/ 시안 PNG 약 35장</a:t>
             </a:r>
             <a:endParaRPr lang="en-US" sz="1600" dirty="0"/>
           </a:p>
@@ -10232,7 +12584,7 @@
                 <a:ea typeface="Malgun Gothic" pitchFamily="34" charset="-122"/>
                 <a:cs typeface="Malgun Gothic" pitchFamily="34" charset="-120"/>
               </a:rPr>
-              <a:t>docs/ops/runbook.md</a:t>
+              <a:t>admin_version2/static-html: 설치 없이 여는 데모</a:t>
             </a:r>
             <a:endParaRPr lang="en-US" sz="1600" dirty="0"/>
           </a:p>
@@ -10255,11 +12607,11 @@
             </a:avLst>
           </a:prstGeom>
           <a:solidFill>
-            <a:srgbClr val="E4F2FF"/>
+            <a:srgbClr val="F0E8FF"/>
           </a:solidFill>
           <a:ln w="12700">
             <a:solidFill>
-              <a:srgbClr val="E4F2FF"/>
+              <a:srgbClr val="F0E8FF"/>
             </a:solidFill>
             <a:prstDash val="solid"/>
           </a:ln>
@@ -10292,7 +12644,7 @@
             <a:r>
               <a:rPr lang="en-US" sz="1800" b="1" dirty="0">
                 <a:solidFill>
-                  <a:srgbClr val="2477B3"/>
+                  <a:srgbClr val="7047D8"/>
                 </a:solidFill>
                 <a:latin typeface="Malgun Gothic" pitchFamily="34" charset="0"/>
                 <a:ea typeface="Malgun Gothic" pitchFamily="34" charset="-122"/>
@@ -10341,7 +12693,7 @@
                 <a:ea typeface="Malgun Gothic" pitchFamily="34" charset="-122"/>
                 <a:cs typeface="Malgun Gothic" pitchFamily="34" charset="-120"/>
               </a:rPr>
-              <a:t>happicare: DataSource·Mapper·Repository로 저장소 교체 가능</a:t>
+              <a:t>문서를 먼저 쓰면 AI 결과의 방향이 흔들리지 않습니다</a:t>
             </a:r>
             <a:endParaRPr lang="en-US" sz="1600" dirty="0"/>
           </a:p>
@@ -10362,10 +12714,98 @@
                 <a:ea typeface="Malgun Gothic" pitchFamily="34" charset="-122"/>
                 <a:cs typeface="Malgun Gothic" pitchFamily="34" charset="-120"/>
               </a:rPr>
-              <a:t>front2: 모듈형 모놀리스, 모델 22개, 마이그레이션 14개</a:t>
+              <a:t>원본 HTML 기준(happicare)으로는 담당자 배정·답변 관리 같은 새 요구를 다룰 수 없습니다</a:t>
             </a:r>
             <a:endParaRPr lang="en-US" sz="1600" dirty="0"/>
           </a:p>
+        </p:txBody>
+      </p:sp>
+      <p:sp>
+        <p:nvSpPr>
+          <p:cNvPr id="10" name="Shape 7"/>
+          <p:cNvSpPr/>
+          <p:nvPr/>
+        </p:nvSpPr>
+        <p:spPr>
+          <a:xfrm>
+            <a:off x="7955280" y="1463040"/>
+            <a:ext cx="3657600" cy="4206240"/>
+          </a:xfrm>
+          <a:prstGeom prst="roundRect">
+            <a:avLst>
+              <a:gd name="adj" fmla="val 3000"/>
+            </a:avLst>
+          </a:prstGeom>
+          <a:solidFill>
+            <a:srgbClr val="F0E8FF"/>
+          </a:solidFill>
+          <a:ln w="12700">
+            <a:solidFill>
+              <a:srgbClr val="F0E8FF"/>
+            </a:solidFill>
+            <a:prstDash val="solid"/>
+          </a:ln>
+        </p:spPr>
+      </p:sp>
+      <p:sp>
+        <p:nvSpPr>
+          <p:cNvPr id="11" name="Text 8"/>
+          <p:cNvSpPr txBox="1"/>
+          <p:nvPr/>
+        </p:nvSpPr>
+        <p:spPr>
+          <a:xfrm>
+            <a:off x="8229600" y="1600200"/>
+            <a:ext cx="3108960" cy="365760"/>
+          </a:xfrm>
+          <a:prstGeom prst="rect">
+            <a:avLst/>
+          </a:prstGeom>
+          <a:noFill/>
+          <a:ln/>
+        </p:spPr>
+        <p:txBody>
+          <a:bodyPr wrap="square" lIns="0" tIns="0" rIns="0" bIns="0" rtlCol="0" anchor="t"/>
+          <a:lstStyle/>
+          <a:p>
+            <a:pPr indent="0" marL="0">
+              <a:buNone/>
+            </a:pPr>
+            <a:r>
+              <a:rPr lang="en-US" sz="1800" b="1" dirty="0">
+                <a:solidFill>
+                  <a:srgbClr val="7047D8"/>
+                </a:solidFill>
+                <a:latin typeface="Malgun Gothic" pitchFamily="34" charset="0"/>
+                <a:ea typeface="Malgun Gothic" pitchFamily="34" charset="-122"/>
+                <a:cs typeface="Malgun Gothic" pitchFamily="34" charset="-120"/>
+              </a:rPr>
+              <a:t>결정이 필요한 항목</a:t>
+            </a:r>
+            <a:endParaRPr lang="en-US" sz="1800" dirty="0"/>
+          </a:p>
+        </p:txBody>
+      </p:sp>
+      <p:sp>
+        <p:nvSpPr>
+          <p:cNvPr id="12" name="Text 9"/>
+          <p:cNvSpPr txBox="1"/>
+          <p:nvPr/>
+        </p:nvSpPr>
+        <p:spPr>
+          <a:xfrm>
+            <a:off x="8229600" y="2103120"/>
+            <a:ext cx="3108960" cy="3383280"/>
+          </a:xfrm>
+          <a:prstGeom prst="rect">
+            <a:avLst/>
+          </a:prstGeom>
+          <a:noFill/>
+          <a:ln/>
+        </p:spPr>
+        <p:txBody>
+          <a:bodyPr wrap="square" lIns="0" tIns="0" rIns="0" bIns="0" rtlCol="0" anchor="t"/>
+          <a:lstStyle/>
           <a:p>
             <a:pPr marL="342900" indent="-342900">
               <a:spcAft>
@@ -10383,7 +12823,7 @@
                 <a:ea typeface="Malgun Gothic" pitchFamily="34" charset="-122"/>
                 <a:cs typeface="Malgun Gothic" pitchFamily="34" charset="-120"/>
               </a:rPr>
-              <a:t>상태 전이·감사 로그·알림 대기열은 서버가 책임</a:t>
+              <a:t>CRM 자동 로그인 방식</a:t>
             </a:r>
             <a:endParaRPr lang="en-US" sz="1600" dirty="0"/>
           </a:p>
@@ -10404,98 +12844,10 @@
                 <a:ea typeface="Malgun Gothic" pitchFamily="34" charset="-122"/>
                 <a:cs typeface="Malgun Gothic" pitchFamily="34" charset="-120"/>
               </a:rPr>
-              <a:t>웹 테스트 64개·API spec 104개, CI 분리</a:t>
+              <a:t>관리자 인증·권한</a:t>
             </a:r>
             <a:endParaRPr lang="en-US" sz="1600" dirty="0"/>
           </a:p>
-        </p:txBody>
-      </p:sp>
-      <p:sp>
-        <p:nvSpPr>
-          <p:cNvPr id="10" name="Shape 7"/>
-          <p:cNvSpPr/>
-          <p:nvPr/>
-        </p:nvSpPr>
-        <p:spPr>
-          <a:xfrm>
-            <a:off x="7955280" y="1463040"/>
-            <a:ext cx="3657600" cy="4206240"/>
-          </a:xfrm>
-          <a:prstGeom prst="roundRect">
-            <a:avLst>
-              <a:gd name="adj" fmla="val 3000"/>
-            </a:avLst>
-          </a:prstGeom>
-          <a:solidFill>
-            <a:srgbClr val="E4F2FF"/>
-          </a:solidFill>
-          <a:ln w="12700">
-            <a:solidFill>
-              <a:srgbClr val="E4F2FF"/>
-            </a:solidFill>
-            <a:prstDash val="solid"/>
-          </a:ln>
-        </p:spPr>
-      </p:sp>
-      <p:sp>
-        <p:nvSpPr>
-          <p:cNvPr id="11" name="Text 8"/>
-          <p:cNvSpPr txBox="1"/>
-          <p:nvPr/>
-        </p:nvSpPr>
-        <p:spPr>
-          <a:xfrm>
-            <a:off x="8229600" y="1600200"/>
-            <a:ext cx="3108960" cy="365760"/>
-          </a:xfrm>
-          <a:prstGeom prst="rect">
-            <a:avLst/>
-          </a:prstGeom>
-          <a:noFill/>
-          <a:ln/>
-        </p:spPr>
-        <p:txBody>
-          <a:bodyPr wrap="square" lIns="0" tIns="0" rIns="0" bIns="0" rtlCol="0" anchor="t"/>
-          <a:lstStyle/>
-          <a:p>
-            <a:pPr indent="0" marL="0">
-              <a:buNone/>
-            </a:pPr>
-            <a:r>
-              <a:rPr lang="en-US" sz="1800" b="1" dirty="0">
-                <a:solidFill>
-                  <a:srgbClr val="2477B3"/>
-                </a:solidFill>
-                <a:latin typeface="Malgun Gothic" pitchFamily="34" charset="0"/>
-                <a:ea typeface="Malgun Gothic" pitchFamily="34" charset="-122"/>
-                <a:cs typeface="Malgun Gothic" pitchFamily="34" charset="-120"/>
-              </a:rPr>
-              <a:t>기술 부채와 위험</a:t>
-            </a:r>
-            <a:endParaRPr lang="en-US" sz="1800" dirty="0"/>
-          </a:p>
-        </p:txBody>
-      </p:sp>
-      <p:sp>
-        <p:nvSpPr>
-          <p:cNvPr id="12" name="Text 9"/>
-          <p:cNvSpPr txBox="1"/>
-          <p:nvPr/>
-        </p:nvSpPr>
-        <p:spPr>
-          <a:xfrm>
-            <a:off x="8229600" y="2103120"/>
-            <a:ext cx="3108960" cy="3383280"/>
-          </a:xfrm>
-          <a:prstGeom prst="rect">
-            <a:avLst/>
-          </a:prstGeom>
-          <a:noFill/>
-          <a:ln/>
-        </p:spPr>
-        <p:txBody>
-          <a:bodyPr wrap="square" lIns="0" tIns="0" rIns="0" bIns="0" rtlCol="0" anchor="t"/>
-          <a:lstStyle/>
           <a:p>
             <a:pPr marL="342900" indent="-342900">
               <a:spcAft>
@@ -10513,7 +12865,7 @@
                 <a:ea typeface="Malgun Gothic" pitchFamily="34" charset="-122"/>
                 <a:cs typeface="Malgun Gothic" pitchFamily="34" charset="-120"/>
               </a:rPr>
-              <a:t>웹이 TypeScript가 아니라 JSX</a:t>
+              <a:t>문의 유형별 필수 항목</a:t>
             </a:r>
             <a:endParaRPr lang="en-US" sz="1600" dirty="0"/>
           </a:p>
@@ -10534,7 +12886,7 @@
                 <a:ea typeface="Malgun Gothic" pitchFamily="34" charset="-122"/>
                 <a:cs typeface="Malgun Gothic" pitchFamily="34" charset="-120"/>
               </a:rPr>
-              <a:t>첨부 운영 항목 미결(바이러스 검사, 보관·파기)</a:t>
+              <a:t>첨부·개인정보 정책</a:t>
             </a:r>
             <a:endParaRPr lang="en-US" sz="1600" dirty="0"/>
           </a:p>
@@ -10555,7 +12907,7 @@
                 <a:ea typeface="Malgun Gothic" pitchFamily="34" charset="-122"/>
                 <a:cs typeface="Malgun Gothic" pitchFamily="34" charset="-120"/>
               </a:rPr>
-              <a:t>두 저장소 API 규격이 다름</a:t>
+              <a:t>이메일·문자 발송</a:t>
             </a:r>
             <a:endParaRPr lang="en-US" sz="1600" dirty="0"/>
           </a:p>
@@ -10576,7 +12928,7 @@
                 <a:ea typeface="Malgun Gothic" pitchFamily="34" charset="-122"/>
                 <a:cs typeface="Malgun Gothic" pitchFamily="34" charset="-120"/>
               </a:rPr>
-              <a:t>단계 0 전에는 운영 로그인 불가</a:t>
+              <a:t>메디세이 계정 동기화</a:t>
             </a:r>
             <a:endParaRPr lang="en-US" sz="1600" dirty="0"/>
           </a:p>
